--- a/docs/522024320201_张继华_预答辩.pptx
+++ b/docs/522024320201_张继华_预答辩.pptx
@@ -5,10 +5,10 @@
     <p:sldMasterId id="2147483648" r:id="rId1"/>
   </p:sldMasterIdLst>
   <p:notesMasterIdLst>
-    <p:notesMasterId r:id="rId33"/>
+    <p:notesMasterId r:id="rId34"/>
   </p:notesMasterIdLst>
   <p:handoutMasterIdLst>
-    <p:handoutMasterId r:id="rId34"/>
+    <p:handoutMasterId r:id="rId35"/>
   </p:handoutMasterIdLst>
   <p:sldIdLst>
     <p:sldId id="257" r:id="rId2"/>
@@ -35,13 +35,14 @@
     <p:sldId id="333" r:id="rId23"/>
     <p:sldId id="335" r:id="rId24"/>
     <p:sldId id="336" r:id="rId25"/>
-    <p:sldId id="340" r:id="rId26"/>
-    <p:sldId id="341" r:id="rId27"/>
-    <p:sldId id="312" r:id="rId28"/>
-    <p:sldId id="314" r:id="rId29"/>
-    <p:sldId id="315" r:id="rId30"/>
-    <p:sldId id="317" r:id="rId31"/>
-    <p:sldId id="259" r:id="rId32"/>
+    <p:sldId id="342" r:id="rId26"/>
+    <p:sldId id="340" r:id="rId27"/>
+    <p:sldId id="341" r:id="rId28"/>
+    <p:sldId id="312" r:id="rId29"/>
+    <p:sldId id="314" r:id="rId30"/>
+    <p:sldId id="315" r:id="rId31"/>
+    <p:sldId id="317" r:id="rId32"/>
+    <p:sldId id="259" r:id="rId33"/>
   </p:sldIdLst>
   <p:sldSz cx="12192000" cy="6858000"/>
   <p:notesSz cx="7104063" cy="10234613"/>
@@ -247,7 +248,7 @@
           <a:p>
             <a:fld id="{0F9B84EA-7D68-4D60-9CB1-D50884785D1C}" type="datetimeFigureOut">
               <a:rPr lang="zh-CN" altLang="en-US" smtClean="0"/>
-              <a:t>2026/4/4</a:t>
+              <a:t>2026/4/7</a:t>
             </a:fld>
             <a:endParaRPr lang="zh-CN" altLang="en-US"/>
           </a:p>
@@ -413,7 +414,7 @@
           <a:p>
             <a:fld id="{D6C8D182-E4C8-4120-9249-FC9774456FFA}" type="datetimeFigureOut">
               <a:rPr lang="zh-CN" altLang="en-US" smtClean="0"/>
-              <a:t>2026/4/4</a:t>
+              <a:t>2026/4/7</a:t>
             </a:fld>
             <a:endParaRPr lang="zh-CN" altLang="en-US"/>
           </a:p>
@@ -964,6 +965,90 @@
   <p:cSld>
     <p:spTree>
       <p:nvGrpSpPr>
+        <p:cNvPr id="1" name=""/>
+        <p:cNvGrpSpPr/>
+        <p:nvPr/>
+      </p:nvGrpSpPr>
+      <p:grpSpPr>
+        <a:xfrm>
+          <a:off x="0" y="0"/>
+          <a:ext cx="0" cy="0"/>
+          <a:chOff x="0" y="0"/>
+          <a:chExt cx="0" cy="0"/>
+        </a:xfrm>
+      </p:grpSpPr>
+      <p:sp>
+        <p:nvSpPr>
+          <p:cNvPr id="2" name="幻灯片图像占位符 1"/>
+          <p:cNvSpPr>
+            <a:spLocks noGrp="1" noRot="1" noChangeAspect="1"/>
+          </p:cNvSpPr>
+          <p:nvPr>
+            <p:ph type="sldImg"/>
+          </p:nvPr>
+        </p:nvSpPr>
+        <p:spPr/>
+      </p:sp>
+      <p:sp>
+        <p:nvSpPr>
+          <p:cNvPr id="3" name="备注占位符 2"/>
+          <p:cNvSpPr>
+            <a:spLocks noGrp="1"/>
+          </p:cNvSpPr>
+          <p:nvPr>
+            <p:ph type="body" idx="1"/>
+          </p:nvPr>
+        </p:nvSpPr>
+        <p:spPr/>
+        <p:txBody>
+          <a:bodyPr/>
+          <a:lstStyle/>
+          <a:p>
+            <a:endParaRPr lang="zh-CN" altLang="en-US" dirty="0"/>
+          </a:p>
+        </p:txBody>
+      </p:sp>
+      <p:sp>
+        <p:nvSpPr>
+          <p:cNvPr id="4" name="灯片编号占位符 3"/>
+          <p:cNvSpPr>
+            <a:spLocks noGrp="1"/>
+          </p:cNvSpPr>
+          <p:nvPr>
+            <p:ph type="sldNum" sz="quarter" idx="5"/>
+          </p:nvPr>
+        </p:nvSpPr>
+        <p:spPr/>
+        <p:txBody>
+          <a:bodyPr/>
+          <a:lstStyle/>
+          <a:p>
+            <a:fld id="{85D0DACE-38E0-42D2-9336-2B707D34BC6D}" type="slidenum">
+              <a:rPr lang="zh-CN" altLang="en-US" smtClean="0"/>
+              <a:t>25</a:t>
+            </a:fld>
+            <a:endParaRPr lang="zh-CN" altLang="en-US"/>
+          </a:p>
+        </p:txBody>
+      </p:sp>
+    </p:spTree>
+    <p:extLst>
+      <p:ext uri="{BB962C8B-B14F-4D97-AF65-F5344CB8AC3E}">
+        <p14:creationId xmlns:p14="http://schemas.microsoft.com/office/powerpoint/2010/main" val="1335281856"/>
+      </p:ext>
+    </p:extLst>
+  </p:cSld>
+  <p:clrMapOvr>
+    <a:masterClrMapping/>
+  </p:clrMapOvr>
+</p:notes>
+</file>
+
+<file path=ppt/notesSlides/notesSlide13.xml><?xml version="1.0" encoding="utf-8"?>
+<p:notes xmlns:a="http://schemas.openxmlformats.org/drawingml/2006/main" xmlns:r="http://schemas.openxmlformats.org/officeDocument/2006/relationships" xmlns:p="http://schemas.openxmlformats.org/presentationml/2006/main">
+  <p:cSld>
+    <p:spTree>
+      <p:nvGrpSpPr>
         <p:cNvPr id="1" name="">
           <a:extLst>
             <a:ext uri="{FF2B5EF4-FFF2-40B4-BE49-F238E27FC236}">
@@ -1051,7 +1136,7 @@
           <a:p>
             <a:fld id="{7A7EAD02-4DC5-414D-B5AD-36725E286971}" type="slidenum">
               <a:rPr lang="zh-CN" altLang="en-US" smtClean="0"/>
-              <a:t>25</a:t>
+              <a:t>26</a:t>
             </a:fld>
             <a:endParaRPr lang="zh-CN" altLang="en-US"/>
           </a:p>
@@ -1070,7 +1155,7 @@
 </p:notes>
 </file>
 
-<file path=ppt/notesSlides/notesSlide13.xml><?xml version="1.0" encoding="utf-8"?>
+<file path=ppt/notesSlides/notesSlide14.xml><?xml version="1.0" encoding="utf-8"?>
 <p:notes xmlns:a="http://schemas.openxmlformats.org/drawingml/2006/main" xmlns:r="http://schemas.openxmlformats.org/officeDocument/2006/relationships" xmlns:p="http://schemas.openxmlformats.org/presentationml/2006/main">
   <p:cSld>
     <p:spTree>
@@ -1182,7 +1267,7 @@
           <a:p>
             <a:fld id="{85D0DACE-38E0-42D2-9336-2B707D34BC6D}" type="slidenum">
               <a:rPr lang="zh-CN" altLang="en-US" smtClean="0"/>
-              <a:t>26</a:t>
+              <a:t>27</a:t>
             </a:fld>
             <a:endParaRPr lang="zh-CN" altLang="en-US"/>
           </a:p>
@@ -1194,108 +1279,6 @@
         <p14:creationId xmlns:p14="http://schemas.microsoft.com/office/powerpoint/2010/main" val="1313071403"/>
       </p:ext>
     </p:extLst>
-  </p:cSld>
-  <p:clrMapOvr>
-    <a:masterClrMapping/>
-  </p:clrMapOvr>
-</p:notes>
-</file>
-
-<file path=ppt/notesSlides/notesSlide14.xml><?xml version="1.0" encoding="utf-8"?>
-<p:notes xmlns:a="http://schemas.openxmlformats.org/drawingml/2006/main" xmlns:r="http://schemas.openxmlformats.org/officeDocument/2006/relationships" xmlns:p="http://schemas.openxmlformats.org/presentationml/2006/main">
-  <p:cSld>
-    <p:spTree>
-      <p:nvGrpSpPr>
-        <p:cNvPr id="1" name=""/>
-        <p:cNvGrpSpPr/>
-        <p:nvPr/>
-      </p:nvGrpSpPr>
-      <p:grpSpPr>
-        <a:xfrm>
-          <a:off x="0" y="0"/>
-          <a:ext cx="0" cy="0"/>
-          <a:chOff x="0" y="0"/>
-          <a:chExt cx="0" cy="0"/>
-        </a:xfrm>
-      </p:grpSpPr>
-      <p:sp>
-        <p:nvSpPr>
-          <p:cNvPr id="2" name="幻灯片图像占位符 1"/>
-          <p:cNvSpPr>
-            <a:spLocks noGrp="1" noRot="1" noChangeAspect="1"/>
-          </p:cNvSpPr>
-          <p:nvPr>
-            <p:ph type="sldImg"/>
-          </p:nvPr>
-        </p:nvSpPr>
-        <p:spPr/>
-        <p:txBody>
-          <a:bodyPr/>
-          <a:lstStyle/>
-          <a:p>
-            <a:endParaRPr lang="zh-CN" altLang="en-US"/>
-          </a:p>
-        </p:txBody>
-      </p:sp>
-      <p:sp>
-        <p:nvSpPr>
-          <p:cNvPr id="3" name="备注占位符 2"/>
-          <p:cNvSpPr>
-            <a:spLocks noGrp="1"/>
-          </p:cNvSpPr>
-          <p:nvPr>
-            <p:ph type="body" idx="1"/>
-          </p:nvPr>
-        </p:nvSpPr>
-        <p:spPr/>
-        <p:txBody>
-          <a:bodyPr/>
-          <a:lstStyle/>
-          <a:p>
-            <a:pPr marL="0" marR="0" lvl="0" indent="0" algn="l" defTabSz="914400" rtl="0" eaLnBrk="1" fontAlgn="auto" latinLnBrk="0" hangingPunct="1">
-              <a:lnSpc>
-                <a:spcPct val="100000"/>
-              </a:lnSpc>
-              <a:spcBef>
-                <a:spcPts val="0"/>
-              </a:spcBef>
-              <a:spcAft>
-                <a:spcPts val="0"/>
-              </a:spcAft>
-              <a:buClrTx/>
-              <a:buSzTx/>
-              <a:buFontTx/>
-              <a:buNone/>
-              <a:defRPr/>
-            </a:pPr>
-            <a:endParaRPr lang="zh-CN" altLang="en-US" dirty="0"/>
-          </a:p>
-        </p:txBody>
-      </p:sp>
-      <p:sp>
-        <p:nvSpPr>
-          <p:cNvPr id="4" name="灯片编号占位符 3"/>
-          <p:cNvSpPr>
-            <a:spLocks noGrp="1"/>
-          </p:cNvSpPr>
-          <p:nvPr>
-            <p:ph type="sldNum" sz="quarter" idx="5"/>
-          </p:nvPr>
-        </p:nvSpPr>
-        <p:spPr/>
-        <p:txBody>
-          <a:bodyPr/>
-          <a:lstStyle/>
-          <a:p>
-            <a:fld id="{85D0DACE-38E0-42D2-9336-2B707D34BC6D}" type="slidenum">
-              <a:rPr lang="zh-CN" altLang="en-US" smtClean="0"/>
-              <a:t>27</a:t>
-            </a:fld>
-            <a:endParaRPr lang="zh-CN" altLang="en-US"/>
-          </a:p>
-        </p:txBody>
-      </p:sp>
-    </p:spTree>
   </p:cSld>
   <p:clrMapOvr>
     <a:masterClrMapping/>
@@ -1354,6 +1337,22 @@
           <a:bodyPr/>
           <a:lstStyle/>
           <a:p>
+            <a:pPr marL="0" marR="0" lvl="0" indent="0" algn="l" defTabSz="914400" rtl="0" eaLnBrk="1" fontAlgn="auto" latinLnBrk="0" hangingPunct="1">
+              <a:lnSpc>
+                <a:spcPct val="100000"/>
+              </a:lnSpc>
+              <a:spcBef>
+                <a:spcPts val="0"/>
+              </a:spcBef>
+              <a:spcAft>
+                <a:spcPts val="0"/>
+              </a:spcAft>
+              <a:buClrTx/>
+              <a:buSzTx/>
+              <a:buFontTx/>
+              <a:buNone/>
+              <a:defRPr/>
+            </a:pPr>
             <a:endParaRPr lang="zh-CN" altLang="en-US" dirty="0"/>
           </a:p>
         </p:txBody>
@@ -1468,11 +1467,6 @@
         </p:txBody>
       </p:sp>
     </p:spTree>
-    <p:extLst>
-      <p:ext uri="{BB962C8B-B14F-4D97-AF65-F5344CB8AC3E}">
-        <p14:creationId xmlns:p14="http://schemas.microsoft.com/office/powerpoint/2010/main" val="1111573764"/>
-      </p:ext>
-    </p:extLst>
   </p:cSld>
   <p:clrMapOvr>
     <a:masterClrMapping/>
@@ -1552,7 +1546,98 @@
           <a:p>
             <a:fld id="{85D0DACE-38E0-42D2-9336-2B707D34BC6D}" type="slidenum">
               <a:rPr lang="zh-CN" altLang="en-US" smtClean="0"/>
-              <a:t>31</a:t>
+              <a:t>30</a:t>
+            </a:fld>
+            <a:endParaRPr lang="zh-CN" altLang="en-US"/>
+          </a:p>
+        </p:txBody>
+      </p:sp>
+    </p:spTree>
+    <p:extLst>
+      <p:ext uri="{BB962C8B-B14F-4D97-AF65-F5344CB8AC3E}">
+        <p14:creationId xmlns:p14="http://schemas.microsoft.com/office/powerpoint/2010/main" val="1111573764"/>
+      </p:ext>
+    </p:extLst>
+  </p:cSld>
+  <p:clrMapOvr>
+    <a:masterClrMapping/>
+  </p:clrMapOvr>
+</p:notes>
+</file>
+
+<file path=ppt/notesSlides/notesSlide18.xml><?xml version="1.0" encoding="utf-8"?>
+<p:notes xmlns:a="http://schemas.openxmlformats.org/drawingml/2006/main" xmlns:r="http://schemas.openxmlformats.org/officeDocument/2006/relationships" xmlns:p="http://schemas.openxmlformats.org/presentationml/2006/main">
+  <p:cSld>
+    <p:spTree>
+      <p:nvGrpSpPr>
+        <p:cNvPr id="1" name=""/>
+        <p:cNvGrpSpPr/>
+        <p:nvPr/>
+      </p:nvGrpSpPr>
+      <p:grpSpPr>
+        <a:xfrm>
+          <a:off x="0" y="0"/>
+          <a:ext cx="0" cy="0"/>
+          <a:chOff x="0" y="0"/>
+          <a:chExt cx="0" cy="0"/>
+        </a:xfrm>
+      </p:grpSpPr>
+      <p:sp>
+        <p:nvSpPr>
+          <p:cNvPr id="2" name="幻灯片图像占位符 1"/>
+          <p:cNvSpPr>
+            <a:spLocks noGrp="1" noRot="1" noChangeAspect="1"/>
+          </p:cNvSpPr>
+          <p:nvPr>
+            <p:ph type="sldImg"/>
+          </p:nvPr>
+        </p:nvSpPr>
+        <p:spPr/>
+        <p:txBody>
+          <a:bodyPr/>
+          <a:lstStyle/>
+          <a:p>
+            <a:endParaRPr lang="zh-CN" altLang="en-US"/>
+          </a:p>
+        </p:txBody>
+      </p:sp>
+      <p:sp>
+        <p:nvSpPr>
+          <p:cNvPr id="3" name="备注占位符 2"/>
+          <p:cNvSpPr>
+            <a:spLocks noGrp="1"/>
+          </p:cNvSpPr>
+          <p:nvPr>
+            <p:ph type="body" idx="1"/>
+          </p:nvPr>
+        </p:nvSpPr>
+        <p:spPr/>
+        <p:txBody>
+          <a:bodyPr/>
+          <a:lstStyle/>
+          <a:p>
+            <a:endParaRPr lang="zh-CN" altLang="en-US" dirty="0"/>
+          </a:p>
+        </p:txBody>
+      </p:sp>
+      <p:sp>
+        <p:nvSpPr>
+          <p:cNvPr id="4" name="灯片编号占位符 3"/>
+          <p:cNvSpPr>
+            <a:spLocks noGrp="1"/>
+          </p:cNvSpPr>
+          <p:nvPr>
+            <p:ph type="sldNum" sz="quarter" idx="5"/>
+          </p:nvPr>
+        </p:nvSpPr>
+        <p:spPr/>
+        <p:txBody>
+          <a:bodyPr/>
+          <a:lstStyle/>
+          <a:p>
+            <a:fld id="{85D0DACE-38E0-42D2-9336-2B707D34BC6D}" type="slidenum">
+              <a:rPr lang="zh-CN" altLang="en-US" smtClean="0"/>
+              <a:t>32</a:t>
             </a:fld>
             <a:endParaRPr lang="zh-CN" altLang="en-US"/>
           </a:p>
@@ -2399,7 +2484,7 @@
           <a:p>
             <a:fld id="{1D6BF384-2131-4261-8852-16AD67A1D3BA}" type="datetime1">
               <a:rPr lang="zh-CN" altLang="en-US" smtClean="0"/>
-              <a:t>2026/4/5</a:t>
+              <a:t>2026/4/7</a:t>
             </a:fld>
             <a:endParaRPr lang="zh-CN" altLang="en-US"/>
           </a:p>
@@ -2550,7 +2635,7 @@
           <a:p>
             <a:fld id="{03EC4375-C1B8-4F0A-ABA0-C72BF26C219A}" type="datetime1">
               <a:rPr lang="zh-CN" altLang="en-US" smtClean="0"/>
-              <a:t>2026/4/5</a:t>
+              <a:t>2026/4/7</a:t>
             </a:fld>
             <a:endParaRPr lang="zh-CN" altLang="en-US"/>
           </a:p>
@@ -4408,7 +4493,7 @@
           <a:p>
             <a:fld id="{5566D5A8-B853-4D5C-BC79-49888D31E9CB}" type="datetime1">
               <a:rPr lang="zh-CN" altLang="en-US" smtClean="0"/>
-              <a:t>2026/4/5</a:t>
+              <a:t>2026/4/7</a:t>
             </a:fld>
             <a:endParaRPr lang="zh-CN" altLang="en-US"/>
           </a:p>
@@ -4668,7 +4753,7 @@
           <a:p>
             <a:fld id="{058F99AB-7763-4874-A7C4-F52B807A58E2}" type="datetime1">
               <a:rPr lang="zh-CN" altLang="en-US" smtClean="0"/>
-              <a:t>2026/4/5</a:t>
+              <a:t>2026/4/7</a:t>
             </a:fld>
             <a:endParaRPr lang="zh-CN" altLang="en-US"/>
           </a:p>
@@ -5057,7 +5142,7 @@
           <a:p>
             <a:fld id="{DD44B907-7164-4AA4-B855-102E540E104F}" type="datetime1">
               <a:rPr lang="zh-CN" altLang="en-US" smtClean="0"/>
-              <a:t>2026/4/5</a:t>
+              <a:t>2026/4/7</a:t>
             </a:fld>
             <a:endParaRPr lang="zh-CN" altLang="en-US"/>
           </a:p>
@@ -5436,7 +5521,7 @@
           <a:p>
             <a:fld id="{1DD7BB3E-BB98-4838-8A06-573E5D1F6D67}" type="datetime1">
               <a:rPr lang="zh-CN" altLang="en-US" smtClean="0"/>
-              <a:t>2026/4/5</a:t>
+              <a:t>2026/4/7</a:t>
             </a:fld>
             <a:endParaRPr lang="zh-CN" altLang="en-US"/>
           </a:p>
@@ -5577,7 +5662,7 @@
           <a:p>
             <a:fld id="{2CAA3E53-6679-4440-90E5-54634E5CEC5D}" type="datetime1">
               <a:rPr lang="zh-CN" altLang="en-US" smtClean="0"/>
-              <a:t>2026/4/5</a:t>
+              <a:t>2026/4/7</a:t>
             </a:fld>
             <a:endParaRPr lang="zh-CN" altLang="en-US"/>
           </a:p>
@@ -5683,7 +5768,7 @@
           <a:p>
             <a:fld id="{E540FE58-6264-408A-BF41-97FE7044882D}" type="datetime1">
               <a:rPr lang="zh-CN" altLang="en-US" smtClean="0"/>
-              <a:t>2026/4/5</a:t>
+              <a:t>2026/4/7</a:t>
             </a:fld>
             <a:endParaRPr lang="zh-CN" altLang="en-US"/>
           </a:p>
@@ -5955,7 +6040,7 @@
           <a:p>
             <a:fld id="{A79C0C9E-4E9E-44E1-8418-EFBDB1BC1470}" type="datetime1">
               <a:rPr lang="zh-CN" altLang="en-US" smtClean="0"/>
-              <a:t>2026/4/5</a:t>
+              <a:t>2026/4/7</a:t>
             </a:fld>
             <a:endParaRPr lang="zh-CN" altLang="en-US" dirty="0"/>
           </a:p>
@@ -6150,7 +6235,7 @@
           <a:p>
             <a:fld id="{6549BD08-13C4-4050-A2C5-7B25B3358C18}" type="datetime1">
               <a:rPr lang="zh-CN" altLang="en-US" smtClean="0"/>
-              <a:t>2026/4/5</a:t>
+              <a:t>2026/4/7</a:t>
             </a:fld>
             <a:endParaRPr lang="zh-CN" altLang="en-US"/>
           </a:p>
@@ -6377,7 +6462,7 @@
           <a:p>
             <a:fld id="{B5156480-3C65-45B2-92B6-461BE7863C6E}" type="datetime1">
               <a:rPr lang="zh-CN" altLang="en-US" smtClean="0"/>
-              <a:t>2026/4/5</a:t>
+              <a:t>2026/4/7</a:t>
             </a:fld>
             <a:endParaRPr lang="zh-CN" altLang="en-US" dirty="0"/>
           </a:p>
@@ -7110,8 +7195,8 @@
           </a:p>
         </p:txBody>
       </p:sp>
-      <mc:AlternateContent xmlns:mc="http://schemas.openxmlformats.org/markup-compatibility/2006">
-        <mc:Choice xmlns:a14="http://schemas.microsoft.com/office/drawing/2010/main" Requires="a14">
+      <mc:AlternateContent xmlns:mc="http://schemas.openxmlformats.org/markup-compatibility/2006" xmlns:a14="http://schemas.microsoft.com/office/drawing/2010/main">
+        <mc:Choice Requires="a14">
           <p:sp>
             <p:nvSpPr>
               <p:cNvPr id="3" name="AutoShape 3">
@@ -7583,7 +7668,7 @@
             </p:txBody>
           </p:sp>
         </mc:Choice>
-        <mc:Fallback>
+        <mc:Fallback xmlns="">
           <p:sp>
             <p:nvSpPr>
               <p:cNvPr id="3" name="AutoShape 3">
@@ -8594,8 +8679,8 @@
           </a:p>
         </p:txBody>
       </p:sp>
-      <mc:AlternateContent xmlns:mc="http://schemas.openxmlformats.org/markup-compatibility/2006">
-        <mc:Choice xmlns:a14="http://schemas.microsoft.com/office/drawing/2010/main" Requires="a14">
+      <mc:AlternateContent xmlns:mc="http://schemas.openxmlformats.org/markup-compatibility/2006" xmlns:a14="http://schemas.microsoft.com/office/drawing/2010/main">
+        <mc:Choice Requires="a14">
           <p:sp>
             <p:nvSpPr>
               <p:cNvPr id="8" name="AutoShape 8">
@@ -9116,7 +9201,7 @@
             </p:txBody>
           </p:sp>
         </mc:Choice>
-        <mc:Fallback>
+        <mc:Fallback xmlns="">
           <p:sp>
             <p:nvSpPr>
               <p:cNvPr id="8" name="AutoShape 8">
@@ -9768,8 +9853,8 @@
           </a:p>
         </p:txBody>
       </p:sp>
-      <mc:AlternateContent xmlns:mc="http://schemas.openxmlformats.org/markup-compatibility/2006">
-        <mc:Choice xmlns:a14="http://schemas.microsoft.com/office/drawing/2010/main" Requires="a14">
+      <mc:AlternateContent xmlns:mc="http://schemas.openxmlformats.org/markup-compatibility/2006" xmlns:a14="http://schemas.microsoft.com/office/drawing/2010/main">
+        <mc:Choice Requires="a14">
           <p:sp>
             <p:nvSpPr>
               <p:cNvPr id="12" name="AutoShape 12">
@@ -10304,7 +10389,7 @@
             </p:txBody>
           </p:sp>
         </mc:Choice>
-        <mc:Fallback>
+        <mc:Fallback xmlns="">
           <p:sp>
             <p:nvSpPr>
               <p:cNvPr id="12" name="AutoShape 12">
@@ -10354,8 +10439,8 @@
           </p:sp>
         </mc:Fallback>
       </mc:AlternateContent>
-      <mc:AlternateContent xmlns:mc="http://schemas.openxmlformats.org/markup-compatibility/2006">
-        <mc:Choice xmlns:a14="http://schemas.microsoft.com/office/drawing/2010/main" Requires="a14">
+      <mc:AlternateContent xmlns:mc="http://schemas.openxmlformats.org/markup-compatibility/2006" xmlns:a14="http://schemas.microsoft.com/office/drawing/2010/main">
+        <mc:Choice Requires="a14">
           <p:sp>
             <p:nvSpPr>
               <p:cNvPr id="13" name="AutoShape 13">
@@ -10652,7 +10737,7 @@
                         <a:solidFill>
                           <a:srgbClr val="7030A0"/>
                         </a:solidFill>
-                        <a:latin typeface="+mj-ea"/>
+                        <a:latin typeface="Cambria Math" panose="02040503050406030204" pitchFamily="18" charset="0"/>
                         <a:ea typeface="+mj-ea"/>
                         <a:cs typeface="Roboto"/>
                         <a:sym typeface="Roboto"/>
@@ -10692,7 +10777,7 @@
                         <a:solidFill>
                           <a:srgbClr val="7030A0"/>
                         </a:solidFill>
-                        <a:latin typeface="+mj-ea"/>
+                        <a:latin typeface="Cambria Math" panose="02040503050406030204" pitchFamily="18" charset="0"/>
                         <a:ea typeface="+mj-ea"/>
                         <a:cs typeface="Roboto"/>
                         <a:sym typeface="Roboto"/>
@@ -10744,7 +10829,7 @@
                         <a:solidFill>
                           <a:srgbClr val="7030A0"/>
                         </a:solidFill>
-                        <a:latin typeface="+mj-ea"/>
+                        <a:latin typeface="Cambria Math" panose="02040503050406030204" pitchFamily="18" charset="0"/>
                         <a:ea typeface="+mj-ea"/>
                         <a:cs typeface="Roboto"/>
                         <a:sym typeface="Roboto"/>
@@ -10789,7 +10874,7 @@
             </p:txBody>
           </p:sp>
         </mc:Choice>
-        <mc:Fallback>
+        <mc:Fallback xmlns="">
           <p:sp>
             <p:nvSpPr>
               <p:cNvPr id="13" name="AutoShape 13">
@@ -14282,8 +14367,8 @@
           </a:p>
         </p:txBody>
       </p:sp>
-      <mc:AlternateContent xmlns:mc="http://schemas.openxmlformats.org/markup-compatibility/2006">
-        <mc:Choice xmlns:a14="http://schemas.microsoft.com/office/drawing/2010/main" Requires="a14">
+      <mc:AlternateContent xmlns:mc="http://schemas.openxmlformats.org/markup-compatibility/2006" xmlns:a14="http://schemas.microsoft.com/office/drawing/2010/main">
+        <mc:Choice Requires="a14">
           <p:sp>
             <p:nvSpPr>
               <p:cNvPr id="12" name="AutoShape 12">
@@ -14657,7 +14742,7 @@
             </p:txBody>
           </p:sp>
         </mc:Choice>
-        <mc:Fallback>
+        <mc:Fallback xmlns="">
           <p:sp>
             <p:nvSpPr>
               <p:cNvPr id="12" name="AutoShape 12">
@@ -14707,8 +14792,8 @@
           </p:sp>
         </mc:Fallback>
       </mc:AlternateContent>
-      <mc:AlternateContent xmlns:mc="http://schemas.openxmlformats.org/markup-compatibility/2006">
-        <mc:Choice xmlns:a14="http://schemas.microsoft.com/office/drawing/2010/main" Requires="a14">
+      <mc:AlternateContent xmlns:mc="http://schemas.openxmlformats.org/markup-compatibility/2006" xmlns:a14="http://schemas.microsoft.com/office/drawing/2010/main">
+        <mc:Choice Requires="a14">
           <p:sp>
             <p:nvSpPr>
               <p:cNvPr id="13" name="AutoShape 13">
@@ -15398,7 +15483,7 @@
             </p:txBody>
           </p:sp>
         </mc:Choice>
-        <mc:Fallback>
+        <mc:Fallback xmlns="">
           <p:sp>
             <p:nvSpPr>
               <p:cNvPr id="13" name="AutoShape 13">
@@ -15727,8 +15812,8 @@
           </a:p>
         </p:txBody>
       </p:sp>
-      <mc:AlternateContent xmlns:mc="http://schemas.openxmlformats.org/markup-compatibility/2006">
-        <mc:Choice xmlns:a14="http://schemas.microsoft.com/office/drawing/2010/main" Requires="a14">
+      <mc:AlternateContent xmlns:mc="http://schemas.openxmlformats.org/markup-compatibility/2006" xmlns:a14="http://schemas.microsoft.com/office/drawing/2010/main">
+        <mc:Choice Requires="a14">
           <p:sp>
             <p:nvSpPr>
               <p:cNvPr id="15" name="AutoShape 15">
@@ -16114,7 +16199,7 @@
             </p:txBody>
           </p:sp>
         </mc:Choice>
-        <mc:Fallback>
+        <mc:Fallback xmlns="">
           <p:sp>
             <p:nvSpPr>
               <p:cNvPr id="15" name="AutoShape 15">
@@ -16164,8 +16249,8 @@
           </p:sp>
         </mc:Fallback>
       </mc:AlternateContent>
-      <mc:AlternateContent xmlns:mc="http://schemas.openxmlformats.org/markup-compatibility/2006">
-        <mc:Choice xmlns:a14="http://schemas.microsoft.com/office/drawing/2010/main" Requires="a14">
+      <mc:AlternateContent xmlns:mc="http://schemas.openxmlformats.org/markup-compatibility/2006" xmlns:a14="http://schemas.microsoft.com/office/drawing/2010/main">
+        <mc:Choice Requires="a14">
           <p:sp>
             <p:nvSpPr>
               <p:cNvPr id="16" name="AutoShape 16">
@@ -16965,7 +17050,7 @@
             </p:txBody>
           </p:sp>
         </mc:Choice>
-        <mc:Fallback>
+        <mc:Fallback xmlns="">
           <p:sp>
             <p:nvSpPr>
               <p:cNvPr id="16" name="AutoShape 16">
@@ -20629,8 +20714,8 @@
           </a:p>
         </p:txBody>
       </p:sp>
-      <mc:AlternateContent xmlns:mc="http://schemas.openxmlformats.org/markup-compatibility/2006">
-        <mc:Choice xmlns:a14="http://schemas.microsoft.com/office/drawing/2010/main" Requires="a14">
+      <mc:AlternateContent xmlns:mc="http://schemas.openxmlformats.org/markup-compatibility/2006" xmlns:a14="http://schemas.microsoft.com/office/drawing/2010/main">
+        <mc:Choice Requires="a14">
           <p:sp>
             <p:nvSpPr>
               <p:cNvPr id="10" name="文本框 9">
@@ -20668,31 +20753,31 @@
                     <m:oMath xmlns:m="http://schemas.openxmlformats.org/officeDocument/2006/math">
                       <m:r>
                         <a:rPr lang="en-US" altLang="zh-CN" i="1" dirty="0" smtClean="0">
-                          <a:latin typeface="+mn-ea"/>
+                          <a:latin typeface="Cambria Math" panose="02040503050406030204" pitchFamily="18" charset="0"/>
                         </a:rPr>
                         <m:t>𝐼𝑁𝐼𝑇</m:t>
                       </m:r>
                       <m:r>
                         <a:rPr lang="en-US" altLang="zh-CN" i="1" dirty="0" smtClean="0">
-                          <a:latin typeface="+mn-ea"/>
+                          <a:latin typeface="Cambria Math" panose="02040503050406030204" pitchFamily="18" charset="0"/>
                         </a:rPr>
                         <m:t> ∧</m:t>
                       </m:r>
                       <m:r>
                         <a:rPr lang="en-US" altLang="zh-CN" i="1" dirty="0" smtClean="0">
-                          <a:latin typeface="+mn-ea"/>
+                          <a:latin typeface="Cambria Math" panose="02040503050406030204" pitchFamily="18" charset="0"/>
                         </a:rPr>
                         <m:t>𝑁𝐸𝑋𝑇</m:t>
                       </m:r>
                       <m:r>
                         <a:rPr lang="en-US" altLang="zh-CN" i="1" dirty="0" smtClean="0">
-                          <a:latin typeface="+mn-ea"/>
+                          <a:latin typeface="Cambria Math" panose="02040503050406030204" pitchFamily="18" charset="0"/>
                         </a:rPr>
                         <m:t>⇒</m:t>
                       </m:r>
                       <m:r>
                         <a:rPr lang="en-US" altLang="zh-CN" i="1" dirty="0">
-                          <a:latin typeface="+mn-ea"/>
+                          <a:latin typeface="Cambria Math" panose="02040503050406030204" pitchFamily="18" charset="0"/>
                         </a:rPr>
                         <m:t>𝐼𝑁𝑉𝑅𝐼𝐴𝑁𝑇</m:t>
                       </m:r>
@@ -20706,7 +20791,7 @@
             </p:txBody>
           </p:sp>
         </mc:Choice>
-        <mc:Fallback>
+        <mc:Fallback xmlns="">
           <p:sp>
             <p:nvSpPr>
               <p:cNvPr id="10" name="文本框 9">
@@ -20799,8 +20884,8 @@
           </a:p>
         </p:txBody>
       </p:sp>
-      <mc:AlternateContent xmlns:mc="http://schemas.openxmlformats.org/markup-compatibility/2006">
-        <mc:Choice xmlns:a14="http://schemas.microsoft.com/office/drawing/2010/main" Requires="a14">
+      <mc:AlternateContent xmlns:mc="http://schemas.openxmlformats.org/markup-compatibility/2006" xmlns:a14="http://schemas.microsoft.com/office/drawing/2010/main">
+        <mc:Choice Requires="a14">
           <p:sp>
             <p:nvSpPr>
               <p:cNvPr id="12" name="文本框 11">
@@ -20868,7 +20953,7 @@
             </p:txBody>
           </p:sp>
         </mc:Choice>
-        <mc:Fallback>
+        <mc:Fallback xmlns="">
           <p:sp>
             <p:nvSpPr>
               <p:cNvPr id="12" name="文本框 11">
@@ -27054,8 +27139,8 @@
           </a:p>
         </p:txBody>
       </p:sp>
-      <mc:AlternateContent xmlns:mc="http://schemas.openxmlformats.org/markup-compatibility/2006">
-        <mc:Choice xmlns:a14="http://schemas.microsoft.com/office/drawing/2010/main" Requires="a14">
+      <mc:AlternateContent xmlns:mc="http://schemas.openxmlformats.org/markup-compatibility/2006" xmlns:a14="http://schemas.microsoft.com/office/drawing/2010/main">
+        <mc:Choice Requires="a14">
           <p:sp>
             <p:nvSpPr>
               <p:cNvPr id="18" name="AutoShape 18">
@@ -27803,7 +27888,7 @@
             </p:txBody>
           </p:sp>
         </mc:Choice>
-        <mc:Fallback>
+        <mc:Fallback xmlns="">
           <p:sp>
             <p:nvSpPr>
               <p:cNvPr id="18" name="AutoShape 18">
@@ -28420,36 +28505,6 @@
           </a:p>
         </p:txBody>
       </p:sp>
-      <p:pic>
-        <p:nvPicPr>
-          <p:cNvPr id="4" name="图片 3">
-            <a:extLst>
-              <a:ext uri="{FF2B5EF4-FFF2-40B4-BE49-F238E27FC236}">
-                <a16:creationId xmlns:a16="http://schemas.microsoft.com/office/drawing/2014/main" id="{218623BA-3CF1-FC32-103E-186C024AC8E2}"/>
-              </a:ext>
-            </a:extLst>
-          </p:cNvPr>
-          <p:cNvPicPr>
-            <a:picLocks noChangeAspect="1"/>
-          </p:cNvPicPr>
-          <p:nvPr/>
-        </p:nvPicPr>
-        <p:blipFill>
-          <a:blip r:embed="rId2"/>
-          <a:stretch>
-            <a:fillRect/>
-          </a:stretch>
-        </p:blipFill>
-        <p:spPr>
-          <a:xfrm>
-            <a:off x="3562349" y="1124655"/>
-            <a:ext cx="5067302" cy="5108752"/>
-          </a:xfrm>
-          <a:prstGeom prst="rect">
-            <a:avLst/>
-          </a:prstGeom>
-        </p:spPr>
-      </p:pic>
       <p:sp>
         <p:nvSpPr>
           <p:cNvPr id="5" name="矩形 4">
@@ -28503,6 +28558,36 @@
           </a:p>
         </p:txBody>
       </p:sp>
+      <p:pic>
+        <p:nvPicPr>
+          <p:cNvPr id="8" name="图片 7">
+            <a:extLst>
+              <a:ext uri="{FF2B5EF4-FFF2-40B4-BE49-F238E27FC236}">
+                <a16:creationId xmlns:a16="http://schemas.microsoft.com/office/drawing/2014/main" id="{CA7D8A77-ECB3-D4FC-BC6D-CAAA5F806A36}"/>
+              </a:ext>
+            </a:extLst>
+          </p:cNvPr>
+          <p:cNvPicPr>
+            <a:picLocks noChangeAspect="1"/>
+          </p:cNvPicPr>
+          <p:nvPr/>
+        </p:nvPicPr>
+        <p:blipFill>
+          <a:blip r:embed="rId2"/>
+          <a:stretch>
+            <a:fillRect/>
+          </a:stretch>
+        </p:blipFill>
+        <p:spPr>
+          <a:xfrm>
+            <a:off x="2747963" y="857694"/>
+            <a:ext cx="6596062" cy="5904386"/>
+          </a:xfrm>
+          <a:prstGeom prst="rect">
+            <a:avLst/>
+          </a:prstGeom>
+        </p:spPr>
+      </p:pic>
     </p:spTree>
     <p:extLst>
       <p:ext uri="{BB962C8B-B14F-4D97-AF65-F5344CB8AC3E}">
@@ -28525,6 +28610,102 @@
 </file>
 
 <file path=ppt/slides/slide25.xml><?xml version="1.0" encoding="utf-8"?>
+<p:sld xmlns:a="http://schemas.openxmlformats.org/drawingml/2006/main" xmlns:r="http://schemas.openxmlformats.org/officeDocument/2006/relationships" xmlns:p="http://schemas.openxmlformats.org/presentationml/2006/main">
+  <p:cSld>
+    <p:spTree>
+      <p:nvGrpSpPr>
+        <p:cNvPr id="1" name=""/>
+        <p:cNvGrpSpPr/>
+        <p:nvPr/>
+      </p:nvGrpSpPr>
+      <p:grpSpPr>
+        <a:xfrm>
+          <a:off x="0" y="0"/>
+          <a:ext cx="0" cy="0"/>
+          <a:chOff x="0" y="0"/>
+          <a:chExt cx="0" cy="0"/>
+        </a:xfrm>
+      </p:grpSpPr>
+      <p:sp>
+        <p:nvSpPr>
+          <p:cNvPr id="2" name="文本占位符 1">
+            <a:extLst>
+              <a:ext uri="{FF2B5EF4-FFF2-40B4-BE49-F238E27FC236}">
+                <a16:creationId xmlns:a16="http://schemas.microsoft.com/office/drawing/2014/main" id="{669044B7-A8C9-7164-60A0-FA9152F8F304}"/>
+              </a:ext>
+            </a:extLst>
+          </p:cNvPr>
+          <p:cNvSpPr>
+            <a:spLocks noGrp="1"/>
+          </p:cNvSpPr>
+          <p:nvPr>
+            <p:ph type="body" sz="quarter" idx="13"/>
+          </p:nvPr>
+        </p:nvSpPr>
+        <p:spPr/>
+        <p:txBody>
+          <a:bodyPr/>
+          <a:lstStyle/>
+          <a:p>
+            <a:r>
+              <a:rPr lang="zh-CN" altLang="en-US" dirty="0"/>
+              <a:t>客户端池</a:t>
+            </a:r>
+          </a:p>
+        </p:txBody>
+      </p:sp>
+      <p:pic>
+        <p:nvPicPr>
+          <p:cNvPr id="6" name="图片 5">
+            <a:extLst>
+              <a:ext uri="{FF2B5EF4-FFF2-40B4-BE49-F238E27FC236}">
+                <a16:creationId xmlns:a16="http://schemas.microsoft.com/office/drawing/2014/main" id="{943A4970-0F19-1B84-42A5-29BEEE34972F}"/>
+              </a:ext>
+            </a:extLst>
+          </p:cNvPr>
+          <p:cNvPicPr>
+            <a:picLocks noChangeAspect="1"/>
+          </p:cNvPicPr>
+          <p:nvPr/>
+        </p:nvPicPr>
+        <p:blipFill>
+          <a:blip r:embed="rId3"/>
+          <a:stretch>
+            <a:fillRect/>
+          </a:stretch>
+        </p:blipFill>
+        <p:spPr>
+          <a:xfrm>
+            <a:off x="2805111" y="938527"/>
+            <a:ext cx="6581778" cy="4980946"/>
+          </a:xfrm>
+          <a:prstGeom prst="rect">
+            <a:avLst/>
+          </a:prstGeom>
+        </p:spPr>
+      </p:pic>
+    </p:spTree>
+    <p:extLst>
+      <p:ext uri="{BB962C8B-B14F-4D97-AF65-F5344CB8AC3E}">
+        <p14:creationId xmlns:p14="http://schemas.microsoft.com/office/powerpoint/2010/main" val="4054426781"/>
+      </p:ext>
+    </p:extLst>
+  </p:cSld>
+  <p:clrMapOvr>
+    <a:masterClrMapping/>
+  </p:clrMapOvr>
+  <mc:AlternateContent xmlns:mc="http://schemas.openxmlformats.org/markup-compatibility/2006" xmlns:p14="http://schemas.microsoft.com/office/powerpoint/2010/main">
+    <mc:Choice Requires="p14">
+      <p:transition p14:dur="10"/>
+    </mc:Choice>
+    <mc:Fallback xmlns="">
+      <p:transition/>
+    </mc:Fallback>
+  </mc:AlternateContent>
+</p:sld>
+</file>
+
+<file path=ppt/slides/slide26.xml><?xml version="1.0" encoding="utf-8"?>
 <p:sld xmlns:a="http://schemas.openxmlformats.org/drawingml/2006/main" xmlns:r="http://schemas.openxmlformats.org/officeDocument/2006/relationships" xmlns:p="http://schemas.openxmlformats.org/presentationml/2006/main">
   <p:cSld>
     <p:spTree>
@@ -28994,18 +29175,18 @@
   <p:clrMapOvr>
     <a:masterClrMapping/>
   </p:clrMapOvr>
-  <mc:AlternateContent xmlns:mc="http://schemas.openxmlformats.org/markup-compatibility/2006">
-    <mc:Choice xmlns:p14="http://schemas.microsoft.com/office/powerpoint/2010/main" Requires="p14">
+  <mc:AlternateContent xmlns:mc="http://schemas.openxmlformats.org/markup-compatibility/2006" xmlns:p14="http://schemas.microsoft.com/office/powerpoint/2010/main">
+    <mc:Choice Requires="p14">
       <p:transition p14:dur="10"/>
     </mc:Choice>
-    <mc:Fallback>
+    <mc:Fallback xmlns="">
       <p:transition/>
     </mc:Fallback>
   </mc:AlternateContent>
 </p:sld>
 </file>
 
-<file path=ppt/slides/slide26.xml><?xml version="1.0" encoding="utf-8"?>
+<file path=ppt/slides/slide27.xml><?xml version="1.0" encoding="utf-8"?>
 <p:sld xmlns:a="http://schemas.openxmlformats.org/drawingml/2006/main" xmlns:r="http://schemas.openxmlformats.org/officeDocument/2006/relationships" xmlns:p="http://schemas.openxmlformats.org/presentationml/2006/main">
   <p:cSld>
     <p:spTree>
@@ -29216,11 +29397,11 @@
   <p:clrMapOvr>
     <a:masterClrMapping/>
   </p:clrMapOvr>
-  <mc:AlternateContent xmlns:mc="http://schemas.openxmlformats.org/markup-compatibility/2006">
-    <mc:Choice xmlns:p14="http://schemas.microsoft.com/office/powerpoint/2010/main" Requires="p14">
+  <mc:AlternateContent xmlns:mc="http://schemas.openxmlformats.org/markup-compatibility/2006" xmlns:p14="http://schemas.microsoft.com/office/powerpoint/2010/main">
+    <mc:Choice Requires="p14">
       <p:transition p14:dur="10"/>
     </mc:Choice>
-    <mc:Fallback>
+    <mc:Fallback xmlns="">
       <p:transition/>
     </mc:Fallback>
   </mc:AlternateContent>
@@ -29305,7 +29486,7 @@
 </p:sld>
 </file>
 
-<file path=ppt/slides/slide27.xml><?xml version="1.0" encoding="utf-8"?>
+<file path=ppt/slides/slide28.xml><?xml version="1.0" encoding="utf-8"?>
 <p:sld xmlns:a="http://schemas.openxmlformats.org/drawingml/2006/main" xmlns:r="http://schemas.openxmlformats.org/officeDocument/2006/relationships" xmlns:p="http://schemas.openxmlformats.org/presentationml/2006/main">
   <p:cSld>
     <p:spTree>
@@ -29553,7 +29734,7 @@
 </p:sld>
 </file>
 
-<file path=ppt/slides/slide28.xml><?xml version="1.0" encoding="utf-8"?>
+<file path=ppt/slides/slide29.xml><?xml version="1.0" encoding="utf-8"?>
 <p:sld xmlns:a="http://schemas.openxmlformats.org/drawingml/2006/main" xmlns:r="http://schemas.openxmlformats.org/officeDocument/2006/relationships" xmlns:p="http://schemas.openxmlformats.org/presentationml/2006/main">
   <p:cSld>
     <p:spTree>
@@ -30105,3141 +30286,6 @@
 </p:sld>
 </file>
 
-<file path=ppt/slides/slide29.xml><?xml version="1.0" encoding="utf-8"?>
-<p:sld xmlns:a="http://schemas.openxmlformats.org/drawingml/2006/main" xmlns:r="http://schemas.openxmlformats.org/officeDocument/2006/relationships" xmlns:p="http://schemas.openxmlformats.org/presentationml/2006/main">
-  <p:cSld>
-    <p:spTree>
-      <p:nvGrpSpPr>
-        <p:cNvPr id="1" name=""/>
-        <p:cNvGrpSpPr/>
-        <p:nvPr/>
-      </p:nvGrpSpPr>
-      <p:grpSpPr>
-        <a:xfrm>
-          <a:off x="0" y="0"/>
-          <a:ext cx="0" cy="0"/>
-          <a:chOff x="0" y="0"/>
-          <a:chExt cx="0" cy="0"/>
-        </a:xfrm>
-      </p:grpSpPr>
-      <p:sp>
-        <p:nvSpPr>
-          <p:cNvPr id="31" name="AutoShape 4">
-            <a:extLst>
-              <a:ext uri="{FF2B5EF4-FFF2-40B4-BE49-F238E27FC236}">
-                <a16:creationId xmlns:a16="http://schemas.microsoft.com/office/drawing/2014/main" id="{18A93500-0495-A345-384D-C2E4AF003681}"/>
-              </a:ext>
-            </a:extLst>
-          </p:cNvPr>
-          <p:cNvSpPr/>
-          <p:nvPr/>
-        </p:nvSpPr>
-        <p:spPr>
-          <a:xfrm>
-            <a:off x="4445000" y="1834356"/>
-            <a:ext cx="3302000" cy="3048000"/>
-          </a:xfrm>
-          <a:prstGeom prst="roundRect">
-            <a:avLst>
-              <a:gd name="adj" fmla="val 4166"/>
-            </a:avLst>
-          </a:prstGeom>
-          <a:solidFill>
-            <a:schemeClr val="accent1">
-              <a:lumMod val="50000"/>
-            </a:schemeClr>
-          </a:solidFill>
-          <a:ln w="12700" cap="flat" cmpd="sng">
-            <a:solidFill>
-              <a:srgbClr val="64FFDA">
-                <a:alpha val="30000"/>
-              </a:srgbClr>
-            </a:solidFill>
-            <a:prstDash val="solid"/>
-            <a:round/>
-          </a:ln>
-        </p:spPr>
-        <p:txBody>
-          <a:bodyPr vert="horz" wrap="square" lIns="63500" tIns="63500" rIns="63500" bIns="63500" rtlCol="0" anchor="ctr"/>
-          <a:lstStyle>
-            <a:defPPr marR="0" lvl="0" algn="l" rtl="0">
-              <a:lnSpc>
-                <a:spcPct val="100000"/>
-              </a:lnSpc>
-              <a:spcBef>
-                <a:spcPts val="0"/>
-              </a:spcBef>
-              <a:spcAft>
-                <a:spcPts val="0"/>
-              </a:spcAft>
-            </a:defPPr>
-            <a:lvl1pPr marR="0" lvl="0" algn="l" rtl="0">
-              <a:lnSpc>
-                <a:spcPct val="100000"/>
-              </a:lnSpc>
-              <a:spcBef>
-                <a:spcPts val="0"/>
-              </a:spcBef>
-              <a:spcAft>
-                <a:spcPts val="0"/>
-              </a:spcAft>
-              <a:buClr>
-                <a:srgbClr val="000000"/>
-              </a:buClr>
-              <a:buFont typeface="Arial"/>
-              <a:defRPr sz="1400" b="0" i="0" u="none" strike="noStrike" cap="none">
-                <a:solidFill>
-                  <a:srgbClr val="000000"/>
-                </a:solidFill>
-                <a:latin typeface="Arial"/>
-                <a:ea typeface="Arial"/>
-                <a:cs typeface="Arial"/>
-                <a:sym typeface="Arial"/>
-              </a:defRPr>
-            </a:lvl1pPr>
-            <a:lvl2pPr marR="0" lvl="1" algn="l" rtl="0">
-              <a:lnSpc>
-                <a:spcPct val="100000"/>
-              </a:lnSpc>
-              <a:spcBef>
-                <a:spcPts val="0"/>
-              </a:spcBef>
-              <a:spcAft>
-                <a:spcPts val="0"/>
-              </a:spcAft>
-              <a:buClr>
-                <a:srgbClr val="000000"/>
-              </a:buClr>
-              <a:buFont typeface="Arial"/>
-              <a:defRPr sz="1400" b="0" i="0" u="none" strike="noStrike" cap="none">
-                <a:solidFill>
-                  <a:srgbClr val="000000"/>
-                </a:solidFill>
-                <a:latin typeface="Arial"/>
-                <a:ea typeface="Arial"/>
-                <a:cs typeface="Arial"/>
-                <a:sym typeface="Arial"/>
-              </a:defRPr>
-            </a:lvl2pPr>
-            <a:lvl3pPr marR="0" lvl="2" algn="l" rtl="0">
-              <a:lnSpc>
-                <a:spcPct val="100000"/>
-              </a:lnSpc>
-              <a:spcBef>
-                <a:spcPts val="0"/>
-              </a:spcBef>
-              <a:spcAft>
-                <a:spcPts val="0"/>
-              </a:spcAft>
-              <a:buClr>
-                <a:srgbClr val="000000"/>
-              </a:buClr>
-              <a:buFont typeface="Arial"/>
-              <a:defRPr sz="1400" b="0" i="0" u="none" strike="noStrike" cap="none">
-                <a:solidFill>
-                  <a:srgbClr val="000000"/>
-                </a:solidFill>
-                <a:latin typeface="Arial"/>
-                <a:ea typeface="Arial"/>
-                <a:cs typeface="Arial"/>
-                <a:sym typeface="Arial"/>
-              </a:defRPr>
-            </a:lvl3pPr>
-            <a:lvl4pPr marR="0" lvl="3" algn="l" rtl="0">
-              <a:lnSpc>
-                <a:spcPct val="100000"/>
-              </a:lnSpc>
-              <a:spcBef>
-                <a:spcPts val="0"/>
-              </a:spcBef>
-              <a:spcAft>
-                <a:spcPts val="0"/>
-              </a:spcAft>
-              <a:buClr>
-                <a:srgbClr val="000000"/>
-              </a:buClr>
-              <a:buFont typeface="Arial"/>
-              <a:defRPr sz="1400" b="0" i="0" u="none" strike="noStrike" cap="none">
-                <a:solidFill>
-                  <a:srgbClr val="000000"/>
-                </a:solidFill>
-                <a:latin typeface="Arial"/>
-                <a:ea typeface="Arial"/>
-                <a:cs typeface="Arial"/>
-                <a:sym typeface="Arial"/>
-              </a:defRPr>
-            </a:lvl4pPr>
-            <a:lvl5pPr marR="0" lvl="4" algn="l" rtl="0">
-              <a:lnSpc>
-                <a:spcPct val="100000"/>
-              </a:lnSpc>
-              <a:spcBef>
-                <a:spcPts val="0"/>
-              </a:spcBef>
-              <a:spcAft>
-                <a:spcPts val="0"/>
-              </a:spcAft>
-              <a:buClr>
-                <a:srgbClr val="000000"/>
-              </a:buClr>
-              <a:buFont typeface="Arial"/>
-              <a:defRPr sz="1400" b="0" i="0" u="none" strike="noStrike" cap="none">
-                <a:solidFill>
-                  <a:srgbClr val="000000"/>
-                </a:solidFill>
-                <a:latin typeface="Arial"/>
-                <a:ea typeface="Arial"/>
-                <a:cs typeface="Arial"/>
-                <a:sym typeface="Arial"/>
-              </a:defRPr>
-            </a:lvl5pPr>
-            <a:lvl6pPr marR="0" lvl="5" algn="l" rtl="0">
-              <a:lnSpc>
-                <a:spcPct val="100000"/>
-              </a:lnSpc>
-              <a:spcBef>
-                <a:spcPts val="0"/>
-              </a:spcBef>
-              <a:spcAft>
-                <a:spcPts val="0"/>
-              </a:spcAft>
-              <a:buClr>
-                <a:srgbClr val="000000"/>
-              </a:buClr>
-              <a:buFont typeface="Arial"/>
-              <a:defRPr sz="1400" b="0" i="0" u="none" strike="noStrike" cap="none">
-                <a:solidFill>
-                  <a:srgbClr val="000000"/>
-                </a:solidFill>
-                <a:latin typeface="Arial"/>
-                <a:ea typeface="Arial"/>
-                <a:cs typeface="Arial"/>
-                <a:sym typeface="Arial"/>
-              </a:defRPr>
-            </a:lvl6pPr>
-            <a:lvl7pPr marR="0" lvl="6" algn="l" rtl="0">
-              <a:lnSpc>
-                <a:spcPct val="100000"/>
-              </a:lnSpc>
-              <a:spcBef>
-                <a:spcPts val="0"/>
-              </a:spcBef>
-              <a:spcAft>
-                <a:spcPts val="0"/>
-              </a:spcAft>
-              <a:buClr>
-                <a:srgbClr val="000000"/>
-              </a:buClr>
-              <a:buFont typeface="Arial"/>
-              <a:defRPr sz="1400" b="0" i="0" u="none" strike="noStrike" cap="none">
-                <a:solidFill>
-                  <a:srgbClr val="000000"/>
-                </a:solidFill>
-                <a:latin typeface="Arial"/>
-                <a:ea typeface="Arial"/>
-                <a:cs typeface="Arial"/>
-                <a:sym typeface="Arial"/>
-              </a:defRPr>
-            </a:lvl7pPr>
-            <a:lvl8pPr marR="0" lvl="7" algn="l" rtl="0">
-              <a:lnSpc>
-                <a:spcPct val="100000"/>
-              </a:lnSpc>
-              <a:spcBef>
-                <a:spcPts val="0"/>
-              </a:spcBef>
-              <a:spcAft>
-                <a:spcPts val="0"/>
-              </a:spcAft>
-              <a:buClr>
-                <a:srgbClr val="000000"/>
-              </a:buClr>
-              <a:buFont typeface="Arial"/>
-              <a:defRPr sz="1400" b="0" i="0" u="none" strike="noStrike" cap="none">
-                <a:solidFill>
-                  <a:srgbClr val="000000"/>
-                </a:solidFill>
-                <a:latin typeface="Arial"/>
-                <a:ea typeface="Arial"/>
-                <a:cs typeface="Arial"/>
-                <a:sym typeface="Arial"/>
-              </a:defRPr>
-            </a:lvl8pPr>
-            <a:lvl9pPr marR="0" lvl="8" algn="l" rtl="0">
-              <a:lnSpc>
-                <a:spcPct val="100000"/>
-              </a:lnSpc>
-              <a:spcBef>
-                <a:spcPts val="0"/>
-              </a:spcBef>
-              <a:spcAft>
-                <a:spcPts val="0"/>
-              </a:spcAft>
-              <a:buClr>
-                <a:srgbClr val="000000"/>
-              </a:buClr>
-              <a:buFont typeface="Arial"/>
-              <a:defRPr sz="1400" b="0" i="0" u="none" strike="noStrike" cap="none">
-                <a:solidFill>
-                  <a:srgbClr val="000000"/>
-                </a:solidFill>
-                <a:latin typeface="Arial"/>
-                <a:ea typeface="Arial"/>
-                <a:cs typeface="Arial"/>
-                <a:sym typeface="Arial"/>
-              </a:defRPr>
-            </a:lvl9pPr>
-          </a:lstStyle>
-          <a:p>
-            <a:pPr algn="ctr">
-              <a:defRPr/>
-            </a:pPr>
-            <a:endParaRPr>
-              <a:solidFill>
-                <a:srgbClr val="870078"/>
-              </a:solidFill>
-            </a:endParaRPr>
-          </a:p>
-        </p:txBody>
-      </p:sp>
-      <p:sp>
-        <p:nvSpPr>
-          <p:cNvPr id="2" name="文本占位符 1">
-            <a:extLst>
-              <a:ext uri="{FF2B5EF4-FFF2-40B4-BE49-F238E27FC236}">
-                <a16:creationId xmlns:a16="http://schemas.microsoft.com/office/drawing/2014/main" id="{22475C55-5DA8-FD16-F531-025AD326CC86}"/>
-              </a:ext>
-            </a:extLst>
-          </p:cNvPr>
-          <p:cNvSpPr>
-            <a:spLocks noGrp="1"/>
-          </p:cNvSpPr>
-          <p:nvPr>
-            <p:ph type="body" sz="quarter" idx="13"/>
-          </p:nvPr>
-        </p:nvSpPr>
-        <p:spPr/>
-        <p:txBody>
-          <a:bodyPr/>
-          <a:lstStyle/>
-          <a:p>
-            <a:r>
-              <a:rPr lang="zh-CN" altLang="en-US" dirty="0"/>
-              <a:t>本文主要工作</a:t>
-            </a:r>
-          </a:p>
-        </p:txBody>
-      </p:sp>
-      <p:sp>
-        <p:nvSpPr>
-          <p:cNvPr id="18" name="AutoShape 4">
-            <a:extLst>
-              <a:ext uri="{FF2B5EF4-FFF2-40B4-BE49-F238E27FC236}">
-                <a16:creationId xmlns:a16="http://schemas.microsoft.com/office/drawing/2014/main" id="{0A390B2D-7C32-B82E-3CF8-21DD82F8E09F}"/>
-              </a:ext>
-            </a:extLst>
-          </p:cNvPr>
-          <p:cNvSpPr/>
-          <p:nvPr/>
-        </p:nvSpPr>
-        <p:spPr>
-          <a:xfrm>
-            <a:off x="762000" y="1838325"/>
-            <a:ext cx="3302000" cy="3048000"/>
-          </a:xfrm>
-          <a:prstGeom prst="roundRect">
-            <a:avLst>
-              <a:gd name="adj" fmla="val 4166"/>
-            </a:avLst>
-          </a:prstGeom>
-          <a:solidFill>
-            <a:schemeClr val="accent1">
-              <a:lumMod val="50000"/>
-            </a:schemeClr>
-          </a:solidFill>
-          <a:ln w="12700" cap="flat" cmpd="sng">
-            <a:solidFill>
-              <a:srgbClr val="64FFDA">
-                <a:alpha val="30000"/>
-              </a:srgbClr>
-            </a:solidFill>
-            <a:prstDash val="solid"/>
-            <a:round/>
-          </a:ln>
-        </p:spPr>
-        <p:txBody>
-          <a:bodyPr vert="horz" wrap="square" lIns="63500" tIns="63500" rIns="63500" bIns="63500" rtlCol="0" anchor="ctr"/>
-          <a:lstStyle>
-            <a:defPPr marR="0" lvl="0" algn="l" rtl="0">
-              <a:lnSpc>
-                <a:spcPct val="100000"/>
-              </a:lnSpc>
-              <a:spcBef>
-                <a:spcPts val="0"/>
-              </a:spcBef>
-              <a:spcAft>
-                <a:spcPts val="0"/>
-              </a:spcAft>
-            </a:defPPr>
-            <a:lvl1pPr marR="0" lvl="0" algn="l" rtl="0">
-              <a:lnSpc>
-                <a:spcPct val="100000"/>
-              </a:lnSpc>
-              <a:spcBef>
-                <a:spcPts val="0"/>
-              </a:spcBef>
-              <a:spcAft>
-                <a:spcPts val="0"/>
-              </a:spcAft>
-              <a:buClr>
-                <a:srgbClr val="000000"/>
-              </a:buClr>
-              <a:buFont typeface="Arial"/>
-              <a:defRPr sz="1400" b="0" i="0" u="none" strike="noStrike" cap="none">
-                <a:solidFill>
-                  <a:srgbClr val="000000"/>
-                </a:solidFill>
-                <a:latin typeface="Arial"/>
-                <a:ea typeface="Arial"/>
-                <a:cs typeface="Arial"/>
-                <a:sym typeface="Arial"/>
-              </a:defRPr>
-            </a:lvl1pPr>
-            <a:lvl2pPr marR="0" lvl="1" algn="l" rtl="0">
-              <a:lnSpc>
-                <a:spcPct val="100000"/>
-              </a:lnSpc>
-              <a:spcBef>
-                <a:spcPts val="0"/>
-              </a:spcBef>
-              <a:spcAft>
-                <a:spcPts val="0"/>
-              </a:spcAft>
-              <a:buClr>
-                <a:srgbClr val="000000"/>
-              </a:buClr>
-              <a:buFont typeface="Arial"/>
-              <a:defRPr sz="1400" b="0" i="0" u="none" strike="noStrike" cap="none">
-                <a:solidFill>
-                  <a:srgbClr val="000000"/>
-                </a:solidFill>
-                <a:latin typeface="Arial"/>
-                <a:ea typeface="Arial"/>
-                <a:cs typeface="Arial"/>
-                <a:sym typeface="Arial"/>
-              </a:defRPr>
-            </a:lvl2pPr>
-            <a:lvl3pPr marR="0" lvl="2" algn="l" rtl="0">
-              <a:lnSpc>
-                <a:spcPct val="100000"/>
-              </a:lnSpc>
-              <a:spcBef>
-                <a:spcPts val="0"/>
-              </a:spcBef>
-              <a:spcAft>
-                <a:spcPts val="0"/>
-              </a:spcAft>
-              <a:buClr>
-                <a:srgbClr val="000000"/>
-              </a:buClr>
-              <a:buFont typeface="Arial"/>
-              <a:defRPr sz="1400" b="0" i="0" u="none" strike="noStrike" cap="none">
-                <a:solidFill>
-                  <a:srgbClr val="000000"/>
-                </a:solidFill>
-                <a:latin typeface="Arial"/>
-                <a:ea typeface="Arial"/>
-                <a:cs typeface="Arial"/>
-                <a:sym typeface="Arial"/>
-              </a:defRPr>
-            </a:lvl3pPr>
-            <a:lvl4pPr marR="0" lvl="3" algn="l" rtl="0">
-              <a:lnSpc>
-                <a:spcPct val="100000"/>
-              </a:lnSpc>
-              <a:spcBef>
-                <a:spcPts val="0"/>
-              </a:spcBef>
-              <a:spcAft>
-                <a:spcPts val="0"/>
-              </a:spcAft>
-              <a:buClr>
-                <a:srgbClr val="000000"/>
-              </a:buClr>
-              <a:buFont typeface="Arial"/>
-              <a:defRPr sz="1400" b="0" i="0" u="none" strike="noStrike" cap="none">
-                <a:solidFill>
-                  <a:srgbClr val="000000"/>
-                </a:solidFill>
-                <a:latin typeface="Arial"/>
-                <a:ea typeface="Arial"/>
-                <a:cs typeface="Arial"/>
-                <a:sym typeface="Arial"/>
-              </a:defRPr>
-            </a:lvl4pPr>
-            <a:lvl5pPr marR="0" lvl="4" algn="l" rtl="0">
-              <a:lnSpc>
-                <a:spcPct val="100000"/>
-              </a:lnSpc>
-              <a:spcBef>
-                <a:spcPts val="0"/>
-              </a:spcBef>
-              <a:spcAft>
-                <a:spcPts val="0"/>
-              </a:spcAft>
-              <a:buClr>
-                <a:srgbClr val="000000"/>
-              </a:buClr>
-              <a:buFont typeface="Arial"/>
-              <a:defRPr sz="1400" b="0" i="0" u="none" strike="noStrike" cap="none">
-                <a:solidFill>
-                  <a:srgbClr val="000000"/>
-                </a:solidFill>
-                <a:latin typeface="Arial"/>
-                <a:ea typeface="Arial"/>
-                <a:cs typeface="Arial"/>
-                <a:sym typeface="Arial"/>
-              </a:defRPr>
-            </a:lvl5pPr>
-            <a:lvl6pPr marR="0" lvl="5" algn="l" rtl="0">
-              <a:lnSpc>
-                <a:spcPct val="100000"/>
-              </a:lnSpc>
-              <a:spcBef>
-                <a:spcPts val="0"/>
-              </a:spcBef>
-              <a:spcAft>
-                <a:spcPts val="0"/>
-              </a:spcAft>
-              <a:buClr>
-                <a:srgbClr val="000000"/>
-              </a:buClr>
-              <a:buFont typeface="Arial"/>
-              <a:defRPr sz="1400" b="0" i="0" u="none" strike="noStrike" cap="none">
-                <a:solidFill>
-                  <a:srgbClr val="000000"/>
-                </a:solidFill>
-                <a:latin typeface="Arial"/>
-                <a:ea typeface="Arial"/>
-                <a:cs typeface="Arial"/>
-                <a:sym typeface="Arial"/>
-              </a:defRPr>
-            </a:lvl6pPr>
-            <a:lvl7pPr marR="0" lvl="6" algn="l" rtl="0">
-              <a:lnSpc>
-                <a:spcPct val="100000"/>
-              </a:lnSpc>
-              <a:spcBef>
-                <a:spcPts val="0"/>
-              </a:spcBef>
-              <a:spcAft>
-                <a:spcPts val="0"/>
-              </a:spcAft>
-              <a:buClr>
-                <a:srgbClr val="000000"/>
-              </a:buClr>
-              <a:buFont typeface="Arial"/>
-              <a:defRPr sz="1400" b="0" i="0" u="none" strike="noStrike" cap="none">
-                <a:solidFill>
-                  <a:srgbClr val="000000"/>
-                </a:solidFill>
-                <a:latin typeface="Arial"/>
-                <a:ea typeface="Arial"/>
-                <a:cs typeface="Arial"/>
-                <a:sym typeface="Arial"/>
-              </a:defRPr>
-            </a:lvl7pPr>
-            <a:lvl8pPr marR="0" lvl="7" algn="l" rtl="0">
-              <a:lnSpc>
-                <a:spcPct val="100000"/>
-              </a:lnSpc>
-              <a:spcBef>
-                <a:spcPts val="0"/>
-              </a:spcBef>
-              <a:spcAft>
-                <a:spcPts val="0"/>
-              </a:spcAft>
-              <a:buClr>
-                <a:srgbClr val="000000"/>
-              </a:buClr>
-              <a:buFont typeface="Arial"/>
-              <a:defRPr sz="1400" b="0" i="0" u="none" strike="noStrike" cap="none">
-                <a:solidFill>
-                  <a:srgbClr val="000000"/>
-                </a:solidFill>
-                <a:latin typeface="Arial"/>
-                <a:ea typeface="Arial"/>
-                <a:cs typeface="Arial"/>
-                <a:sym typeface="Arial"/>
-              </a:defRPr>
-            </a:lvl8pPr>
-            <a:lvl9pPr marR="0" lvl="8" algn="l" rtl="0">
-              <a:lnSpc>
-                <a:spcPct val="100000"/>
-              </a:lnSpc>
-              <a:spcBef>
-                <a:spcPts val="0"/>
-              </a:spcBef>
-              <a:spcAft>
-                <a:spcPts val="0"/>
-              </a:spcAft>
-              <a:buClr>
-                <a:srgbClr val="000000"/>
-              </a:buClr>
-              <a:buFont typeface="Arial"/>
-              <a:defRPr sz="1400" b="0" i="0" u="none" strike="noStrike" cap="none">
-                <a:solidFill>
-                  <a:srgbClr val="000000"/>
-                </a:solidFill>
-                <a:latin typeface="Arial"/>
-                <a:ea typeface="Arial"/>
-                <a:cs typeface="Arial"/>
-                <a:sym typeface="Arial"/>
-              </a:defRPr>
-            </a:lvl9pPr>
-          </a:lstStyle>
-          <a:p>
-            <a:pPr algn="ctr">
-              <a:defRPr/>
-            </a:pPr>
-            <a:endParaRPr>
-              <a:solidFill>
-                <a:srgbClr val="870078"/>
-              </a:solidFill>
-            </a:endParaRPr>
-          </a:p>
-        </p:txBody>
-      </p:sp>
-      <p:pic>
-        <p:nvPicPr>
-          <p:cNvPr id="19" name="Picture 5">
-            <a:extLst>
-              <a:ext uri="{FF2B5EF4-FFF2-40B4-BE49-F238E27FC236}">
-                <a16:creationId xmlns:a16="http://schemas.microsoft.com/office/drawing/2014/main" id="{BD7EC584-CB5E-B15F-B6A0-10EEA55C2BB9}"/>
-              </a:ext>
-            </a:extLst>
-          </p:cNvPr>
-          <p:cNvPicPr>
-            <a:picLocks noChangeAspect="1"/>
-          </p:cNvPicPr>
-          <p:nvPr/>
-        </p:nvPicPr>
-        <p:blipFill>
-          <a:blip r:embed="rId3">
-            <a:extLst>
-              <a:ext uri="{28A0092B-C50C-407E-A947-70E740481C1C}">
-                <a14:useLocalDpi xmlns:a14="http://schemas.microsoft.com/office/drawing/2010/main" val="0"/>
-              </a:ext>
-              <a:ext uri="{96DAC541-7B7A-43D3-8B79-37D633B846F1}">
-                <asvg:svgBlip xmlns:asvg="http://schemas.microsoft.com/office/drawing/2016/SVG/main" r:embed="rId4"/>
-              </a:ext>
-            </a:extLst>
-          </a:blip>
-          <a:stretch>
-            <a:fillRect/>
-          </a:stretch>
-        </p:blipFill>
-        <p:spPr>
-          <a:xfrm>
-            <a:off x="2095500" y="2092325"/>
-            <a:ext cx="635000" cy="635000"/>
-          </a:xfrm>
-          <a:prstGeom prst="rect">
-            <a:avLst/>
-          </a:prstGeom>
-        </p:spPr>
-      </p:pic>
-      <p:sp>
-        <p:nvSpPr>
-          <p:cNvPr id="20" name="AutoShape 6">
-            <a:extLst>
-              <a:ext uri="{FF2B5EF4-FFF2-40B4-BE49-F238E27FC236}">
-                <a16:creationId xmlns:a16="http://schemas.microsoft.com/office/drawing/2014/main" id="{E219B6F2-018B-3287-F762-6115059C60F4}"/>
-              </a:ext>
-            </a:extLst>
-          </p:cNvPr>
-          <p:cNvSpPr/>
-          <p:nvPr/>
-        </p:nvSpPr>
-        <p:spPr>
-          <a:xfrm>
-            <a:off x="889000" y="2854325"/>
-            <a:ext cx="3048000" cy="381000"/>
-          </a:xfrm>
-          <a:prstGeom prst="rect">
-            <a:avLst/>
-          </a:prstGeom>
-          <a:noFill/>
-          <a:ln w="12700" cap="flat" cmpd="sng">
-            <a:noFill/>
-            <a:prstDash val="solid"/>
-            <a:round/>
-          </a:ln>
-        </p:spPr>
-        <p:txBody>
-          <a:bodyPr vert="horz" wrap="square" lIns="0" tIns="0" rIns="0" bIns="0" rtlCol="0" anchor="ctr" anchorCtr="0"/>
-          <a:lstStyle>
-            <a:defPPr marR="0" lvl="0" algn="l" rtl="0">
-              <a:lnSpc>
-                <a:spcPct val="100000"/>
-              </a:lnSpc>
-              <a:spcBef>
-                <a:spcPts val="0"/>
-              </a:spcBef>
-              <a:spcAft>
-                <a:spcPts val="0"/>
-              </a:spcAft>
-            </a:defPPr>
-            <a:lvl1pPr marR="0" lvl="0" algn="l" rtl="0">
-              <a:lnSpc>
-                <a:spcPct val="100000"/>
-              </a:lnSpc>
-              <a:spcBef>
-                <a:spcPts val="0"/>
-              </a:spcBef>
-              <a:spcAft>
-                <a:spcPts val="0"/>
-              </a:spcAft>
-              <a:buClr>
-                <a:srgbClr val="000000"/>
-              </a:buClr>
-              <a:buFont typeface="Arial"/>
-              <a:defRPr sz="1400" b="0" i="0" u="none" strike="noStrike" cap="none">
-                <a:solidFill>
-                  <a:srgbClr val="000000"/>
-                </a:solidFill>
-                <a:latin typeface="Arial"/>
-                <a:ea typeface="Arial"/>
-                <a:cs typeface="Arial"/>
-                <a:sym typeface="Arial"/>
-              </a:defRPr>
-            </a:lvl1pPr>
-            <a:lvl2pPr marR="0" lvl="1" algn="l" rtl="0">
-              <a:lnSpc>
-                <a:spcPct val="100000"/>
-              </a:lnSpc>
-              <a:spcBef>
-                <a:spcPts val="0"/>
-              </a:spcBef>
-              <a:spcAft>
-                <a:spcPts val="0"/>
-              </a:spcAft>
-              <a:buClr>
-                <a:srgbClr val="000000"/>
-              </a:buClr>
-              <a:buFont typeface="Arial"/>
-              <a:defRPr sz="1400" b="0" i="0" u="none" strike="noStrike" cap="none">
-                <a:solidFill>
-                  <a:srgbClr val="000000"/>
-                </a:solidFill>
-                <a:latin typeface="Arial"/>
-                <a:ea typeface="Arial"/>
-                <a:cs typeface="Arial"/>
-                <a:sym typeface="Arial"/>
-              </a:defRPr>
-            </a:lvl2pPr>
-            <a:lvl3pPr marR="0" lvl="2" algn="l" rtl="0">
-              <a:lnSpc>
-                <a:spcPct val="100000"/>
-              </a:lnSpc>
-              <a:spcBef>
-                <a:spcPts val="0"/>
-              </a:spcBef>
-              <a:spcAft>
-                <a:spcPts val="0"/>
-              </a:spcAft>
-              <a:buClr>
-                <a:srgbClr val="000000"/>
-              </a:buClr>
-              <a:buFont typeface="Arial"/>
-              <a:defRPr sz="1400" b="0" i="0" u="none" strike="noStrike" cap="none">
-                <a:solidFill>
-                  <a:srgbClr val="000000"/>
-                </a:solidFill>
-                <a:latin typeface="Arial"/>
-                <a:ea typeface="Arial"/>
-                <a:cs typeface="Arial"/>
-                <a:sym typeface="Arial"/>
-              </a:defRPr>
-            </a:lvl3pPr>
-            <a:lvl4pPr marR="0" lvl="3" algn="l" rtl="0">
-              <a:lnSpc>
-                <a:spcPct val="100000"/>
-              </a:lnSpc>
-              <a:spcBef>
-                <a:spcPts val="0"/>
-              </a:spcBef>
-              <a:spcAft>
-                <a:spcPts val="0"/>
-              </a:spcAft>
-              <a:buClr>
-                <a:srgbClr val="000000"/>
-              </a:buClr>
-              <a:buFont typeface="Arial"/>
-              <a:defRPr sz="1400" b="0" i="0" u="none" strike="noStrike" cap="none">
-                <a:solidFill>
-                  <a:srgbClr val="000000"/>
-                </a:solidFill>
-                <a:latin typeface="Arial"/>
-                <a:ea typeface="Arial"/>
-                <a:cs typeface="Arial"/>
-                <a:sym typeface="Arial"/>
-              </a:defRPr>
-            </a:lvl4pPr>
-            <a:lvl5pPr marR="0" lvl="4" algn="l" rtl="0">
-              <a:lnSpc>
-                <a:spcPct val="100000"/>
-              </a:lnSpc>
-              <a:spcBef>
-                <a:spcPts val="0"/>
-              </a:spcBef>
-              <a:spcAft>
-                <a:spcPts val="0"/>
-              </a:spcAft>
-              <a:buClr>
-                <a:srgbClr val="000000"/>
-              </a:buClr>
-              <a:buFont typeface="Arial"/>
-              <a:defRPr sz="1400" b="0" i="0" u="none" strike="noStrike" cap="none">
-                <a:solidFill>
-                  <a:srgbClr val="000000"/>
-                </a:solidFill>
-                <a:latin typeface="Arial"/>
-                <a:ea typeface="Arial"/>
-                <a:cs typeface="Arial"/>
-                <a:sym typeface="Arial"/>
-              </a:defRPr>
-            </a:lvl5pPr>
-            <a:lvl6pPr marR="0" lvl="5" algn="l" rtl="0">
-              <a:lnSpc>
-                <a:spcPct val="100000"/>
-              </a:lnSpc>
-              <a:spcBef>
-                <a:spcPts val="0"/>
-              </a:spcBef>
-              <a:spcAft>
-                <a:spcPts val="0"/>
-              </a:spcAft>
-              <a:buClr>
-                <a:srgbClr val="000000"/>
-              </a:buClr>
-              <a:buFont typeface="Arial"/>
-              <a:defRPr sz="1400" b="0" i="0" u="none" strike="noStrike" cap="none">
-                <a:solidFill>
-                  <a:srgbClr val="000000"/>
-                </a:solidFill>
-                <a:latin typeface="Arial"/>
-                <a:ea typeface="Arial"/>
-                <a:cs typeface="Arial"/>
-                <a:sym typeface="Arial"/>
-              </a:defRPr>
-            </a:lvl6pPr>
-            <a:lvl7pPr marR="0" lvl="6" algn="l" rtl="0">
-              <a:lnSpc>
-                <a:spcPct val="100000"/>
-              </a:lnSpc>
-              <a:spcBef>
-                <a:spcPts val="0"/>
-              </a:spcBef>
-              <a:spcAft>
-                <a:spcPts val="0"/>
-              </a:spcAft>
-              <a:buClr>
-                <a:srgbClr val="000000"/>
-              </a:buClr>
-              <a:buFont typeface="Arial"/>
-              <a:defRPr sz="1400" b="0" i="0" u="none" strike="noStrike" cap="none">
-                <a:solidFill>
-                  <a:srgbClr val="000000"/>
-                </a:solidFill>
-                <a:latin typeface="Arial"/>
-                <a:ea typeface="Arial"/>
-                <a:cs typeface="Arial"/>
-                <a:sym typeface="Arial"/>
-              </a:defRPr>
-            </a:lvl7pPr>
-            <a:lvl8pPr marR="0" lvl="7" algn="l" rtl="0">
-              <a:lnSpc>
-                <a:spcPct val="100000"/>
-              </a:lnSpc>
-              <a:spcBef>
-                <a:spcPts val="0"/>
-              </a:spcBef>
-              <a:spcAft>
-                <a:spcPts val="0"/>
-              </a:spcAft>
-              <a:buClr>
-                <a:srgbClr val="000000"/>
-              </a:buClr>
-              <a:buFont typeface="Arial"/>
-              <a:defRPr sz="1400" b="0" i="0" u="none" strike="noStrike" cap="none">
-                <a:solidFill>
-                  <a:srgbClr val="000000"/>
-                </a:solidFill>
-                <a:latin typeface="Arial"/>
-                <a:ea typeface="Arial"/>
-                <a:cs typeface="Arial"/>
-                <a:sym typeface="Arial"/>
-              </a:defRPr>
-            </a:lvl8pPr>
-            <a:lvl9pPr marR="0" lvl="8" algn="l" rtl="0">
-              <a:lnSpc>
-                <a:spcPct val="100000"/>
-              </a:lnSpc>
-              <a:spcBef>
-                <a:spcPts val="0"/>
-              </a:spcBef>
-              <a:spcAft>
-                <a:spcPts val="0"/>
-              </a:spcAft>
-              <a:buClr>
-                <a:srgbClr val="000000"/>
-              </a:buClr>
-              <a:buFont typeface="Arial"/>
-              <a:defRPr sz="1400" b="0" i="0" u="none" strike="noStrike" cap="none">
-                <a:solidFill>
-                  <a:srgbClr val="000000"/>
-                </a:solidFill>
-                <a:latin typeface="Arial"/>
-                <a:ea typeface="Arial"/>
-                <a:cs typeface="Arial"/>
-                <a:sym typeface="Arial"/>
-              </a:defRPr>
-            </a:lvl9pPr>
-          </a:lstStyle>
-          <a:p>
-            <a:pPr indent="0" algn="ctr">
-              <a:lnSpc>
-                <a:spcPct val="125000"/>
-              </a:lnSpc>
-              <a:defRPr/>
-            </a:pPr>
-            <a:r>
-              <a:rPr lang="en-US" sz="2000" b="1" i="0" u="none" strike="noStrike">
-                <a:solidFill>
-                  <a:srgbClr val="FFFFFF"/>
-                </a:solidFill>
-                <a:latin typeface="Roboto"/>
-                <a:ea typeface="Roboto"/>
-                <a:cs typeface="Roboto"/>
-                <a:sym typeface="Roboto"/>
-              </a:rPr>
-              <a:t>统一事务模型与协议</a:t>
-            </a:r>
-            <a:endParaRPr lang="en-US" sz="1100"/>
-          </a:p>
-        </p:txBody>
-      </p:sp>
-      <p:sp>
-        <p:nvSpPr>
-          <p:cNvPr id="21" name="AutoShape 7">
-            <a:extLst>
-              <a:ext uri="{FF2B5EF4-FFF2-40B4-BE49-F238E27FC236}">
-                <a16:creationId xmlns:a16="http://schemas.microsoft.com/office/drawing/2014/main" id="{DCFBB115-56F4-97F5-C8E1-46DC0E80508C}"/>
-              </a:ext>
-            </a:extLst>
-          </p:cNvPr>
-          <p:cNvSpPr/>
-          <p:nvPr/>
-        </p:nvSpPr>
-        <p:spPr>
-          <a:xfrm>
-            <a:off x="889000" y="3362325"/>
-            <a:ext cx="3048000" cy="1270000"/>
-          </a:xfrm>
-          <a:prstGeom prst="rect">
-            <a:avLst/>
-          </a:prstGeom>
-          <a:noFill/>
-          <a:ln w="12700" cap="flat" cmpd="sng">
-            <a:noFill/>
-            <a:prstDash val="solid"/>
-            <a:round/>
-          </a:ln>
-        </p:spPr>
-        <p:txBody>
-          <a:bodyPr vert="horz" wrap="square" lIns="0" tIns="0" rIns="0" bIns="0" rtlCol="0" anchor="ctr" anchorCtr="0"/>
-          <a:lstStyle>
-            <a:defPPr marR="0" lvl="0" algn="l" rtl="0">
-              <a:lnSpc>
-                <a:spcPct val="100000"/>
-              </a:lnSpc>
-              <a:spcBef>
-                <a:spcPts val="0"/>
-              </a:spcBef>
-              <a:spcAft>
-                <a:spcPts val="0"/>
-              </a:spcAft>
-            </a:defPPr>
-            <a:lvl1pPr marR="0" lvl="0" algn="l" rtl="0">
-              <a:lnSpc>
-                <a:spcPct val="100000"/>
-              </a:lnSpc>
-              <a:spcBef>
-                <a:spcPts val="0"/>
-              </a:spcBef>
-              <a:spcAft>
-                <a:spcPts val="0"/>
-              </a:spcAft>
-              <a:buClr>
-                <a:srgbClr val="000000"/>
-              </a:buClr>
-              <a:buFont typeface="Arial"/>
-              <a:defRPr sz="1400" b="0" i="0" u="none" strike="noStrike" cap="none">
-                <a:solidFill>
-                  <a:srgbClr val="000000"/>
-                </a:solidFill>
-                <a:latin typeface="Arial"/>
-                <a:ea typeface="Arial"/>
-                <a:cs typeface="Arial"/>
-                <a:sym typeface="Arial"/>
-              </a:defRPr>
-            </a:lvl1pPr>
-            <a:lvl2pPr marR="0" lvl="1" algn="l" rtl="0">
-              <a:lnSpc>
-                <a:spcPct val="100000"/>
-              </a:lnSpc>
-              <a:spcBef>
-                <a:spcPts val="0"/>
-              </a:spcBef>
-              <a:spcAft>
-                <a:spcPts val="0"/>
-              </a:spcAft>
-              <a:buClr>
-                <a:srgbClr val="000000"/>
-              </a:buClr>
-              <a:buFont typeface="Arial"/>
-              <a:defRPr sz="1400" b="0" i="0" u="none" strike="noStrike" cap="none">
-                <a:solidFill>
-                  <a:srgbClr val="000000"/>
-                </a:solidFill>
-                <a:latin typeface="Arial"/>
-                <a:ea typeface="Arial"/>
-                <a:cs typeface="Arial"/>
-                <a:sym typeface="Arial"/>
-              </a:defRPr>
-            </a:lvl2pPr>
-            <a:lvl3pPr marR="0" lvl="2" algn="l" rtl="0">
-              <a:lnSpc>
-                <a:spcPct val="100000"/>
-              </a:lnSpc>
-              <a:spcBef>
-                <a:spcPts val="0"/>
-              </a:spcBef>
-              <a:spcAft>
-                <a:spcPts val="0"/>
-              </a:spcAft>
-              <a:buClr>
-                <a:srgbClr val="000000"/>
-              </a:buClr>
-              <a:buFont typeface="Arial"/>
-              <a:defRPr sz="1400" b="0" i="0" u="none" strike="noStrike" cap="none">
-                <a:solidFill>
-                  <a:srgbClr val="000000"/>
-                </a:solidFill>
-                <a:latin typeface="Arial"/>
-                <a:ea typeface="Arial"/>
-                <a:cs typeface="Arial"/>
-                <a:sym typeface="Arial"/>
-              </a:defRPr>
-            </a:lvl3pPr>
-            <a:lvl4pPr marR="0" lvl="3" algn="l" rtl="0">
-              <a:lnSpc>
-                <a:spcPct val="100000"/>
-              </a:lnSpc>
-              <a:spcBef>
-                <a:spcPts val="0"/>
-              </a:spcBef>
-              <a:spcAft>
-                <a:spcPts val="0"/>
-              </a:spcAft>
-              <a:buClr>
-                <a:srgbClr val="000000"/>
-              </a:buClr>
-              <a:buFont typeface="Arial"/>
-              <a:defRPr sz="1400" b="0" i="0" u="none" strike="noStrike" cap="none">
-                <a:solidFill>
-                  <a:srgbClr val="000000"/>
-                </a:solidFill>
-                <a:latin typeface="Arial"/>
-                <a:ea typeface="Arial"/>
-                <a:cs typeface="Arial"/>
-                <a:sym typeface="Arial"/>
-              </a:defRPr>
-            </a:lvl4pPr>
-            <a:lvl5pPr marR="0" lvl="4" algn="l" rtl="0">
-              <a:lnSpc>
-                <a:spcPct val="100000"/>
-              </a:lnSpc>
-              <a:spcBef>
-                <a:spcPts val="0"/>
-              </a:spcBef>
-              <a:spcAft>
-                <a:spcPts val="0"/>
-              </a:spcAft>
-              <a:buClr>
-                <a:srgbClr val="000000"/>
-              </a:buClr>
-              <a:buFont typeface="Arial"/>
-              <a:defRPr sz="1400" b="0" i="0" u="none" strike="noStrike" cap="none">
-                <a:solidFill>
-                  <a:srgbClr val="000000"/>
-                </a:solidFill>
-                <a:latin typeface="Arial"/>
-                <a:ea typeface="Arial"/>
-                <a:cs typeface="Arial"/>
-                <a:sym typeface="Arial"/>
-              </a:defRPr>
-            </a:lvl5pPr>
-            <a:lvl6pPr marR="0" lvl="5" algn="l" rtl="0">
-              <a:lnSpc>
-                <a:spcPct val="100000"/>
-              </a:lnSpc>
-              <a:spcBef>
-                <a:spcPts val="0"/>
-              </a:spcBef>
-              <a:spcAft>
-                <a:spcPts val="0"/>
-              </a:spcAft>
-              <a:buClr>
-                <a:srgbClr val="000000"/>
-              </a:buClr>
-              <a:buFont typeface="Arial"/>
-              <a:defRPr sz="1400" b="0" i="0" u="none" strike="noStrike" cap="none">
-                <a:solidFill>
-                  <a:srgbClr val="000000"/>
-                </a:solidFill>
-                <a:latin typeface="Arial"/>
-                <a:ea typeface="Arial"/>
-                <a:cs typeface="Arial"/>
-                <a:sym typeface="Arial"/>
-              </a:defRPr>
-            </a:lvl6pPr>
-            <a:lvl7pPr marR="0" lvl="6" algn="l" rtl="0">
-              <a:lnSpc>
-                <a:spcPct val="100000"/>
-              </a:lnSpc>
-              <a:spcBef>
-                <a:spcPts val="0"/>
-              </a:spcBef>
-              <a:spcAft>
-                <a:spcPts val="0"/>
-              </a:spcAft>
-              <a:buClr>
-                <a:srgbClr val="000000"/>
-              </a:buClr>
-              <a:buFont typeface="Arial"/>
-              <a:defRPr sz="1400" b="0" i="0" u="none" strike="noStrike" cap="none">
-                <a:solidFill>
-                  <a:srgbClr val="000000"/>
-                </a:solidFill>
-                <a:latin typeface="Arial"/>
-                <a:ea typeface="Arial"/>
-                <a:cs typeface="Arial"/>
-                <a:sym typeface="Arial"/>
-              </a:defRPr>
-            </a:lvl7pPr>
-            <a:lvl8pPr marR="0" lvl="7" algn="l" rtl="0">
-              <a:lnSpc>
-                <a:spcPct val="100000"/>
-              </a:lnSpc>
-              <a:spcBef>
-                <a:spcPts val="0"/>
-              </a:spcBef>
-              <a:spcAft>
-                <a:spcPts val="0"/>
-              </a:spcAft>
-              <a:buClr>
-                <a:srgbClr val="000000"/>
-              </a:buClr>
-              <a:buFont typeface="Arial"/>
-              <a:defRPr sz="1400" b="0" i="0" u="none" strike="noStrike" cap="none">
-                <a:solidFill>
-                  <a:srgbClr val="000000"/>
-                </a:solidFill>
-                <a:latin typeface="Arial"/>
-                <a:ea typeface="Arial"/>
-                <a:cs typeface="Arial"/>
-                <a:sym typeface="Arial"/>
-              </a:defRPr>
-            </a:lvl8pPr>
-            <a:lvl9pPr marR="0" lvl="8" algn="l" rtl="0">
-              <a:lnSpc>
-                <a:spcPct val="100000"/>
-              </a:lnSpc>
-              <a:spcBef>
-                <a:spcPts val="0"/>
-              </a:spcBef>
-              <a:spcAft>
-                <a:spcPts val="0"/>
-              </a:spcAft>
-              <a:buClr>
-                <a:srgbClr val="000000"/>
-              </a:buClr>
-              <a:buFont typeface="Arial"/>
-              <a:defRPr sz="1400" b="0" i="0" u="none" strike="noStrike" cap="none">
-                <a:solidFill>
-                  <a:srgbClr val="000000"/>
-                </a:solidFill>
-                <a:latin typeface="Arial"/>
-                <a:ea typeface="Arial"/>
-                <a:cs typeface="Arial"/>
-                <a:sym typeface="Arial"/>
-              </a:defRPr>
-            </a:lvl9pPr>
-          </a:lstStyle>
-          <a:p>
-            <a:pPr indent="0">
-              <a:lnSpc>
-                <a:spcPct val="108333"/>
-              </a:lnSpc>
-              <a:defRPr/>
-            </a:pPr>
-            <a:r>
-              <a:rPr lang="en-US" sz="1800" dirty="0" err="1">
-                <a:solidFill>
-                  <a:schemeClr val="bg1"/>
-                </a:solidFill>
-                <a:latin typeface="+mn-lt"/>
-                <a:ea typeface="+mn-ea"/>
-                <a:cs typeface="+mn-cs"/>
-                <a:sym typeface="Roboto"/>
-              </a:rPr>
-              <a:t>建立了统一的事务模型，设计了支持多种隔离级别混合运行的并发控制协议，奠定系统核心基础</a:t>
-            </a:r>
-            <a:r>
-              <a:rPr lang="en-US" sz="1800" dirty="0">
-                <a:solidFill>
-                  <a:schemeClr val="bg1"/>
-                </a:solidFill>
-                <a:latin typeface="+mn-lt"/>
-                <a:ea typeface="+mn-ea"/>
-                <a:cs typeface="+mn-cs"/>
-                <a:sym typeface="Roboto"/>
-              </a:rPr>
-              <a:t>。</a:t>
-            </a:r>
-            <a:endParaRPr lang="en-US" sz="1800" dirty="0">
-              <a:solidFill>
-                <a:schemeClr val="bg1"/>
-              </a:solidFill>
-              <a:latin typeface="+mn-lt"/>
-              <a:ea typeface="+mn-ea"/>
-              <a:cs typeface="+mn-cs"/>
-            </a:endParaRPr>
-          </a:p>
-        </p:txBody>
-      </p:sp>
-      <p:pic>
-        <p:nvPicPr>
-          <p:cNvPr id="23" name="Picture 9">
-            <a:extLst>
-              <a:ext uri="{FF2B5EF4-FFF2-40B4-BE49-F238E27FC236}">
-                <a16:creationId xmlns:a16="http://schemas.microsoft.com/office/drawing/2014/main" id="{0899BED3-E5CA-E6CA-4861-EB1EF895D304}"/>
-              </a:ext>
-            </a:extLst>
-          </p:cNvPr>
-          <p:cNvPicPr>
-            <a:picLocks noChangeAspect="1"/>
-          </p:cNvPicPr>
-          <p:nvPr/>
-        </p:nvPicPr>
-        <p:blipFill>
-          <a:blip r:embed="rId5">
-            <a:extLst>
-              <a:ext uri="{28A0092B-C50C-407E-A947-70E740481C1C}">
-                <a14:useLocalDpi xmlns:a14="http://schemas.microsoft.com/office/drawing/2010/main" val="0"/>
-              </a:ext>
-              <a:ext uri="{96DAC541-7B7A-43D3-8B79-37D633B846F1}">
-                <asvg:svgBlip xmlns:asvg="http://schemas.microsoft.com/office/drawing/2016/SVG/main" r:embed="rId6"/>
-              </a:ext>
-            </a:extLst>
-          </a:blip>
-          <a:stretch>
-            <a:fillRect/>
-          </a:stretch>
-        </p:blipFill>
-        <p:spPr>
-          <a:xfrm>
-            <a:off x="5778500" y="2092325"/>
-            <a:ext cx="635000" cy="635000"/>
-          </a:xfrm>
-          <a:prstGeom prst="rect">
-            <a:avLst/>
-          </a:prstGeom>
-        </p:spPr>
-      </p:pic>
-      <p:sp>
-        <p:nvSpPr>
-          <p:cNvPr id="24" name="AutoShape 10">
-            <a:extLst>
-              <a:ext uri="{FF2B5EF4-FFF2-40B4-BE49-F238E27FC236}">
-                <a16:creationId xmlns:a16="http://schemas.microsoft.com/office/drawing/2014/main" id="{F4773BF4-0D9E-B46D-9F33-F4EE73C88A0A}"/>
-              </a:ext>
-            </a:extLst>
-          </p:cNvPr>
-          <p:cNvSpPr/>
-          <p:nvPr/>
-        </p:nvSpPr>
-        <p:spPr>
-          <a:xfrm>
-            <a:off x="4572000" y="2854325"/>
-            <a:ext cx="3048000" cy="381000"/>
-          </a:xfrm>
-          <a:prstGeom prst="rect">
-            <a:avLst/>
-          </a:prstGeom>
-          <a:noFill/>
-          <a:ln w="12700" cap="flat" cmpd="sng">
-            <a:noFill/>
-            <a:prstDash val="solid"/>
-            <a:round/>
-          </a:ln>
-        </p:spPr>
-        <p:txBody>
-          <a:bodyPr vert="horz" wrap="square" lIns="0" tIns="0" rIns="0" bIns="0" rtlCol="0" anchor="ctr" anchorCtr="0"/>
-          <a:lstStyle>
-            <a:defPPr marR="0" lvl="0" algn="l" rtl="0">
-              <a:lnSpc>
-                <a:spcPct val="100000"/>
-              </a:lnSpc>
-              <a:spcBef>
-                <a:spcPts val="0"/>
-              </a:spcBef>
-              <a:spcAft>
-                <a:spcPts val="0"/>
-              </a:spcAft>
-            </a:defPPr>
-            <a:lvl1pPr marR="0" lvl="0" algn="l" rtl="0">
-              <a:lnSpc>
-                <a:spcPct val="100000"/>
-              </a:lnSpc>
-              <a:spcBef>
-                <a:spcPts val="0"/>
-              </a:spcBef>
-              <a:spcAft>
-                <a:spcPts val="0"/>
-              </a:spcAft>
-              <a:buClr>
-                <a:srgbClr val="000000"/>
-              </a:buClr>
-              <a:buFont typeface="Arial"/>
-              <a:defRPr sz="1400" b="0" i="0" u="none" strike="noStrike" cap="none">
-                <a:solidFill>
-                  <a:srgbClr val="000000"/>
-                </a:solidFill>
-                <a:latin typeface="Arial"/>
-                <a:ea typeface="Arial"/>
-                <a:cs typeface="Arial"/>
-                <a:sym typeface="Arial"/>
-              </a:defRPr>
-            </a:lvl1pPr>
-            <a:lvl2pPr marR="0" lvl="1" algn="l" rtl="0">
-              <a:lnSpc>
-                <a:spcPct val="100000"/>
-              </a:lnSpc>
-              <a:spcBef>
-                <a:spcPts val="0"/>
-              </a:spcBef>
-              <a:spcAft>
-                <a:spcPts val="0"/>
-              </a:spcAft>
-              <a:buClr>
-                <a:srgbClr val="000000"/>
-              </a:buClr>
-              <a:buFont typeface="Arial"/>
-              <a:defRPr sz="1400" b="0" i="0" u="none" strike="noStrike" cap="none">
-                <a:solidFill>
-                  <a:srgbClr val="000000"/>
-                </a:solidFill>
-                <a:latin typeface="Arial"/>
-                <a:ea typeface="Arial"/>
-                <a:cs typeface="Arial"/>
-                <a:sym typeface="Arial"/>
-              </a:defRPr>
-            </a:lvl2pPr>
-            <a:lvl3pPr marR="0" lvl="2" algn="l" rtl="0">
-              <a:lnSpc>
-                <a:spcPct val="100000"/>
-              </a:lnSpc>
-              <a:spcBef>
-                <a:spcPts val="0"/>
-              </a:spcBef>
-              <a:spcAft>
-                <a:spcPts val="0"/>
-              </a:spcAft>
-              <a:buClr>
-                <a:srgbClr val="000000"/>
-              </a:buClr>
-              <a:buFont typeface="Arial"/>
-              <a:defRPr sz="1400" b="0" i="0" u="none" strike="noStrike" cap="none">
-                <a:solidFill>
-                  <a:srgbClr val="000000"/>
-                </a:solidFill>
-                <a:latin typeface="Arial"/>
-                <a:ea typeface="Arial"/>
-                <a:cs typeface="Arial"/>
-                <a:sym typeface="Arial"/>
-              </a:defRPr>
-            </a:lvl3pPr>
-            <a:lvl4pPr marR="0" lvl="3" algn="l" rtl="0">
-              <a:lnSpc>
-                <a:spcPct val="100000"/>
-              </a:lnSpc>
-              <a:spcBef>
-                <a:spcPts val="0"/>
-              </a:spcBef>
-              <a:spcAft>
-                <a:spcPts val="0"/>
-              </a:spcAft>
-              <a:buClr>
-                <a:srgbClr val="000000"/>
-              </a:buClr>
-              <a:buFont typeface="Arial"/>
-              <a:defRPr sz="1400" b="0" i="0" u="none" strike="noStrike" cap="none">
-                <a:solidFill>
-                  <a:srgbClr val="000000"/>
-                </a:solidFill>
-                <a:latin typeface="Arial"/>
-                <a:ea typeface="Arial"/>
-                <a:cs typeface="Arial"/>
-                <a:sym typeface="Arial"/>
-              </a:defRPr>
-            </a:lvl4pPr>
-            <a:lvl5pPr marR="0" lvl="4" algn="l" rtl="0">
-              <a:lnSpc>
-                <a:spcPct val="100000"/>
-              </a:lnSpc>
-              <a:spcBef>
-                <a:spcPts val="0"/>
-              </a:spcBef>
-              <a:spcAft>
-                <a:spcPts val="0"/>
-              </a:spcAft>
-              <a:buClr>
-                <a:srgbClr val="000000"/>
-              </a:buClr>
-              <a:buFont typeface="Arial"/>
-              <a:defRPr sz="1400" b="0" i="0" u="none" strike="noStrike" cap="none">
-                <a:solidFill>
-                  <a:srgbClr val="000000"/>
-                </a:solidFill>
-                <a:latin typeface="Arial"/>
-                <a:ea typeface="Arial"/>
-                <a:cs typeface="Arial"/>
-                <a:sym typeface="Arial"/>
-              </a:defRPr>
-            </a:lvl5pPr>
-            <a:lvl6pPr marR="0" lvl="5" algn="l" rtl="0">
-              <a:lnSpc>
-                <a:spcPct val="100000"/>
-              </a:lnSpc>
-              <a:spcBef>
-                <a:spcPts val="0"/>
-              </a:spcBef>
-              <a:spcAft>
-                <a:spcPts val="0"/>
-              </a:spcAft>
-              <a:buClr>
-                <a:srgbClr val="000000"/>
-              </a:buClr>
-              <a:buFont typeface="Arial"/>
-              <a:defRPr sz="1400" b="0" i="0" u="none" strike="noStrike" cap="none">
-                <a:solidFill>
-                  <a:srgbClr val="000000"/>
-                </a:solidFill>
-                <a:latin typeface="Arial"/>
-                <a:ea typeface="Arial"/>
-                <a:cs typeface="Arial"/>
-                <a:sym typeface="Arial"/>
-              </a:defRPr>
-            </a:lvl6pPr>
-            <a:lvl7pPr marR="0" lvl="6" algn="l" rtl="0">
-              <a:lnSpc>
-                <a:spcPct val="100000"/>
-              </a:lnSpc>
-              <a:spcBef>
-                <a:spcPts val="0"/>
-              </a:spcBef>
-              <a:spcAft>
-                <a:spcPts val="0"/>
-              </a:spcAft>
-              <a:buClr>
-                <a:srgbClr val="000000"/>
-              </a:buClr>
-              <a:buFont typeface="Arial"/>
-              <a:defRPr sz="1400" b="0" i="0" u="none" strike="noStrike" cap="none">
-                <a:solidFill>
-                  <a:srgbClr val="000000"/>
-                </a:solidFill>
-                <a:latin typeface="Arial"/>
-                <a:ea typeface="Arial"/>
-                <a:cs typeface="Arial"/>
-                <a:sym typeface="Arial"/>
-              </a:defRPr>
-            </a:lvl7pPr>
-            <a:lvl8pPr marR="0" lvl="7" algn="l" rtl="0">
-              <a:lnSpc>
-                <a:spcPct val="100000"/>
-              </a:lnSpc>
-              <a:spcBef>
-                <a:spcPts val="0"/>
-              </a:spcBef>
-              <a:spcAft>
-                <a:spcPts val="0"/>
-              </a:spcAft>
-              <a:buClr>
-                <a:srgbClr val="000000"/>
-              </a:buClr>
-              <a:buFont typeface="Arial"/>
-              <a:defRPr sz="1400" b="0" i="0" u="none" strike="noStrike" cap="none">
-                <a:solidFill>
-                  <a:srgbClr val="000000"/>
-                </a:solidFill>
-                <a:latin typeface="Arial"/>
-                <a:ea typeface="Arial"/>
-                <a:cs typeface="Arial"/>
-                <a:sym typeface="Arial"/>
-              </a:defRPr>
-            </a:lvl8pPr>
-            <a:lvl9pPr marR="0" lvl="8" algn="l" rtl="0">
-              <a:lnSpc>
-                <a:spcPct val="100000"/>
-              </a:lnSpc>
-              <a:spcBef>
-                <a:spcPts val="0"/>
-              </a:spcBef>
-              <a:spcAft>
-                <a:spcPts val="0"/>
-              </a:spcAft>
-              <a:buClr>
-                <a:srgbClr val="000000"/>
-              </a:buClr>
-              <a:buFont typeface="Arial"/>
-              <a:defRPr sz="1400" b="0" i="0" u="none" strike="noStrike" cap="none">
-                <a:solidFill>
-                  <a:srgbClr val="000000"/>
-                </a:solidFill>
-                <a:latin typeface="Arial"/>
-                <a:ea typeface="Arial"/>
-                <a:cs typeface="Arial"/>
-                <a:sym typeface="Arial"/>
-              </a:defRPr>
-            </a:lvl9pPr>
-          </a:lstStyle>
-          <a:p>
-            <a:pPr indent="0" algn="ctr">
-              <a:lnSpc>
-                <a:spcPct val="125000"/>
-              </a:lnSpc>
-              <a:defRPr/>
-            </a:pPr>
-            <a:r>
-              <a:rPr lang="en-US" sz="2000" b="1" i="0" u="none" strike="noStrike" dirty="0" err="1">
-                <a:solidFill>
-                  <a:srgbClr val="FFFFFF"/>
-                </a:solidFill>
-                <a:latin typeface="Roboto"/>
-                <a:ea typeface="Roboto"/>
-                <a:cs typeface="Roboto"/>
-                <a:sym typeface="Roboto"/>
-              </a:rPr>
-              <a:t>形式化建模与验证</a:t>
-            </a:r>
-            <a:endParaRPr lang="en-US" sz="1100" dirty="0"/>
-          </a:p>
-        </p:txBody>
-      </p:sp>
-      <p:sp>
-        <p:nvSpPr>
-          <p:cNvPr id="25" name="AutoShape 11">
-            <a:extLst>
-              <a:ext uri="{FF2B5EF4-FFF2-40B4-BE49-F238E27FC236}">
-                <a16:creationId xmlns:a16="http://schemas.microsoft.com/office/drawing/2014/main" id="{8D3DBFA1-B5D8-D547-E157-C66DCCFEC6F5}"/>
-              </a:ext>
-            </a:extLst>
-          </p:cNvPr>
-          <p:cNvSpPr/>
-          <p:nvPr/>
-        </p:nvSpPr>
-        <p:spPr>
-          <a:xfrm>
-            <a:off x="4572000" y="3362325"/>
-            <a:ext cx="3048000" cy="1270000"/>
-          </a:xfrm>
-          <a:prstGeom prst="rect">
-            <a:avLst/>
-          </a:prstGeom>
-          <a:noFill/>
-          <a:ln w="12700" cap="flat" cmpd="sng">
-            <a:noFill/>
-            <a:prstDash val="solid"/>
-            <a:round/>
-          </a:ln>
-        </p:spPr>
-        <p:txBody>
-          <a:bodyPr vert="horz" wrap="square" lIns="0" tIns="0" rIns="0" bIns="0" rtlCol="0" anchor="ctr" anchorCtr="0"/>
-          <a:lstStyle>
-            <a:defPPr marR="0" lvl="0" algn="l" rtl="0">
-              <a:lnSpc>
-                <a:spcPct val="100000"/>
-              </a:lnSpc>
-              <a:spcBef>
-                <a:spcPts val="0"/>
-              </a:spcBef>
-              <a:spcAft>
-                <a:spcPts val="0"/>
-              </a:spcAft>
-            </a:defPPr>
-            <a:lvl1pPr marR="0" lvl="0" algn="l" rtl="0">
-              <a:lnSpc>
-                <a:spcPct val="100000"/>
-              </a:lnSpc>
-              <a:spcBef>
-                <a:spcPts val="0"/>
-              </a:spcBef>
-              <a:spcAft>
-                <a:spcPts val="0"/>
-              </a:spcAft>
-              <a:buClr>
-                <a:srgbClr val="000000"/>
-              </a:buClr>
-              <a:buFont typeface="Arial"/>
-              <a:defRPr sz="1400" b="0" i="0" u="none" strike="noStrike" cap="none">
-                <a:solidFill>
-                  <a:srgbClr val="000000"/>
-                </a:solidFill>
-                <a:latin typeface="Arial"/>
-                <a:ea typeface="Arial"/>
-                <a:cs typeface="Arial"/>
-                <a:sym typeface="Arial"/>
-              </a:defRPr>
-            </a:lvl1pPr>
-            <a:lvl2pPr marR="0" lvl="1" algn="l" rtl="0">
-              <a:lnSpc>
-                <a:spcPct val="100000"/>
-              </a:lnSpc>
-              <a:spcBef>
-                <a:spcPts val="0"/>
-              </a:spcBef>
-              <a:spcAft>
-                <a:spcPts val="0"/>
-              </a:spcAft>
-              <a:buClr>
-                <a:srgbClr val="000000"/>
-              </a:buClr>
-              <a:buFont typeface="Arial"/>
-              <a:defRPr sz="1400" b="0" i="0" u="none" strike="noStrike" cap="none">
-                <a:solidFill>
-                  <a:srgbClr val="000000"/>
-                </a:solidFill>
-                <a:latin typeface="Arial"/>
-                <a:ea typeface="Arial"/>
-                <a:cs typeface="Arial"/>
-                <a:sym typeface="Arial"/>
-              </a:defRPr>
-            </a:lvl2pPr>
-            <a:lvl3pPr marR="0" lvl="2" algn="l" rtl="0">
-              <a:lnSpc>
-                <a:spcPct val="100000"/>
-              </a:lnSpc>
-              <a:spcBef>
-                <a:spcPts val="0"/>
-              </a:spcBef>
-              <a:spcAft>
-                <a:spcPts val="0"/>
-              </a:spcAft>
-              <a:buClr>
-                <a:srgbClr val="000000"/>
-              </a:buClr>
-              <a:buFont typeface="Arial"/>
-              <a:defRPr sz="1400" b="0" i="0" u="none" strike="noStrike" cap="none">
-                <a:solidFill>
-                  <a:srgbClr val="000000"/>
-                </a:solidFill>
-                <a:latin typeface="Arial"/>
-                <a:ea typeface="Arial"/>
-                <a:cs typeface="Arial"/>
-                <a:sym typeface="Arial"/>
-              </a:defRPr>
-            </a:lvl3pPr>
-            <a:lvl4pPr marR="0" lvl="3" algn="l" rtl="0">
-              <a:lnSpc>
-                <a:spcPct val="100000"/>
-              </a:lnSpc>
-              <a:spcBef>
-                <a:spcPts val="0"/>
-              </a:spcBef>
-              <a:spcAft>
-                <a:spcPts val="0"/>
-              </a:spcAft>
-              <a:buClr>
-                <a:srgbClr val="000000"/>
-              </a:buClr>
-              <a:buFont typeface="Arial"/>
-              <a:defRPr sz="1400" b="0" i="0" u="none" strike="noStrike" cap="none">
-                <a:solidFill>
-                  <a:srgbClr val="000000"/>
-                </a:solidFill>
-                <a:latin typeface="Arial"/>
-                <a:ea typeface="Arial"/>
-                <a:cs typeface="Arial"/>
-                <a:sym typeface="Arial"/>
-              </a:defRPr>
-            </a:lvl4pPr>
-            <a:lvl5pPr marR="0" lvl="4" algn="l" rtl="0">
-              <a:lnSpc>
-                <a:spcPct val="100000"/>
-              </a:lnSpc>
-              <a:spcBef>
-                <a:spcPts val="0"/>
-              </a:spcBef>
-              <a:spcAft>
-                <a:spcPts val="0"/>
-              </a:spcAft>
-              <a:buClr>
-                <a:srgbClr val="000000"/>
-              </a:buClr>
-              <a:buFont typeface="Arial"/>
-              <a:defRPr sz="1400" b="0" i="0" u="none" strike="noStrike" cap="none">
-                <a:solidFill>
-                  <a:srgbClr val="000000"/>
-                </a:solidFill>
-                <a:latin typeface="Arial"/>
-                <a:ea typeface="Arial"/>
-                <a:cs typeface="Arial"/>
-                <a:sym typeface="Arial"/>
-              </a:defRPr>
-            </a:lvl5pPr>
-            <a:lvl6pPr marR="0" lvl="5" algn="l" rtl="0">
-              <a:lnSpc>
-                <a:spcPct val="100000"/>
-              </a:lnSpc>
-              <a:spcBef>
-                <a:spcPts val="0"/>
-              </a:spcBef>
-              <a:spcAft>
-                <a:spcPts val="0"/>
-              </a:spcAft>
-              <a:buClr>
-                <a:srgbClr val="000000"/>
-              </a:buClr>
-              <a:buFont typeface="Arial"/>
-              <a:defRPr sz="1400" b="0" i="0" u="none" strike="noStrike" cap="none">
-                <a:solidFill>
-                  <a:srgbClr val="000000"/>
-                </a:solidFill>
-                <a:latin typeface="Arial"/>
-                <a:ea typeface="Arial"/>
-                <a:cs typeface="Arial"/>
-                <a:sym typeface="Arial"/>
-              </a:defRPr>
-            </a:lvl6pPr>
-            <a:lvl7pPr marR="0" lvl="6" algn="l" rtl="0">
-              <a:lnSpc>
-                <a:spcPct val="100000"/>
-              </a:lnSpc>
-              <a:spcBef>
-                <a:spcPts val="0"/>
-              </a:spcBef>
-              <a:spcAft>
-                <a:spcPts val="0"/>
-              </a:spcAft>
-              <a:buClr>
-                <a:srgbClr val="000000"/>
-              </a:buClr>
-              <a:buFont typeface="Arial"/>
-              <a:defRPr sz="1400" b="0" i="0" u="none" strike="noStrike" cap="none">
-                <a:solidFill>
-                  <a:srgbClr val="000000"/>
-                </a:solidFill>
-                <a:latin typeface="Arial"/>
-                <a:ea typeface="Arial"/>
-                <a:cs typeface="Arial"/>
-                <a:sym typeface="Arial"/>
-              </a:defRPr>
-            </a:lvl7pPr>
-            <a:lvl8pPr marR="0" lvl="7" algn="l" rtl="0">
-              <a:lnSpc>
-                <a:spcPct val="100000"/>
-              </a:lnSpc>
-              <a:spcBef>
-                <a:spcPts val="0"/>
-              </a:spcBef>
-              <a:spcAft>
-                <a:spcPts val="0"/>
-              </a:spcAft>
-              <a:buClr>
-                <a:srgbClr val="000000"/>
-              </a:buClr>
-              <a:buFont typeface="Arial"/>
-              <a:defRPr sz="1400" b="0" i="0" u="none" strike="noStrike" cap="none">
-                <a:solidFill>
-                  <a:srgbClr val="000000"/>
-                </a:solidFill>
-                <a:latin typeface="Arial"/>
-                <a:ea typeface="Arial"/>
-                <a:cs typeface="Arial"/>
-                <a:sym typeface="Arial"/>
-              </a:defRPr>
-            </a:lvl8pPr>
-            <a:lvl9pPr marR="0" lvl="8" algn="l" rtl="0">
-              <a:lnSpc>
-                <a:spcPct val="100000"/>
-              </a:lnSpc>
-              <a:spcBef>
-                <a:spcPts val="0"/>
-              </a:spcBef>
-              <a:spcAft>
-                <a:spcPts val="0"/>
-              </a:spcAft>
-              <a:buClr>
-                <a:srgbClr val="000000"/>
-              </a:buClr>
-              <a:buFont typeface="Arial"/>
-              <a:defRPr sz="1400" b="0" i="0" u="none" strike="noStrike" cap="none">
-                <a:solidFill>
-                  <a:srgbClr val="000000"/>
-                </a:solidFill>
-                <a:latin typeface="Arial"/>
-                <a:ea typeface="Arial"/>
-                <a:cs typeface="Arial"/>
-                <a:sym typeface="Arial"/>
-              </a:defRPr>
-            </a:lvl9pPr>
-          </a:lstStyle>
-          <a:p>
-            <a:pPr indent="0">
-              <a:lnSpc>
-                <a:spcPct val="108333"/>
-              </a:lnSpc>
-              <a:defRPr/>
-            </a:pPr>
-            <a:r>
-              <a:rPr lang="en-US" sz="1800" dirty="0" err="1">
-                <a:solidFill>
-                  <a:schemeClr val="bg1"/>
-                </a:solidFill>
-                <a:latin typeface="+mn-lt"/>
-                <a:ea typeface="+mn-ea"/>
-                <a:cs typeface="+mn-cs"/>
-                <a:sym typeface="Roboto"/>
-              </a:rPr>
-              <a:t>基于</a:t>
-            </a:r>
-            <a:r>
-              <a:rPr lang="en-US" sz="1800" dirty="0">
-                <a:solidFill>
-                  <a:schemeClr val="bg1"/>
-                </a:solidFill>
-                <a:latin typeface="+mn-lt"/>
-                <a:ea typeface="+mn-ea"/>
-                <a:cs typeface="+mn-cs"/>
-                <a:sym typeface="Roboto"/>
-              </a:rPr>
-              <a:t> TLA+ </a:t>
-            </a:r>
-            <a:r>
-              <a:rPr lang="en-US" sz="1800" dirty="0" err="1">
-                <a:solidFill>
-                  <a:schemeClr val="bg1"/>
-                </a:solidFill>
-                <a:latin typeface="+mn-lt"/>
-                <a:ea typeface="+mn-ea"/>
-                <a:cs typeface="+mn-cs"/>
-                <a:sym typeface="Roboto"/>
-              </a:rPr>
-              <a:t>对协议进行建模与验证，从理论上严格保证了混合隔离场景下系统的一致性与正确性</a:t>
-            </a:r>
-            <a:r>
-              <a:rPr lang="en-US" sz="1800" dirty="0">
-                <a:solidFill>
-                  <a:schemeClr val="bg1"/>
-                </a:solidFill>
-                <a:latin typeface="+mn-lt"/>
-                <a:ea typeface="+mn-ea"/>
-                <a:cs typeface="+mn-cs"/>
-                <a:sym typeface="Roboto"/>
-              </a:rPr>
-              <a:t>。</a:t>
-            </a:r>
-            <a:endParaRPr lang="en-US" sz="1800" dirty="0">
-              <a:solidFill>
-                <a:schemeClr val="bg1"/>
-              </a:solidFill>
-              <a:latin typeface="+mn-lt"/>
-              <a:ea typeface="+mn-ea"/>
-              <a:cs typeface="+mn-cs"/>
-            </a:endParaRPr>
-          </a:p>
-        </p:txBody>
-      </p:sp>
-      <p:sp>
-        <p:nvSpPr>
-          <p:cNvPr id="26" name="AutoShape 12">
-            <a:extLst>
-              <a:ext uri="{FF2B5EF4-FFF2-40B4-BE49-F238E27FC236}">
-                <a16:creationId xmlns:a16="http://schemas.microsoft.com/office/drawing/2014/main" id="{EEA733BD-ED5C-C0BF-09C0-9C0BCC7FEFEA}"/>
-              </a:ext>
-            </a:extLst>
-          </p:cNvPr>
-          <p:cNvSpPr/>
-          <p:nvPr/>
-        </p:nvSpPr>
-        <p:spPr>
-          <a:xfrm>
-            <a:off x="8128000" y="1838325"/>
-            <a:ext cx="3302000" cy="3048000"/>
-          </a:xfrm>
-          <a:prstGeom prst="roundRect">
-            <a:avLst>
-              <a:gd name="adj" fmla="val 4166"/>
-            </a:avLst>
-          </a:prstGeom>
-          <a:solidFill>
-            <a:schemeClr val="accent1">
-              <a:lumMod val="50000"/>
-            </a:schemeClr>
-          </a:solidFill>
-          <a:ln w="12700" cap="flat" cmpd="sng">
-            <a:solidFill>
-              <a:srgbClr val="64FFDA">
-                <a:alpha val="30000"/>
-              </a:srgbClr>
-            </a:solidFill>
-            <a:prstDash val="solid"/>
-            <a:round/>
-          </a:ln>
-        </p:spPr>
-        <p:txBody>
-          <a:bodyPr vert="horz" wrap="square" lIns="63500" tIns="63500" rIns="63500" bIns="63500" rtlCol="0" anchor="ctr"/>
-          <a:lstStyle>
-            <a:defPPr marR="0" lvl="0" algn="l" rtl="0">
-              <a:lnSpc>
-                <a:spcPct val="100000"/>
-              </a:lnSpc>
-              <a:spcBef>
-                <a:spcPts val="0"/>
-              </a:spcBef>
-              <a:spcAft>
-                <a:spcPts val="0"/>
-              </a:spcAft>
-            </a:defPPr>
-            <a:lvl1pPr marR="0" lvl="0" algn="l" rtl="0">
-              <a:lnSpc>
-                <a:spcPct val="100000"/>
-              </a:lnSpc>
-              <a:spcBef>
-                <a:spcPts val="0"/>
-              </a:spcBef>
-              <a:spcAft>
-                <a:spcPts val="0"/>
-              </a:spcAft>
-              <a:buClr>
-                <a:srgbClr val="000000"/>
-              </a:buClr>
-              <a:buFont typeface="Arial"/>
-              <a:defRPr sz="1400" b="0" i="0" u="none" strike="noStrike" cap="none">
-                <a:solidFill>
-                  <a:srgbClr val="000000"/>
-                </a:solidFill>
-                <a:latin typeface="Arial"/>
-                <a:ea typeface="Arial"/>
-                <a:cs typeface="Arial"/>
-                <a:sym typeface="Arial"/>
-              </a:defRPr>
-            </a:lvl1pPr>
-            <a:lvl2pPr marR="0" lvl="1" algn="l" rtl="0">
-              <a:lnSpc>
-                <a:spcPct val="100000"/>
-              </a:lnSpc>
-              <a:spcBef>
-                <a:spcPts val="0"/>
-              </a:spcBef>
-              <a:spcAft>
-                <a:spcPts val="0"/>
-              </a:spcAft>
-              <a:buClr>
-                <a:srgbClr val="000000"/>
-              </a:buClr>
-              <a:buFont typeface="Arial"/>
-              <a:defRPr sz="1400" b="0" i="0" u="none" strike="noStrike" cap="none">
-                <a:solidFill>
-                  <a:srgbClr val="000000"/>
-                </a:solidFill>
-                <a:latin typeface="Arial"/>
-                <a:ea typeface="Arial"/>
-                <a:cs typeface="Arial"/>
-                <a:sym typeface="Arial"/>
-              </a:defRPr>
-            </a:lvl2pPr>
-            <a:lvl3pPr marR="0" lvl="2" algn="l" rtl="0">
-              <a:lnSpc>
-                <a:spcPct val="100000"/>
-              </a:lnSpc>
-              <a:spcBef>
-                <a:spcPts val="0"/>
-              </a:spcBef>
-              <a:spcAft>
-                <a:spcPts val="0"/>
-              </a:spcAft>
-              <a:buClr>
-                <a:srgbClr val="000000"/>
-              </a:buClr>
-              <a:buFont typeface="Arial"/>
-              <a:defRPr sz="1400" b="0" i="0" u="none" strike="noStrike" cap="none">
-                <a:solidFill>
-                  <a:srgbClr val="000000"/>
-                </a:solidFill>
-                <a:latin typeface="Arial"/>
-                <a:ea typeface="Arial"/>
-                <a:cs typeface="Arial"/>
-                <a:sym typeface="Arial"/>
-              </a:defRPr>
-            </a:lvl3pPr>
-            <a:lvl4pPr marR="0" lvl="3" algn="l" rtl="0">
-              <a:lnSpc>
-                <a:spcPct val="100000"/>
-              </a:lnSpc>
-              <a:spcBef>
-                <a:spcPts val="0"/>
-              </a:spcBef>
-              <a:spcAft>
-                <a:spcPts val="0"/>
-              </a:spcAft>
-              <a:buClr>
-                <a:srgbClr val="000000"/>
-              </a:buClr>
-              <a:buFont typeface="Arial"/>
-              <a:defRPr sz="1400" b="0" i="0" u="none" strike="noStrike" cap="none">
-                <a:solidFill>
-                  <a:srgbClr val="000000"/>
-                </a:solidFill>
-                <a:latin typeface="Arial"/>
-                <a:ea typeface="Arial"/>
-                <a:cs typeface="Arial"/>
-                <a:sym typeface="Arial"/>
-              </a:defRPr>
-            </a:lvl4pPr>
-            <a:lvl5pPr marR="0" lvl="4" algn="l" rtl="0">
-              <a:lnSpc>
-                <a:spcPct val="100000"/>
-              </a:lnSpc>
-              <a:spcBef>
-                <a:spcPts val="0"/>
-              </a:spcBef>
-              <a:spcAft>
-                <a:spcPts val="0"/>
-              </a:spcAft>
-              <a:buClr>
-                <a:srgbClr val="000000"/>
-              </a:buClr>
-              <a:buFont typeface="Arial"/>
-              <a:defRPr sz="1400" b="0" i="0" u="none" strike="noStrike" cap="none">
-                <a:solidFill>
-                  <a:srgbClr val="000000"/>
-                </a:solidFill>
-                <a:latin typeface="Arial"/>
-                <a:ea typeface="Arial"/>
-                <a:cs typeface="Arial"/>
-                <a:sym typeface="Arial"/>
-              </a:defRPr>
-            </a:lvl5pPr>
-            <a:lvl6pPr marR="0" lvl="5" algn="l" rtl="0">
-              <a:lnSpc>
-                <a:spcPct val="100000"/>
-              </a:lnSpc>
-              <a:spcBef>
-                <a:spcPts val="0"/>
-              </a:spcBef>
-              <a:spcAft>
-                <a:spcPts val="0"/>
-              </a:spcAft>
-              <a:buClr>
-                <a:srgbClr val="000000"/>
-              </a:buClr>
-              <a:buFont typeface="Arial"/>
-              <a:defRPr sz="1400" b="0" i="0" u="none" strike="noStrike" cap="none">
-                <a:solidFill>
-                  <a:srgbClr val="000000"/>
-                </a:solidFill>
-                <a:latin typeface="Arial"/>
-                <a:ea typeface="Arial"/>
-                <a:cs typeface="Arial"/>
-                <a:sym typeface="Arial"/>
-              </a:defRPr>
-            </a:lvl6pPr>
-            <a:lvl7pPr marR="0" lvl="6" algn="l" rtl="0">
-              <a:lnSpc>
-                <a:spcPct val="100000"/>
-              </a:lnSpc>
-              <a:spcBef>
-                <a:spcPts val="0"/>
-              </a:spcBef>
-              <a:spcAft>
-                <a:spcPts val="0"/>
-              </a:spcAft>
-              <a:buClr>
-                <a:srgbClr val="000000"/>
-              </a:buClr>
-              <a:buFont typeface="Arial"/>
-              <a:defRPr sz="1400" b="0" i="0" u="none" strike="noStrike" cap="none">
-                <a:solidFill>
-                  <a:srgbClr val="000000"/>
-                </a:solidFill>
-                <a:latin typeface="Arial"/>
-                <a:ea typeface="Arial"/>
-                <a:cs typeface="Arial"/>
-                <a:sym typeface="Arial"/>
-              </a:defRPr>
-            </a:lvl7pPr>
-            <a:lvl8pPr marR="0" lvl="7" algn="l" rtl="0">
-              <a:lnSpc>
-                <a:spcPct val="100000"/>
-              </a:lnSpc>
-              <a:spcBef>
-                <a:spcPts val="0"/>
-              </a:spcBef>
-              <a:spcAft>
-                <a:spcPts val="0"/>
-              </a:spcAft>
-              <a:buClr>
-                <a:srgbClr val="000000"/>
-              </a:buClr>
-              <a:buFont typeface="Arial"/>
-              <a:defRPr sz="1400" b="0" i="0" u="none" strike="noStrike" cap="none">
-                <a:solidFill>
-                  <a:srgbClr val="000000"/>
-                </a:solidFill>
-                <a:latin typeface="Arial"/>
-                <a:ea typeface="Arial"/>
-                <a:cs typeface="Arial"/>
-                <a:sym typeface="Arial"/>
-              </a:defRPr>
-            </a:lvl8pPr>
-            <a:lvl9pPr marR="0" lvl="8" algn="l" rtl="0">
-              <a:lnSpc>
-                <a:spcPct val="100000"/>
-              </a:lnSpc>
-              <a:spcBef>
-                <a:spcPts val="0"/>
-              </a:spcBef>
-              <a:spcAft>
-                <a:spcPts val="0"/>
-              </a:spcAft>
-              <a:buClr>
-                <a:srgbClr val="000000"/>
-              </a:buClr>
-              <a:buFont typeface="Arial"/>
-              <a:defRPr sz="1400" b="0" i="0" u="none" strike="noStrike" cap="none">
-                <a:solidFill>
-                  <a:srgbClr val="000000"/>
-                </a:solidFill>
-                <a:latin typeface="Arial"/>
-                <a:ea typeface="Arial"/>
-                <a:cs typeface="Arial"/>
-                <a:sym typeface="Arial"/>
-              </a:defRPr>
-            </a:lvl9pPr>
-          </a:lstStyle>
-          <a:p>
-            <a:pPr algn="ctr">
-              <a:defRPr/>
-            </a:pPr>
-            <a:endParaRPr/>
-          </a:p>
-        </p:txBody>
-      </p:sp>
-      <p:pic>
-        <p:nvPicPr>
-          <p:cNvPr id="27" name="Picture 13">
-            <a:extLst>
-              <a:ext uri="{FF2B5EF4-FFF2-40B4-BE49-F238E27FC236}">
-                <a16:creationId xmlns:a16="http://schemas.microsoft.com/office/drawing/2014/main" id="{5A52C9C6-573A-8677-B21F-DCBD818E10FF}"/>
-              </a:ext>
-            </a:extLst>
-          </p:cNvPr>
-          <p:cNvPicPr>
-            <a:picLocks noChangeAspect="1"/>
-          </p:cNvPicPr>
-          <p:nvPr/>
-        </p:nvPicPr>
-        <p:blipFill>
-          <a:blip r:embed="rId7">
-            <a:extLst>
-              <a:ext uri="{28A0092B-C50C-407E-A947-70E740481C1C}">
-                <a14:useLocalDpi xmlns:a14="http://schemas.microsoft.com/office/drawing/2010/main" val="0"/>
-              </a:ext>
-              <a:ext uri="{96DAC541-7B7A-43D3-8B79-37D633B846F1}">
-                <asvg:svgBlip xmlns:asvg="http://schemas.microsoft.com/office/drawing/2016/SVG/main" r:embed="rId8"/>
-              </a:ext>
-            </a:extLst>
-          </a:blip>
-          <a:stretch>
-            <a:fillRect/>
-          </a:stretch>
-        </p:blipFill>
-        <p:spPr>
-          <a:xfrm>
-            <a:off x="9461500" y="2092325"/>
-            <a:ext cx="635000" cy="635000"/>
-          </a:xfrm>
-          <a:prstGeom prst="rect">
-            <a:avLst/>
-          </a:prstGeom>
-        </p:spPr>
-      </p:pic>
-      <p:sp>
-        <p:nvSpPr>
-          <p:cNvPr id="28" name="AutoShape 14">
-            <a:extLst>
-              <a:ext uri="{FF2B5EF4-FFF2-40B4-BE49-F238E27FC236}">
-                <a16:creationId xmlns:a16="http://schemas.microsoft.com/office/drawing/2014/main" id="{3E05EEDC-F40B-8862-6B1F-1DCEAB2A6534}"/>
-              </a:ext>
-            </a:extLst>
-          </p:cNvPr>
-          <p:cNvSpPr/>
-          <p:nvPr/>
-        </p:nvSpPr>
-        <p:spPr>
-          <a:xfrm>
-            <a:off x="8255000" y="2854325"/>
-            <a:ext cx="3048000" cy="381000"/>
-          </a:xfrm>
-          <a:prstGeom prst="rect">
-            <a:avLst/>
-          </a:prstGeom>
-          <a:noFill/>
-          <a:ln w="12700" cap="flat" cmpd="sng">
-            <a:noFill/>
-            <a:prstDash val="solid"/>
-            <a:round/>
-          </a:ln>
-        </p:spPr>
-        <p:txBody>
-          <a:bodyPr vert="horz" wrap="square" lIns="0" tIns="0" rIns="0" bIns="0" rtlCol="0" anchor="ctr" anchorCtr="0"/>
-          <a:lstStyle>
-            <a:defPPr marR="0" lvl="0" algn="l" rtl="0">
-              <a:lnSpc>
-                <a:spcPct val="100000"/>
-              </a:lnSpc>
-              <a:spcBef>
-                <a:spcPts val="0"/>
-              </a:spcBef>
-              <a:spcAft>
-                <a:spcPts val="0"/>
-              </a:spcAft>
-            </a:defPPr>
-            <a:lvl1pPr marR="0" lvl="0" algn="l" rtl="0">
-              <a:lnSpc>
-                <a:spcPct val="100000"/>
-              </a:lnSpc>
-              <a:spcBef>
-                <a:spcPts val="0"/>
-              </a:spcBef>
-              <a:spcAft>
-                <a:spcPts val="0"/>
-              </a:spcAft>
-              <a:buClr>
-                <a:srgbClr val="000000"/>
-              </a:buClr>
-              <a:buFont typeface="Arial"/>
-              <a:defRPr sz="1400" b="0" i="0" u="none" strike="noStrike" cap="none">
-                <a:solidFill>
-                  <a:srgbClr val="000000"/>
-                </a:solidFill>
-                <a:latin typeface="Arial"/>
-                <a:ea typeface="Arial"/>
-                <a:cs typeface="Arial"/>
-                <a:sym typeface="Arial"/>
-              </a:defRPr>
-            </a:lvl1pPr>
-            <a:lvl2pPr marR="0" lvl="1" algn="l" rtl="0">
-              <a:lnSpc>
-                <a:spcPct val="100000"/>
-              </a:lnSpc>
-              <a:spcBef>
-                <a:spcPts val="0"/>
-              </a:spcBef>
-              <a:spcAft>
-                <a:spcPts val="0"/>
-              </a:spcAft>
-              <a:buClr>
-                <a:srgbClr val="000000"/>
-              </a:buClr>
-              <a:buFont typeface="Arial"/>
-              <a:defRPr sz="1400" b="0" i="0" u="none" strike="noStrike" cap="none">
-                <a:solidFill>
-                  <a:srgbClr val="000000"/>
-                </a:solidFill>
-                <a:latin typeface="Arial"/>
-                <a:ea typeface="Arial"/>
-                <a:cs typeface="Arial"/>
-                <a:sym typeface="Arial"/>
-              </a:defRPr>
-            </a:lvl2pPr>
-            <a:lvl3pPr marR="0" lvl="2" algn="l" rtl="0">
-              <a:lnSpc>
-                <a:spcPct val="100000"/>
-              </a:lnSpc>
-              <a:spcBef>
-                <a:spcPts val="0"/>
-              </a:spcBef>
-              <a:spcAft>
-                <a:spcPts val="0"/>
-              </a:spcAft>
-              <a:buClr>
-                <a:srgbClr val="000000"/>
-              </a:buClr>
-              <a:buFont typeface="Arial"/>
-              <a:defRPr sz="1400" b="0" i="0" u="none" strike="noStrike" cap="none">
-                <a:solidFill>
-                  <a:srgbClr val="000000"/>
-                </a:solidFill>
-                <a:latin typeface="Arial"/>
-                <a:ea typeface="Arial"/>
-                <a:cs typeface="Arial"/>
-                <a:sym typeface="Arial"/>
-              </a:defRPr>
-            </a:lvl3pPr>
-            <a:lvl4pPr marR="0" lvl="3" algn="l" rtl="0">
-              <a:lnSpc>
-                <a:spcPct val="100000"/>
-              </a:lnSpc>
-              <a:spcBef>
-                <a:spcPts val="0"/>
-              </a:spcBef>
-              <a:spcAft>
-                <a:spcPts val="0"/>
-              </a:spcAft>
-              <a:buClr>
-                <a:srgbClr val="000000"/>
-              </a:buClr>
-              <a:buFont typeface="Arial"/>
-              <a:defRPr sz="1400" b="0" i="0" u="none" strike="noStrike" cap="none">
-                <a:solidFill>
-                  <a:srgbClr val="000000"/>
-                </a:solidFill>
-                <a:latin typeface="Arial"/>
-                <a:ea typeface="Arial"/>
-                <a:cs typeface="Arial"/>
-                <a:sym typeface="Arial"/>
-              </a:defRPr>
-            </a:lvl4pPr>
-            <a:lvl5pPr marR="0" lvl="4" algn="l" rtl="0">
-              <a:lnSpc>
-                <a:spcPct val="100000"/>
-              </a:lnSpc>
-              <a:spcBef>
-                <a:spcPts val="0"/>
-              </a:spcBef>
-              <a:spcAft>
-                <a:spcPts val="0"/>
-              </a:spcAft>
-              <a:buClr>
-                <a:srgbClr val="000000"/>
-              </a:buClr>
-              <a:buFont typeface="Arial"/>
-              <a:defRPr sz="1400" b="0" i="0" u="none" strike="noStrike" cap="none">
-                <a:solidFill>
-                  <a:srgbClr val="000000"/>
-                </a:solidFill>
-                <a:latin typeface="Arial"/>
-                <a:ea typeface="Arial"/>
-                <a:cs typeface="Arial"/>
-                <a:sym typeface="Arial"/>
-              </a:defRPr>
-            </a:lvl5pPr>
-            <a:lvl6pPr marR="0" lvl="5" algn="l" rtl="0">
-              <a:lnSpc>
-                <a:spcPct val="100000"/>
-              </a:lnSpc>
-              <a:spcBef>
-                <a:spcPts val="0"/>
-              </a:spcBef>
-              <a:spcAft>
-                <a:spcPts val="0"/>
-              </a:spcAft>
-              <a:buClr>
-                <a:srgbClr val="000000"/>
-              </a:buClr>
-              <a:buFont typeface="Arial"/>
-              <a:defRPr sz="1400" b="0" i="0" u="none" strike="noStrike" cap="none">
-                <a:solidFill>
-                  <a:srgbClr val="000000"/>
-                </a:solidFill>
-                <a:latin typeface="Arial"/>
-                <a:ea typeface="Arial"/>
-                <a:cs typeface="Arial"/>
-                <a:sym typeface="Arial"/>
-              </a:defRPr>
-            </a:lvl6pPr>
-            <a:lvl7pPr marR="0" lvl="6" algn="l" rtl="0">
-              <a:lnSpc>
-                <a:spcPct val="100000"/>
-              </a:lnSpc>
-              <a:spcBef>
-                <a:spcPts val="0"/>
-              </a:spcBef>
-              <a:spcAft>
-                <a:spcPts val="0"/>
-              </a:spcAft>
-              <a:buClr>
-                <a:srgbClr val="000000"/>
-              </a:buClr>
-              <a:buFont typeface="Arial"/>
-              <a:defRPr sz="1400" b="0" i="0" u="none" strike="noStrike" cap="none">
-                <a:solidFill>
-                  <a:srgbClr val="000000"/>
-                </a:solidFill>
-                <a:latin typeface="Arial"/>
-                <a:ea typeface="Arial"/>
-                <a:cs typeface="Arial"/>
-                <a:sym typeface="Arial"/>
-              </a:defRPr>
-            </a:lvl7pPr>
-            <a:lvl8pPr marR="0" lvl="7" algn="l" rtl="0">
-              <a:lnSpc>
-                <a:spcPct val="100000"/>
-              </a:lnSpc>
-              <a:spcBef>
-                <a:spcPts val="0"/>
-              </a:spcBef>
-              <a:spcAft>
-                <a:spcPts val="0"/>
-              </a:spcAft>
-              <a:buClr>
-                <a:srgbClr val="000000"/>
-              </a:buClr>
-              <a:buFont typeface="Arial"/>
-              <a:defRPr sz="1400" b="0" i="0" u="none" strike="noStrike" cap="none">
-                <a:solidFill>
-                  <a:srgbClr val="000000"/>
-                </a:solidFill>
-                <a:latin typeface="Arial"/>
-                <a:ea typeface="Arial"/>
-                <a:cs typeface="Arial"/>
-                <a:sym typeface="Arial"/>
-              </a:defRPr>
-            </a:lvl8pPr>
-            <a:lvl9pPr marR="0" lvl="8" algn="l" rtl="0">
-              <a:lnSpc>
-                <a:spcPct val="100000"/>
-              </a:lnSpc>
-              <a:spcBef>
-                <a:spcPts val="0"/>
-              </a:spcBef>
-              <a:spcAft>
-                <a:spcPts val="0"/>
-              </a:spcAft>
-              <a:buClr>
-                <a:srgbClr val="000000"/>
-              </a:buClr>
-              <a:buFont typeface="Arial"/>
-              <a:defRPr sz="1400" b="0" i="0" u="none" strike="noStrike" cap="none">
-                <a:solidFill>
-                  <a:srgbClr val="000000"/>
-                </a:solidFill>
-                <a:latin typeface="Arial"/>
-                <a:ea typeface="Arial"/>
-                <a:cs typeface="Arial"/>
-                <a:sym typeface="Arial"/>
-              </a:defRPr>
-            </a:lvl9pPr>
-          </a:lstStyle>
-          <a:p>
-            <a:pPr indent="0" algn="ctr">
-              <a:lnSpc>
-                <a:spcPct val="125000"/>
-              </a:lnSpc>
-              <a:defRPr/>
-            </a:pPr>
-            <a:r>
-              <a:rPr lang="en-US" sz="2000" b="1" i="0" u="none" strike="noStrike">
-                <a:solidFill>
-                  <a:srgbClr val="FFFFFF"/>
-                </a:solidFill>
-                <a:latin typeface="Roboto"/>
-                <a:ea typeface="Roboto"/>
-                <a:cs typeface="Roboto"/>
-                <a:sym typeface="Roboto"/>
-              </a:rPr>
-              <a:t>原型实现与性能验证</a:t>
-            </a:r>
-            <a:endParaRPr lang="en-US" sz="1100"/>
-          </a:p>
-        </p:txBody>
-      </p:sp>
-      <p:sp>
-        <p:nvSpPr>
-          <p:cNvPr id="29" name="AutoShape 15">
-            <a:extLst>
-              <a:ext uri="{FF2B5EF4-FFF2-40B4-BE49-F238E27FC236}">
-                <a16:creationId xmlns:a16="http://schemas.microsoft.com/office/drawing/2014/main" id="{69FEDBE1-F6F7-1AF9-2F53-E23336B90F1A}"/>
-              </a:ext>
-            </a:extLst>
-          </p:cNvPr>
-          <p:cNvSpPr/>
-          <p:nvPr/>
-        </p:nvSpPr>
-        <p:spPr>
-          <a:xfrm>
-            <a:off x="8255000" y="3362325"/>
-            <a:ext cx="3048000" cy="1270000"/>
-          </a:xfrm>
-          <a:prstGeom prst="rect">
-            <a:avLst/>
-          </a:prstGeom>
-          <a:noFill/>
-          <a:ln w="12700" cap="flat" cmpd="sng">
-            <a:noFill/>
-            <a:prstDash val="solid"/>
-            <a:round/>
-          </a:ln>
-        </p:spPr>
-        <p:txBody>
-          <a:bodyPr vert="horz" wrap="square" lIns="0" tIns="0" rIns="0" bIns="0" rtlCol="0" anchor="ctr" anchorCtr="0"/>
-          <a:lstStyle>
-            <a:defPPr marR="0" lvl="0" algn="l" rtl="0">
-              <a:lnSpc>
-                <a:spcPct val="100000"/>
-              </a:lnSpc>
-              <a:spcBef>
-                <a:spcPts val="0"/>
-              </a:spcBef>
-              <a:spcAft>
-                <a:spcPts val="0"/>
-              </a:spcAft>
-            </a:defPPr>
-            <a:lvl1pPr marR="0" lvl="0" algn="l" rtl="0">
-              <a:lnSpc>
-                <a:spcPct val="100000"/>
-              </a:lnSpc>
-              <a:spcBef>
-                <a:spcPts val="0"/>
-              </a:spcBef>
-              <a:spcAft>
-                <a:spcPts val="0"/>
-              </a:spcAft>
-              <a:buClr>
-                <a:srgbClr val="000000"/>
-              </a:buClr>
-              <a:buFont typeface="Arial"/>
-              <a:defRPr sz="1400" b="0" i="0" u="none" strike="noStrike" cap="none">
-                <a:solidFill>
-                  <a:srgbClr val="000000"/>
-                </a:solidFill>
-                <a:latin typeface="Arial"/>
-                <a:ea typeface="Arial"/>
-                <a:cs typeface="Arial"/>
-                <a:sym typeface="Arial"/>
-              </a:defRPr>
-            </a:lvl1pPr>
-            <a:lvl2pPr marR="0" lvl="1" algn="l" rtl="0">
-              <a:lnSpc>
-                <a:spcPct val="100000"/>
-              </a:lnSpc>
-              <a:spcBef>
-                <a:spcPts val="0"/>
-              </a:spcBef>
-              <a:spcAft>
-                <a:spcPts val="0"/>
-              </a:spcAft>
-              <a:buClr>
-                <a:srgbClr val="000000"/>
-              </a:buClr>
-              <a:buFont typeface="Arial"/>
-              <a:defRPr sz="1400" b="0" i="0" u="none" strike="noStrike" cap="none">
-                <a:solidFill>
-                  <a:srgbClr val="000000"/>
-                </a:solidFill>
-                <a:latin typeface="Arial"/>
-                <a:ea typeface="Arial"/>
-                <a:cs typeface="Arial"/>
-                <a:sym typeface="Arial"/>
-              </a:defRPr>
-            </a:lvl2pPr>
-            <a:lvl3pPr marR="0" lvl="2" algn="l" rtl="0">
-              <a:lnSpc>
-                <a:spcPct val="100000"/>
-              </a:lnSpc>
-              <a:spcBef>
-                <a:spcPts val="0"/>
-              </a:spcBef>
-              <a:spcAft>
-                <a:spcPts val="0"/>
-              </a:spcAft>
-              <a:buClr>
-                <a:srgbClr val="000000"/>
-              </a:buClr>
-              <a:buFont typeface="Arial"/>
-              <a:defRPr sz="1400" b="0" i="0" u="none" strike="noStrike" cap="none">
-                <a:solidFill>
-                  <a:srgbClr val="000000"/>
-                </a:solidFill>
-                <a:latin typeface="Arial"/>
-                <a:ea typeface="Arial"/>
-                <a:cs typeface="Arial"/>
-                <a:sym typeface="Arial"/>
-              </a:defRPr>
-            </a:lvl3pPr>
-            <a:lvl4pPr marR="0" lvl="3" algn="l" rtl="0">
-              <a:lnSpc>
-                <a:spcPct val="100000"/>
-              </a:lnSpc>
-              <a:spcBef>
-                <a:spcPts val="0"/>
-              </a:spcBef>
-              <a:spcAft>
-                <a:spcPts val="0"/>
-              </a:spcAft>
-              <a:buClr>
-                <a:srgbClr val="000000"/>
-              </a:buClr>
-              <a:buFont typeface="Arial"/>
-              <a:defRPr sz="1400" b="0" i="0" u="none" strike="noStrike" cap="none">
-                <a:solidFill>
-                  <a:srgbClr val="000000"/>
-                </a:solidFill>
-                <a:latin typeface="Arial"/>
-                <a:ea typeface="Arial"/>
-                <a:cs typeface="Arial"/>
-                <a:sym typeface="Arial"/>
-              </a:defRPr>
-            </a:lvl4pPr>
-            <a:lvl5pPr marR="0" lvl="4" algn="l" rtl="0">
-              <a:lnSpc>
-                <a:spcPct val="100000"/>
-              </a:lnSpc>
-              <a:spcBef>
-                <a:spcPts val="0"/>
-              </a:spcBef>
-              <a:spcAft>
-                <a:spcPts val="0"/>
-              </a:spcAft>
-              <a:buClr>
-                <a:srgbClr val="000000"/>
-              </a:buClr>
-              <a:buFont typeface="Arial"/>
-              <a:defRPr sz="1400" b="0" i="0" u="none" strike="noStrike" cap="none">
-                <a:solidFill>
-                  <a:srgbClr val="000000"/>
-                </a:solidFill>
-                <a:latin typeface="Arial"/>
-                <a:ea typeface="Arial"/>
-                <a:cs typeface="Arial"/>
-                <a:sym typeface="Arial"/>
-              </a:defRPr>
-            </a:lvl5pPr>
-            <a:lvl6pPr marR="0" lvl="5" algn="l" rtl="0">
-              <a:lnSpc>
-                <a:spcPct val="100000"/>
-              </a:lnSpc>
-              <a:spcBef>
-                <a:spcPts val="0"/>
-              </a:spcBef>
-              <a:spcAft>
-                <a:spcPts val="0"/>
-              </a:spcAft>
-              <a:buClr>
-                <a:srgbClr val="000000"/>
-              </a:buClr>
-              <a:buFont typeface="Arial"/>
-              <a:defRPr sz="1400" b="0" i="0" u="none" strike="noStrike" cap="none">
-                <a:solidFill>
-                  <a:srgbClr val="000000"/>
-                </a:solidFill>
-                <a:latin typeface="Arial"/>
-                <a:ea typeface="Arial"/>
-                <a:cs typeface="Arial"/>
-                <a:sym typeface="Arial"/>
-              </a:defRPr>
-            </a:lvl6pPr>
-            <a:lvl7pPr marR="0" lvl="6" algn="l" rtl="0">
-              <a:lnSpc>
-                <a:spcPct val="100000"/>
-              </a:lnSpc>
-              <a:spcBef>
-                <a:spcPts val="0"/>
-              </a:spcBef>
-              <a:spcAft>
-                <a:spcPts val="0"/>
-              </a:spcAft>
-              <a:buClr>
-                <a:srgbClr val="000000"/>
-              </a:buClr>
-              <a:buFont typeface="Arial"/>
-              <a:defRPr sz="1400" b="0" i="0" u="none" strike="noStrike" cap="none">
-                <a:solidFill>
-                  <a:srgbClr val="000000"/>
-                </a:solidFill>
-                <a:latin typeface="Arial"/>
-                <a:ea typeface="Arial"/>
-                <a:cs typeface="Arial"/>
-                <a:sym typeface="Arial"/>
-              </a:defRPr>
-            </a:lvl7pPr>
-            <a:lvl8pPr marR="0" lvl="7" algn="l" rtl="0">
-              <a:lnSpc>
-                <a:spcPct val="100000"/>
-              </a:lnSpc>
-              <a:spcBef>
-                <a:spcPts val="0"/>
-              </a:spcBef>
-              <a:spcAft>
-                <a:spcPts val="0"/>
-              </a:spcAft>
-              <a:buClr>
-                <a:srgbClr val="000000"/>
-              </a:buClr>
-              <a:buFont typeface="Arial"/>
-              <a:defRPr sz="1400" b="0" i="0" u="none" strike="noStrike" cap="none">
-                <a:solidFill>
-                  <a:srgbClr val="000000"/>
-                </a:solidFill>
-                <a:latin typeface="Arial"/>
-                <a:ea typeface="Arial"/>
-                <a:cs typeface="Arial"/>
-                <a:sym typeface="Arial"/>
-              </a:defRPr>
-            </a:lvl8pPr>
-            <a:lvl9pPr marR="0" lvl="8" algn="l" rtl="0">
-              <a:lnSpc>
-                <a:spcPct val="100000"/>
-              </a:lnSpc>
-              <a:spcBef>
-                <a:spcPts val="0"/>
-              </a:spcBef>
-              <a:spcAft>
-                <a:spcPts val="0"/>
-              </a:spcAft>
-              <a:buClr>
-                <a:srgbClr val="000000"/>
-              </a:buClr>
-              <a:buFont typeface="Arial"/>
-              <a:defRPr sz="1400" b="0" i="0" u="none" strike="noStrike" cap="none">
-                <a:solidFill>
-                  <a:srgbClr val="000000"/>
-                </a:solidFill>
-                <a:latin typeface="Arial"/>
-                <a:ea typeface="Arial"/>
-                <a:cs typeface="Arial"/>
-                <a:sym typeface="Arial"/>
-              </a:defRPr>
-            </a:lvl9pPr>
-          </a:lstStyle>
-          <a:p>
-            <a:pPr indent="0">
-              <a:lnSpc>
-                <a:spcPct val="108333"/>
-              </a:lnSpc>
-              <a:defRPr/>
-            </a:pPr>
-            <a:r>
-              <a:rPr lang="en-US" sz="1800" dirty="0" err="1">
-                <a:solidFill>
-                  <a:schemeClr val="bg1"/>
-                </a:solidFill>
-                <a:latin typeface="+mn-lt"/>
-                <a:ea typeface="+mn-ea"/>
-                <a:cs typeface="+mn-cs"/>
-                <a:sym typeface="Roboto"/>
-              </a:rPr>
-              <a:t>实现分布式</a:t>
-            </a:r>
-            <a:r>
-              <a:rPr lang="en-US" sz="1800" dirty="0">
-                <a:solidFill>
-                  <a:schemeClr val="bg1"/>
-                </a:solidFill>
-                <a:latin typeface="+mn-lt"/>
-                <a:ea typeface="+mn-ea"/>
-                <a:cs typeface="+mn-cs"/>
-                <a:sym typeface="Roboto"/>
-              </a:rPr>
-              <a:t> KV </a:t>
-            </a:r>
-            <a:r>
-              <a:rPr lang="en-US" sz="1800" dirty="0" err="1">
-                <a:solidFill>
-                  <a:schemeClr val="bg1"/>
-                </a:solidFill>
-                <a:latin typeface="+mn-lt"/>
-                <a:ea typeface="+mn-ea"/>
-                <a:cs typeface="+mn-cs"/>
-                <a:sym typeface="Roboto"/>
-              </a:rPr>
-              <a:t>数据库原型，实验证明混合隔离机制在保证正确性前提下显著提升了系统性能</a:t>
-            </a:r>
-            <a:r>
-              <a:rPr lang="en-US" sz="1800" dirty="0">
-                <a:solidFill>
-                  <a:schemeClr val="bg1"/>
-                </a:solidFill>
-                <a:latin typeface="+mn-lt"/>
-                <a:ea typeface="+mn-ea"/>
-                <a:cs typeface="+mn-cs"/>
-                <a:sym typeface="Roboto"/>
-              </a:rPr>
-              <a:t>。</a:t>
-            </a:r>
-            <a:endParaRPr lang="en-US" sz="1800" dirty="0">
-              <a:solidFill>
-                <a:schemeClr val="bg1"/>
-              </a:solidFill>
-              <a:latin typeface="+mn-lt"/>
-              <a:ea typeface="+mn-ea"/>
-              <a:cs typeface="+mn-cs"/>
-            </a:endParaRPr>
-          </a:p>
-        </p:txBody>
-      </p:sp>
-      <p:sp>
-        <p:nvSpPr>
-          <p:cNvPr id="30" name="AutoShape 16">
-            <a:extLst>
-              <a:ext uri="{FF2B5EF4-FFF2-40B4-BE49-F238E27FC236}">
-                <a16:creationId xmlns:a16="http://schemas.microsoft.com/office/drawing/2014/main" id="{E79140A1-EF0D-5B27-A7AB-C554EF0AFB96}"/>
-              </a:ext>
-            </a:extLst>
-          </p:cNvPr>
-          <p:cNvSpPr/>
-          <p:nvPr/>
-        </p:nvSpPr>
-        <p:spPr>
-          <a:xfrm>
-            <a:off x="762000" y="5394325"/>
-            <a:ext cx="10668000" cy="12700"/>
-          </a:xfrm>
-          <a:prstGeom prst="roundRect">
-            <a:avLst>
-              <a:gd name="adj" fmla="val 0"/>
-            </a:avLst>
-          </a:prstGeom>
-          <a:solidFill>
-            <a:srgbClr val="8892B0">
-              <a:alpha val="20000"/>
-            </a:srgbClr>
-          </a:solidFill>
-          <a:ln w="25400" cap="flat" cmpd="sng">
-            <a:noFill/>
-            <a:prstDash val="solid"/>
-            <a:round/>
-          </a:ln>
-        </p:spPr>
-        <p:txBody>
-          <a:bodyPr vert="horz" wrap="square" lIns="63500" tIns="63500" rIns="63500" bIns="63500" rtlCol="0" anchor="ctr"/>
-          <a:lstStyle>
-            <a:defPPr marR="0" lvl="0" algn="l" rtl="0">
-              <a:lnSpc>
-                <a:spcPct val="100000"/>
-              </a:lnSpc>
-              <a:spcBef>
-                <a:spcPts val="0"/>
-              </a:spcBef>
-              <a:spcAft>
-                <a:spcPts val="0"/>
-              </a:spcAft>
-            </a:defPPr>
-            <a:lvl1pPr marR="0" lvl="0" algn="l" rtl="0">
-              <a:lnSpc>
-                <a:spcPct val="100000"/>
-              </a:lnSpc>
-              <a:spcBef>
-                <a:spcPts val="0"/>
-              </a:spcBef>
-              <a:spcAft>
-                <a:spcPts val="0"/>
-              </a:spcAft>
-              <a:buClr>
-                <a:srgbClr val="000000"/>
-              </a:buClr>
-              <a:buFont typeface="Arial"/>
-              <a:defRPr sz="1400" b="0" i="0" u="none" strike="noStrike" cap="none">
-                <a:solidFill>
-                  <a:srgbClr val="000000"/>
-                </a:solidFill>
-                <a:latin typeface="Arial"/>
-                <a:ea typeface="Arial"/>
-                <a:cs typeface="Arial"/>
-                <a:sym typeface="Arial"/>
-              </a:defRPr>
-            </a:lvl1pPr>
-            <a:lvl2pPr marR="0" lvl="1" algn="l" rtl="0">
-              <a:lnSpc>
-                <a:spcPct val="100000"/>
-              </a:lnSpc>
-              <a:spcBef>
-                <a:spcPts val="0"/>
-              </a:spcBef>
-              <a:spcAft>
-                <a:spcPts val="0"/>
-              </a:spcAft>
-              <a:buClr>
-                <a:srgbClr val="000000"/>
-              </a:buClr>
-              <a:buFont typeface="Arial"/>
-              <a:defRPr sz="1400" b="0" i="0" u="none" strike="noStrike" cap="none">
-                <a:solidFill>
-                  <a:srgbClr val="000000"/>
-                </a:solidFill>
-                <a:latin typeface="Arial"/>
-                <a:ea typeface="Arial"/>
-                <a:cs typeface="Arial"/>
-                <a:sym typeface="Arial"/>
-              </a:defRPr>
-            </a:lvl2pPr>
-            <a:lvl3pPr marR="0" lvl="2" algn="l" rtl="0">
-              <a:lnSpc>
-                <a:spcPct val="100000"/>
-              </a:lnSpc>
-              <a:spcBef>
-                <a:spcPts val="0"/>
-              </a:spcBef>
-              <a:spcAft>
-                <a:spcPts val="0"/>
-              </a:spcAft>
-              <a:buClr>
-                <a:srgbClr val="000000"/>
-              </a:buClr>
-              <a:buFont typeface="Arial"/>
-              <a:defRPr sz="1400" b="0" i="0" u="none" strike="noStrike" cap="none">
-                <a:solidFill>
-                  <a:srgbClr val="000000"/>
-                </a:solidFill>
-                <a:latin typeface="Arial"/>
-                <a:ea typeface="Arial"/>
-                <a:cs typeface="Arial"/>
-                <a:sym typeface="Arial"/>
-              </a:defRPr>
-            </a:lvl3pPr>
-            <a:lvl4pPr marR="0" lvl="3" algn="l" rtl="0">
-              <a:lnSpc>
-                <a:spcPct val="100000"/>
-              </a:lnSpc>
-              <a:spcBef>
-                <a:spcPts val="0"/>
-              </a:spcBef>
-              <a:spcAft>
-                <a:spcPts val="0"/>
-              </a:spcAft>
-              <a:buClr>
-                <a:srgbClr val="000000"/>
-              </a:buClr>
-              <a:buFont typeface="Arial"/>
-              <a:defRPr sz="1400" b="0" i="0" u="none" strike="noStrike" cap="none">
-                <a:solidFill>
-                  <a:srgbClr val="000000"/>
-                </a:solidFill>
-                <a:latin typeface="Arial"/>
-                <a:ea typeface="Arial"/>
-                <a:cs typeface="Arial"/>
-                <a:sym typeface="Arial"/>
-              </a:defRPr>
-            </a:lvl4pPr>
-            <a:lvl5pPr marR="0" lvl="4" algn="l" rtl="0">
-              <a:lnSpc>
-                <a:spcPct val="100000"/>
-              </a:lnSpc>
-              <a:spcBef>
-                <a:spcPts val="0"/>
-              </a:spcBef>
-              <a:spcAft>
-                <a:spcPts val="0"/>
-              </a:spcAft>
-              <a:buClr>
-                <a:srgbClr val="000000"/>
-              </a:buClr>
-              <a:buFont typeface="Arial"/>
-              <a:defRPr sz="1400" b="0" i="0" u="none" strike="noStrike" cap="none">
-                <a:solidFill>
-                  <a:srgbClr val="000000"/>
-                </a:solidFill>
-                <a:latin typeface="Arial"/>
-                <a:ea typeface="Arial"/>
-                <a:cs typeface="Arial"/>
-                <a:sym typeface="Arial"/>
-              </a:defRPr>
-            </a:lvl5pPr>
-            <a:lvl6pPr marR="0" lvl="5" algn="l" rtl="0">
-              <a:lnSpc>
-                <a:spcPct val="100000"/>
-              </a:lnSpc>
-              <a:spcBef>
-                <a:spcPts val="0"/>
-              </a:spcBef>
-              <a:spcAft>
-                <a:spcPts val="0"/>
-              </a:spcAft>
-              <a:buClr>
-                <a:srgbClr val="000000"/>
-              </a:buClr>
-              <a:buFont typeface="Arial"/>
-              <a:defRPr sz="1400" b="0" i="0" u="none" strike="noStrike" cap="none">
-                <a:solidFill>
-                  <a:srgbClr val="000000"/>
-                </a:solidFill>
-                <a:latin typeface="Arial"/>
-                <a:ea typeface="Arial"/>
-                <a:cs typeface="Arial"/>
-                <a:sym typeface="Arial"/>
-              </a:defRPr>
-            </a:lvl6pPr>
-            <a:lvl7pPr marR="0" lvl="6" algn="l" rtl="0">
-              <a:lnSpc>
-                <a:spcPct val="100000"/>
-              </a:lnSpc>
-              <a:spcBef>
-                <a:spcPts val="0"/>
-              </a:spcBef>
-              <a:spcAft>
-                <a:spcPts val="0"/>
-              </a:spcAft>
-              <a:buClr>
-                <a:srgbClr val="000000"/>
-              </a:buClr>
-              <a:buFont typeface="Arial"/>
-              <a:defRPr sz="1400" b="0" i="0" u="none" strike="noStrike" cap="none">
-                <a:solidFill>
-                  <a:srgbClr val="000000"/>
-                </a:solidFill>
-                <a:latin typeface="Arial"/>
-                <a:ea typeface="Arial"/>
-                <a:cs typeface="Arial"/>
-                <a:sym typeface="Arial"/>
-              </a:defRPr>
-            </a:lvl7pPr>
-            <a:lvl8pPr marR="0" lvl="7" algn="l" rtl="0">
-              <a:lnSpc>
-                <a:spcPct val="100000"/>
-              </a:lnSpc>
-              <a:spcBef>
-                <a:spcPts val="0"/>
-              </a:spcBef>
-              <a:spcAft>
-                <a:spcPts val="0"/>
-              </a:spcAft>
-              <a:buClr>
-                <a:srgbClr val="000000"/>
-              </a:buClr>
-              <a:buFont typeface="Arial"/>
-              <a:defRPr sz="1400" b="0" i="0" u="none" strike="noStrike" cap="none">
-                <a:solidFill>
-                  <a:srgbClr val="000000"/>
-                </a:solidFill>
-                <a:latin typeface="Arial"/>
-                <a:ea typeface="Arial"/>
-                <a:cs typeface="Arial"/>
-                <a:sym typeface="Arial"/>
-              </a:defRPr>
-            </a:lvl8pPr>
-            <a:lvl9pPr marR="0" lvl="8" algn="l" rtl="0">
-              <a:lnSpc>
-                <a:spcPct val="100000"/>
-              </a:lnSpc>
-              <a:spcBef>
-                <a:spcPts val="0"/>
-              </a:spcBef>
-              <a:spcAft>
-                <a:spcPts val="0"/>
-              </a:spcAft>
-              <a:buClr>
-                <a:srgbClr val="000000"/>
-              </a:buClr>
-              <a:buFont typeface="Arial"/>
-              <a:defRPr sz="1400" b="0" i="0" u="none" strike="noStrike" cap="none">
-                <a:solidFill>
-                  <a:srgbClr val="000000"/>
-                </a:solidFill>
-                <a:latin typeface="Arial"/>
-                <a:ea typeface="Arial"/>
-                <a:cs typeface="Arial"/>
-                <a:sym typeface="Arial"/>
-              </a:defRPr>
-            </a:lvl9pPr>
-          </a:lstStyle>
-          <a:p>
-            <a:pPr algn="ctr">
-              <a:defRPr/>
-            </a:pPr>
-            <a:endParaRPr/>
-          </a:p>
-        </p:txBody>
-      </p:sp>
-      <p:sp>
-        <p:nvSpPr>
-          <p:cNvPr id="32" name="矩形 31">
-            <a:extLst>
-              <a:ext uri="{FF2B5EF4-FFF2-40B4-BE49-F238E27FC236}">
-                <a16:creationId xmlns:a16="http://schemas.microsoft.com/office/drawing/2014/main" id="{2D0AF300-302F-442E-5C91-35DBCEB255AC}"/>
-              </a:ext>
-            </a:extLst>
-          </p:cNvPr>
-          <p:cNvSpPr/>
-          <p:nvPr/>
-        </p:nvSpPr>
-        <p:spPr>
-          <a:xfrm>
-            <a:off x="11079956" y="6422231"/>
-            <a:ext cx="435769" cy="435769"/>
-          </a:xfrm>
-          <a:prstGeom prst="rect">
-            <a:avLst/>
-          </a:prstGeom>
-          <a:solidFill>
-            <a:srgbClr val="870078"/>
-          </a:solidFill>
-        </p:spPr>
-        <p:style>
-          <a:lnRef idx="2">
-            <a:schemeClr val="accent1">
-              <a:shade val="15000"/>
-            </a:schemeClr>
-          </a:lnRef>
-          <a:fillRef idx="1">
-            <a:schemeClr val="accent1"/>
-          </a:fillRef>
-          <a:effectRef idx="0">
-            <a:schemeClr val="accent1"/>
-          </a:effectRef>
-          <a:fontRef idx="minor">
-            <a:schemeClr val="lt1"/>
-          </a:fontRef>
-        </p:style>
-        <p:txBody>
-          <a:bodyPr rtlCol="0" anchor="ctr"/>
-          <a:lstStyle/>
-          <a:p>
-            <a:pPr algn="ctr"/>
-            <a:r>
-              <a:rPr lang="en-US" altLang="zh-CN" dirty="0"/>
-              <a:t>29</a:t>
-            </a:r>
-            <a:endParaRPr lang="zh-CN" altLang="en-US" dirty="0"/>
-          </a:p>
-        </p:txBody>
-      </p:sp>
-    </p:spTree>
-    <p:extLst>
-      <p:ext uri="{BB962C8B-B14F-4D97-AF65-F5344CB8AC3E}">
-        <p14:creationId xmlns:p14="http://schemas.microsoft.com/office/powerpoint/2010/main" val="3253594666"/>
-      </p:ext>
-    </p:extLst>
-  </p:cSld>
-  <p:clrMapOvr>
-    <a:masterClrMapping/>
-  </p:clrMapOvr>
-  <mc:AlternateContent xmlns:mc="http://schemas.openxmlformats.org/markup-compatibility/2006" xmlns:p14="http://schemas.microsoft.com/office/powerpoint/2010/main">
-    <mc:Choice Requires="p14">
-      <p:transition p14:dur="10"/>
-    </mc:Choice>
-    <mc:Fallback xmlns="">
-      <p:transition/>
-    </mc:Fallback>
-  </mc:AlternateContent>
-</p:sld>
-</file>
-
 <file path=ppt/slides/slide3.xml><?xml version="1.0" encoding="utf-8"?>
 <p:sld xmlns:a="http://schemas.openxmlformats.org/drawingml/2006/main" xmlns:r="http://schemas.openxmlformats.org/officeDocument/2006/relationships" xmlns:p="http://schemas.openxmlformats.org/presentationml/2006/main">
   <p:cSld>
@@ -33722,6 +30768,3141 @@
       </p:grpSpPr>
       <p:sp>
         <p:nvSpPr>
+          <p:cNvPr id="31" name="AutoShape 4">
+            <a:extLst>
+              <a:ext uri="{FF2B5EF4-FFF2-40B4-BE49-F238E27FC236}">
+                <a16:creationId xmlns:a16="http://schemas.microsoft.com/office/drawing/2014/main" id="{18A93500-0495-A345-384D-C2E4AF003681}"/>
+              </a:ext>
+            </a:extLst>
+          </p:cNvPr>
+          <p:cNvSpPr/>
+          <p:nvPr/>
+        </p:nvSpPr>
+        <p:spPr>
+          <a:xfrm>
+            <a:off x="4445000" y="1834356"/>
+            <a:ext cx="3302000" cy="3048000"/>
+          </a:xfrm>
+          <a:prstGeom prst="roundRect">
+            <a:avLst>
+              <a:gd name="adj" fmla="val 4166"/>
+            </a:avLst>
+          </a:prstGeom>
+          <a:solidFill>
+            <a:schemeClr val="accent1">
+              <a:lumMod val="50000"/>
+            </a:schemeClr>
+          </a:solidFill>
+          <a:ln w="12700" cap="flat" cmpd="sng">
+            <a:solidFill>
+              <a:srgbClr val="64FFDA">
+                <a:alpha val="30000"/>
+              </a:srgbClr>
+            </a:solidFill>
+            <a:prstDash val="solid"/>
+            <a:round/>
+          </a:ln>
+        </p:spPr>
+        <p:txBody>
+          <a:bodyPr vert="horz" wrap="square" lIns="63500" tIns="63500" rIns="63500" bIns="63500" rtlCol="0" anchor="ctr"/>
+          <a:lstStyle>
+            <a:defPPr marR="0" lvl="0" algn="l" rtl="0">
+              <a:lnSpc>
+                <a:spcPct val="100000"/>
+              </a:lnSpc>
+              <a:spcBef>
+                <a:spcPts val="0"/>
+              </a:spcBef>
+              <a:spcAft>
+                <a:spcPts val="0"/>
+              </a:spcAft>
+            </a:defPPr>
+            <a:lvl1pPr marR="0" lvl="0" algn="l" rtl="0">
+              <a:lnSpc>
+                <a:spcPct val="100000"/>
+              </a:lnSpc>
+              <a:spcBef>
+                <a:spcPts val="0"/>
+              </a:spcBef>
+              <a:spcAft>
+                <a:spcPts val="0"/>
+              </a:spcAft>
+              <a:buClr>
+                <a:srgbClr val="000000"/>
+              </a:buClr>
+              <a:buFont typeface="Arial"/>
+              <a:defRPr sz="1400" b="0" i="0" u="none" strike="noStrike" cap="none">
+                <a:solidFill>
+                  <a:srgbClr val="000000"/>
+                </a:solidFill>
+                <a:latin typeface="Arial"/>
+                <a:ea typeface="Arial"/>
+                <a:cs typeface="Arial"/>
+                <a:sym typeface="Arial"/>
+              </a:defRPr>
+            </a:lvl1pPr>
+            <a:lvl2pPr marR="0" lvl="1" algn="l" rtl="0">
+              <a:lnSpc>
+                <a:spcPct val="100000"/>
+              </a:lnSpc>
+              <a:spcBef>
+                <a:spcPts val="0"/>
+              </a:spcBef>
+              <a:spcAft>
+                <a:spcPts val="0"/>
+              </a:spcAft>
+              <a:buClr>
+                <a:srgbClr val="000000"/>
+              </a:buClr>
+              <a:buFont typeface="Arial"/>
+              <a:defRPr sz="1400" b="0" i="0" u="none" strike="noStrike" cap="none">
+                <a:solidFill>
+                  <a:srgbClr val="000000"/>
+                </a:solidFill>
+                <a:latin typeface="Arial"/>
+                <a:ea typeface="Arial"/>
+                <a:cs typeface="Arial"/>
+                <a:sym typeface="Arial"/>
+              </a:defRPr>
+            </a:lvl2pPr>
+            <a:lvl3pPr marR="0" lvl="2" algn="l" rtl="0">
+              <a:lnSpc>
+                <a:spcPct val="100000"/>
+              </a:lnSpc>
+              <a:spcBef>
+                <a:spcPts val="0"/>
+              </a:spcBef>
+              <a:spcAft>
+                <a:spcPts val="0"/>
+              </a:spcAft>
+              <a:buClr>
+                <a:srgbClr val="000000"/>
+              </a:buClr>
+              <a:buFont typeface="Arial"/>
+              <a:defRPr sz="1400" b="0" i="0" u="none" strike="noStrike" cap="none">
+                <a:solidFill>
+                  <a:srgbClr val="000000"/>
+                </a:solidFill>
+                <a:latin typeface="Arial"/>
+                <a:ea typeface="Arial"/>
+                <a:cs typeface="Arial"/>
+                <a:sym typeface="Arial"/>
+              </a:defRPr>
+            </a:lvl3pPr>
+            <a:lvl4pPr marR="0" lvl="3" algn="l" rtl="0">
+              <a:lnSpc>
+                <a:spcPct val="100000"/>
+              </a:lnSpc>
+              <a:spcBef>
+                <a:spcPts val="0"/>
+              </a:spcBef>
+              <a:spcAft>
+                <a:spcPts val="0"/>
+              </a:spcAft>
+              <a:buClr>
+                <a:srgbClr val="000000"/>
+              </a:buClr>
+              <a:buFont typeface="Arial"/>
+              <a:defRPr sz="1400" b="0" i="0" u="none" strike="noStrike" cap="none">
+                <a:solidFill>
+                  <a:srgbClr val="000000"/>
+                </a:solidFill>
+                <a:latin typeface="Arial"/>
+                <a:ea typeface="Arial"/>
+                <a:cs typeface="Arial"/>
+                <a:sym typeface="Arial"/>
+              </a:defRPr>
+            </a:lvl4pPr>
+            <a:lvl5pPr marR="0" lvl="4" algn="l" rtl="0">
+              <a:lnSpc>
+                <a:spcPct val="100000"/>
+              </a:lnSpc>
+              <a:spcBef>
+                <a:spcPts val="0"/>
+              </a:spcBef>
+              <a:spcAft>
+                <a:spcPts val="0"/>
+              </a:spcAft>
+              <a:buClr>
+                <a:srgbClr val="000000"/>
+              </a:buClr>
+              <a:buFont typeface="Arial"/>
+              <a:defRPr sz="1400" b="0" i="0" u="none" strike="noStrike" cap="none">
+                <a:solidFill>
+                  <a:srgbClr val="000000"/>
+                </a:solidFill>
+                <a:latin typeface="Arial"/>
+                <a:ea typeface="Arial"/>
+                <a:cs typeface="Arial"/>
+                <a:sym typeface="Arial"/>
+              </a:defRPr>
+            </a:lvl5pPr>
+            <a:lvl6pPr marR="0" lvl="5" algn="l" rtl="0">
+              <a:lnSpc>
+                <a:spcPct val="100000"/>
+              </a:lnSpc>
+              <a:spcBef>
+                <a:spcPts val="0"/>
+              </a:spcBef>
+              <a:spcAft>
+                <a:spcPts val="0"/>
+              </a:spcAft>
+              <a:buClr>
+                <a:srgbClr val="000000"/>
+              </a:buClr>
+              <a:buFont typeface="Arial"/>
+              <a:defRPr sz="1400" b="0" i="0" u="none" strike="noStrike" cap="none">
+                <a:solidFill>
+                  <a:srgbClr val="000000"/>
+                </a:solidFill>
+                <a:latin typeface="Arial"/>
+                <a:ea typeface="Arial"/>
+                <a:cs typeface="Arial"/>
+                <a:sym typeface="Arial"/>
+              </a:defRPr>
+            </a:lvl6pPr>
+            <a:lvl7pPr marR="0" lvl="6" algn="l" rtl="0">
+              <a:lnSpc>
+                <a:spcPct val="100000"/>
+              </a:lnSpc>
+              <a:spcBef>
+                <a:spcPts val="0"/>
+              </a:spcBef>
+              <a:spcAft>
+                <a:spcPts val="0"/>
+              </a:spcAft>
+              <a:buClr>
+                <a:srgbClr val="000000"/>
+              </a:buClr>
+              <a:buFont typeface="Arial"/>
+              <a:defRPr sz="1400" b="0" i="0" u="none" strike="noStrike" cap="none">
+                <a:solidFill>
+                  <a:srgbClr val="000000"/>
+                </a:solidFill>
+                <a:latin typeface="Arial"/>
+                <a:ea typeface="Arial"/>
+                <a:cs typeface="Arial"/>
+                <a:sym typeface="Arial"/>
+              </a:defRPr>
+            </a:lvl7pPr>
+            <a:lvl8pPr marR="0" lvl="7" algn="l" rtl="0">
+              <a:lnSpc>
+                <a:spcPct val="100000"/>
+              </a:lnSpc>
+              <a:spcBef>
+                <a:spcPts val="0"/>
+              </a:spcBef>
+              <a:spcAft>
+                <a:spcPts val="0"/>
+              </a:spcAft>
+              <a:buClr>
+                <a:srgbClr val="000000"/>
+              </a:buClr>
+              <a:buFont typeface="Arial"/>
+              <a:defRPr sz="1400" b="0" i="0" u="none" strike="noStrike" cap="none">
+                <a:solidFill>
+                  <a:srgbClr val="000000"/>
+                </a:solidFill>
+                <a:latin typeface="Arial"/>
+                <a:ea typeface="Arial"/>
+                <a:cs typeface="Arial"/>
+                <a:sym typeface="Arial"/>
+              </a:defRPr>
+            </a:lvl8pPr>
+            <a:lvl9pPr marR="0" lvl="8" algn="l" rtl="0">
+              <a:lnSpc>
+                <a:spcPct val="100000"/>
+              </a:lnSpc>
+              <a:spcBef>
+                <a:spcPts val="0"/>
+              </a:spcBef>
+              <a:spcAft>
+                <a:spcPts val="0"/>
+              </a:spcAft>
+              <a:buClr>
+                <a:srgbClr val="000000"/>
+              </a:buClr>
+              <a:buFont typeface="Arial"/>
+              <a:defRPr sz="1400" b="0" i="0" u="none" strike="noStrike" cap="none">
+                <a:solidFill>
+                  <a:srgbClr val="000000"/>
+                </a:solidFill>
+                <a:latin typeface="Arial"/>
+                <a:ea typeface="Arial"/>
+                <a:cs typeface="Arial"/>
+                <a:sym typeface="Arial"/>
+              </a:defRPr>
+            </a:lvl9pPr>
+          </a:lstStyle>
+          <a:p>
+            <a:pPr algn="ctr">
+              <a:defRPr/>
+            </a:pPr>
+            <a:endParaRPr>
+              <a:solidFill>
+                <a:srgbClr val="870078"/>
+              </a:solidFill>
+            </a:endParaRPr>
+          </a:p>
+        </p:txBody>
+      </p:sp>
+      <p:sp>
+        <p:nvSpPr>
+          <p:cNvPr id="2" name="文本占位符 1">
+            <a:extLst>
+              <a:ext uri="{FF2B5EF4-FFF2-40B4-BE49-F238E27FC236}">
+                <a16:creationId xmlns:a16="http://schemas.microsoft.com/office/drawing/2014/main" id="{22475C55-5DA8-FD16-F531-025AD326CC86}"/>
+              </a:ext>
+            </a:extLst>
+          </p:cNvPr>
+          <p:cNvSpPr>
+            <a:spLocks noGrp="1"/>
+          </p:cNvSpPr>
+          <p:nvPr>
+            <p:ph type="body" sz="quarter" idx="13"/>
+          </p:nvPr>
+        </p:nvSpPr>
+        <p:spPr/>
+        <p:txBody>
+          <a:bodyPr/>
+          <a:lstStyle/>
+          <a:p>
+            <a:r>
+              <a:rPr lang="zh-CN" altLang="en-US" dirty="0"/>
+              <a:t>本文主要工作</a:t>
+            </a:r>
+          </a:p>
+        </p:txBody>
+      </p:sp>
+      <p:sp>
+        <p:nvSpPr>
+          <p:cNvPr id="18" name="AutoShape 4">
+            <a:extLst>
+              <a:ext uri="{FF2B5EF4-FFF2-40B4-BE49-F238E27FC236}">
+                <a16:creationId xmlns:a16="http://schemas.microsoft.com/office/drawing/2014/main" id="{0A390B2D-7C32-B82E-3CF8-21DD82F8E09F}"/>
+              </a:ext>
+            </a:extLst>
+          </p:cNvPr>
+          <p:cNvSpPr/>
+          <p:nvPr/>
+        </p:nvSpPr>
+        <p:spPr>
+          <a:xfrm>
+            <a:off x="762000" y="1838325"/>
+            <a:ext cx="3302000" cy="3048000"/>
+          </a:xfrm>
+          <a:prstGeom prst="roundRect">
+            <a:avLst>
+              <a:gd name="adj" fmla="val 4166"/>
+            </a:avLst>
+          </a:prstGeom>
+          <a:solidFill>
+            <a:schemeClr val="accent1">
+              <a:lumMod val="50000"/>
+            </a:schemeClr>
+          </a:solidFill>
+          <a:ln w="12700" cap="flat" cmpd="sng">
+            <a:solidFill>
+              <a:srgbClr val="64FFDA">
+                <a:alpha val="30000"/>
+              </a:srgbClr>
+            </a:solidFill>
+            <a:prstDash val="solid"/>
+            <a:round/>
+          </a:ln>
+        </p:spPr>
+        <p:txBody>
+          <a:bodyPr vert="horz" wrap="square" lIns="63500" tIns="63500" rIns="63500" bIns="63500" rtlCol="0" anchor="ctr"/>
+          <a:lstStyle>
+            <a:defPPr marR="0" lvl="0" algn="l" rtl="0">
+              <a:lnSpc>
+                <a:spcPct val="100000"/>
+              </a:lnSpc>
+              <a:spcBef>
+                <a:spcPts val="0"/>
+              </a:spcBef>
+              <a:spcAft>
+                <a:spcPts val="0"/>
+              </a:spcAft>
+            </a:defPPr>
+            <a:lvl1pPr marR="0" lvl="0" algn="l" rtl="0">
+              <a:lnSpc>
+                <a:spcPct val="100000"/>
+              </a:lnSpc>
+              <a:spcBef>
+                <a:spcPts val="0"/>
+              </a:spcBef>
+              <a:spcAft>
+                <a:spcPts val="0"/>
+              </a:spcAft>
+              <a:buClr>
+                <a:srgbClr val="000000"/>
+              </a:buClr>
+              <a:buFont typeface="Arial"/>
+              <a:defRPr sz="1400" b="0" i="0" u="none" strike="noStrike" cap="none">
+                <a:solidFill>
+                  <a:srgbClr val="000000"/>
+                </a:solidFill>
+                <a:latin typeface="Arial"/>
+                <a:ea typeface="Arial"/>
+                <a:cs typeface="Arial"/>
+                <a:sym typeface="Arial"/>
+              </a:defRPr>
+            </a:lvl1pPr>
+            <a:lvl2pPr marR="0" lvl="1" algn="l" rtl="0">
+              <a:lnSpc>
+                <a:spcPct val="100000"/>
+              </a:lnSpc>
+              <a:spcBef>
+                <a:spcPts val="0"/>
+              </a:spcBef>
+              <a:spcAft>
+                <a:spcPts val="0"/>
+              </a:spcAft>
+              <a:buClr>
+                <a:srgbClr val="000000"/>
+              </a:buClr>
+              <a:buFont typeface="Arial"/>
+              <a:defRPr sz="1400" b="0" i="0" u="none" strike="noStrike" cap="none">
+                <a:solidFill>
+                  <a:srgbClr val="000000"/>
+                </a:solidFill>
+                <a:latin typeface="Arial"/>
+                <a:ea typeface="Arial"/>
+                <a:cs typeface="Arial"/>
+                <a:sym typeface="Arial"/>
+              </a:defRPr>
+            </a:lvl2pPr>
+            <a:lvl3pPr marR="0" lvl="2" algn="l" rtl="0">
+              <a:lnSpc>
+                <a:spcPct val="100000"/>
+              </a:lnSpc>
+              <a:spcBef>
+                <a:spcPts val="0"/>
+              </a:spcBef>
+              <a:spcAft>
+                <a:spcPts val="0"/>
+              </a:spcAft>
+              <a:buClr>
+                <a:srgbClr val="000000"/>
+              </a:buClr>
+              <a:buFont typeface="Arial"/>
+              <a:defRPr sz="1400" b="0" i="0" u="none" strike="noStrike" cap="none">
+                <a:solidFill>
+                  <a:srgbClr val="000000"/>
+                </a:solidFill>
+                <a:latin typeface="Arial"/>
+                <a:ea typeface="Arial"/>
+                <a:cs typeface="Arial"/>
+                <a:sym typeface="Arial"/>
+              </a:defRPr>
+            </a:lvl3pPr>
+            <a:lvl4pPr marR="0" lvl="3" algn="l" rtl="0">
+              <a:lnSpc>
+                <a:spcPct val="100000"/>
+              </a:lnSpc>
+              <a:spcBef>
+                <a:spcPts val="0"/>
+              </a:spcBef>
+              <a:spcAft>
+                <a:spcPts val="0"/>
+              </a:spcAft>
+              <a:buClr>
+                <a:srgbClr val="000000"/>
+              </a:buClr>
+              <a:buFont typeface="Arial"/>
+              <a:defRPr sz="1400" b="0" i="0" u="none" strike="noStrike" cap="none">
+                <a:solidFill>
+                  <a:srgbClr val="000000"/>
+                </a:solidFill>
+                <a:latin typeface="Arial"/>
+                <a:ea typeface="Arial"/>
+                <a:cs typeface="Arial"/>
+                <a:sym typeface="Arial"/>
+              </a:defRPr>
+            </a:lvl4pPr>
+            <a:lvl5pPr marR="0" lvl="4" algn="l" rtl="0">
+              <a:lnSpc>
+                <a:spcPct val="100000"/>
+              </a:lnSpc>
+              <a:spcBef>
+                <a:spcPts val="0"/>
+              </a:spcBef>
+              <a:spcAft>
+                <a:spcPts val="0"/>
+              </a:spcAft>
+              <a:buClr>
+                <a:srgbClr val="000000"/>
+              </a:buClr>
+              <a:buFont typeface="Arial"/>
+              <a:defRPr sz="1400" b="0" i="0" u="none" strike="noStrike" cap="none">
+                <a:solidFill>
+                  <a:srgbClr val="000000"/>
+                </a:solidFill>
+                <a:latin typeface="Arial"/>
+                <a:ea typeface="Arial"/>
+                <a:cs typeface="Arial"/>
+                <a:sym typeface="Arial"/>
+              </a:defRPr>
+            </a:lvl5pPr>
+            <a:lvl6pPr marR="0" lvl="5" algn="l" rtl="0">
+              <a:lnSpc>
+                <a:spcPct val="100000"/>
+              </a:lnSpc>
+              <a:spcBef>
+                <a:spcPts val="0"/>
+              </a:spcBef>
+              <a:spcAft>
+                <a:spcPts val="0"/>
+              </a:spcAft>
+              <a:buClr>
+                <a:srgbClr val="000000"/>
+              </a:buClr>
+              <a:buFont typeface="Arial"/>
+              <a:defRPr sz="1400" b="0" i="0" u="none" strike="noStrike" cap="none">
+                <a:solidFill>
+                  <a:srgbClr val="000000"/>
+                </a:solidFill>
+                <a:latin typeface="Arial"/>
+                <a:ea typeface="Arial"/>
+                <a:cs typeface="Arial"/>
+                <a:sym typeface="Arial"/>
+              </a:defRPr>
+            </a:lvl6pPr>
+            <a:lvl7pPr marR="0" lvl="6" algn="l" rtl="0">
+              <a:lnSpc>
+                <a:spcPct val="100000"/>
+              </a:lnSpc>
+              <a:spcBef>
+                <a:spcPts val="0"/>
+              </a:spcBef>
+              <a:spcAft>
+                <a:spcPts val="0"/>
+              </a:spcAft>
+              <a:buClr>
+                <a:srgbClr val="000000"/>
+              </a:buClr>
+              <a:buFont typeface="Arial"/>
+              <a:defRPr sz="1400" b="0" i="0" u="none" strike="noStrike" cap="none">
+                <a:solidFill>
+                  <a:srgbClr val="000000"/>
+                </a:solidFill>
+                <a:latin typeface="Arial"/>
+                <a:ea typeface="Arial"/>
+                <a:cs typeface="Arial"/>
+                <a:sym typeface="Arial"/>
+              </a:defRPr>
+            </a:lvl7pPr>
+            <a:lvl8pPr marR="0" lvl="7" algn="l" rtl="0">
+              <a:lnSpc>
+                <a:spcPct val="100000"/>
+              </a:lnSpc>
+              <a:spcBef>
+                <a:spcPts val="0"/>
+              </a:spcBef>
+              <a:spcAft>
+                <a:spcPts val="0"/>
+              </a:spcAft>
+              <a:buClr>
+                <a:srgbClr val="000000"/>
+              </a:buClr>
+              <a:buFont typeface="Arial"/>
+              <a:defRPr sz="1400" b="0" i="0" u="none" strike="noStrike" cap="none">
+                <a:solidFill>
+                  <a:srgbClr val="000000"/>
+                </a:solidFill>
+                <a:latin typeface="Arial"/>
+                <a:ea typeface="Arial"/>
+                <a:cs typeface="Arial"/>
+                <a:sym typeface="Arial"/>
+              </a:defRPr>
+            </a:lvl8pPr>
+            <a:lvl9pPr marR="0" lvl="8" algn="l" rtl="0">
+              <a:lnSpc>
+                <a:spcPct val="100000"/>
+              </a:lnSpc>
+              <a:spcBef>
+                <a:spcPts val="0"/>
+              </a:spcBef>
+              <a:spcAft>
+                <a:spcPts val="0"/>
+              </a:spcAft>
+              <a:buClr>
+                <a:srgbClr val="000000"/>
+              </a:buClr>
+              <a:buFont typeface="Arial"/>
+              <a:defRPr sz="1400" b="0" i="0" u="none" strike="noStrike" cap="none">
+                <a:solidFill>
+                  <a:srgbClr val="000000"/>
+                </a:solidFill>
+                <a:latin typeface="Arial"/>
+                <a:ea typeface="Arial"/>
+                <a:cs typeface="Arial"/>
+                <a:sym typeface="Arial"/>
+              </a:defRPr>
+            </a:lvl9pPr>
+          </a:lstStyle>
+          <a:p>
+            <a:pPr algn="ctr">
+              <a:defRPr/>
+            </a:pPr>
+            <a:endParaRPr>
+              <a:solidFill>
+                <a:srgbClr val="870078"/>
+              </a:solidFill>
+            </a:endParaRPr>
+          </a:p>
+        </p:txBody>
+      </p:sp>
+      <p:pic>
+        <p:nvPicPr>
+          <p:cNvPr id="19" name="Picture 5">
+            <a:extLst>
+              <a:ext uri="{FF2B5EF4-FFF2-40B4-BE49-F238E27FC236}">
+                <a16:creationId xmlns:a16="http://schemas.microsoft.com/office/drawing/2014/main" id="{BD7EC584-CB5E-B15F-B6A0-10EEA55C2BB9}"/>
+              </a:ext>
+            </a:extLst>
+          </p:cNvPr>
+          <p:cNvPicPr>
+            <a:picLocks noChangeAspect="1"/>
+          </p:cNvPicPr>
+          <p:nvPr/>
+        </p:nvPicPr>
+        <p:blipFill>
+          <a:blip r:embed="rId3">
+            <a:extLst>
+              <a:ext uri="{28A0092B-C50C-407E-A947-70E740481C1C}">
+                <a14:useLocalDpi xmlns:a14="http://schemas.microsoft.com/office/drawing/2010/main" val="0"/>
+              </a:ext>
+              <a:ext uri="{96DAC541-7B7A-43D3-8B79-37D633B846F1}">
+                <asvg:svgBlip xmlns:asvg="http://schemas.microsoft.com/office/drawing/2016/SVG/main" r:embed="rId4"/>
+              </a:ext>
+            </a:extLst>
+          </a:blip>
+          <a:stretch>
+            <a:fillRect/>
+          </a:stretch>
+        </p:blipFill>
+        <p:spPr>
+          <a:xfrm>
+            <a:off x="2095500" y="2092325"/>
+            <a:ext cx="635000" cy="635000"/>
+          </a:xfrm>
+          <a:prstGeom prst="rect">
+            <a:avLst/>
+          </a:prstGeom>
+        </p:spPr>
+      </p:pic>
+      <p:sp>
+        <p:nvSpPr>
+          <p:cNvPr id="20" name="AutoShape 6">
+            <a:extLst>
+              <a:ext uri="{FF2B5EF4-FFF2-40B4-BE49-F238E27FC236}">
+                <a16:creationId xmlns:a16="http://schemas.microsoft.com/office/drawing/2014/main" id="{E219B6F2-018B-3287-F762-6115059C60F4}"/>
+              </a:ext>
+            </a:extLst>
+          </p:cNvPr>
+          <p:cNvSpPr/>
+          <p:nvPr/>
+        </p:nvSpPr>
+        <p:spPr>
+          <a:xfrm>
+            <a:off x="889000" y="2854325"/>
+            <a:ext cx="3048000" cy="381000"/>
+          </a:xfrm>
+          <a:prstGeom prst="rect">
+            <a:avLst/>
+          </a:prstGeom>
+          <a:noFill/>
+          <a:ln w="12700" cap="flat" cmpd="sng">
+            <a:noFill/>
+            <a:prstDash val="solid"/>
+            <a:round/>
+          </a:ln>
+        </p:spPr>
+        <p:txBody>
+          <a:bodyPr vert="horz" wrap="square" lIns="0" tIns="0" rIns="0" bIns="0" rtlCol="0" anchor="ctr" anchorCtr="0"/>
+          <a:lstStyle>
+            <a:defPPr marR="0" lvl="0" algn="l" rtl="0">
+              <a:lnSpc>
+                <a:spcPct val="100000"/>
+              </a:lnSpc>
+              <a:spcBef>
+                <a:spcPts val="0"/>
+              </a:spcBef>
+              <a:spcAft>
+                <a:spcPts val="0"/>
+              </a:spcAft>
+            </a:defPPr>
+            <a:lvl1pPr marR="0" lvl="0" algn="l" rtl="0">
+              <a:lnSpc>
+                <a:spcPct val="100000"/>
+              </a:lnSpc>
+              <a:spcBef>
+                <a:spcPts val="0"/>
+              </a:spcBef>
+              <a:spcAft>
+                <a:spcPts val="0"/>
+              </a:spcAft>
+              <a:buClr>
+                <a:srgbClr val="000000"/>
+              </a:buClr>
+              <a:buFont typeface="Arial"/>
+              <a:defRPr sz="1400" b="0" i="0" u="none" strike="noStrike" cap="none">
+                <a:solidFill>
+                  <a:srgbClr val="000000"/>
+                </a:solidFill>
+                <a:latin typeface="Arial"/>
+                <a:ea typeface="Arial"/>
+                <a:cs typeface="Arial"/>
+                <a:sym typeface="Arial"/>
+              </a:defRPr>
+            </a:lvl1pPr>
+            <a:lvl2pPr marR="0" lvl="1" algn="l" rtl="0">
+              <a:lnSpc>
+                <a:spcPct val="100000"/>
+              </a:lnSpc>
+              <a:spcBef>
+                <a:spcPts val="0"/>
+              </a:spcBef>
+              <a:spcAft>
+                <a:spcPts val="0"/>
+              </a:spcAft>
+              <a:buClr>
+                <a:srgbClr val="000000"/>
+              </a:buClr>
+              <a:buFont typeface="Arial"/>
+              <a:defRPr sz="1400" b="0" i="0" u="none" strike="noStrike" cap="none">
+                <a:solidFill>
+                  <a:srgbClr val="000000"/>
+                </a:solidFill>
+                <a:latin typeface="Arial"/>
+                <a:ea typeface="Arial"/>
+                <a:cs typeface="Arial"/>
+                <a:sym typeface="Arial"/>
+              </a:defRPr>
+            </a:lvl2pPr>
+            <a:lvl3pPr marR="0" lvl="2" algn="l" rtl="0">
+              <a:lnSpc>
+                <a:spcPct val="100000"/>
+              </a:lnSpc>
+              <a:spcBef>
+                <a:spcPts val="0"/>
+              </a:spcBef>
+              <a:spcAft>
+                <a:spcPts val="0"/>
+              </a:spcAft>
+              <a:buClr>
+                <a:srgbClr val="000000"/>
+              </a:buClr>
+              <a:buFont typeface="Arial"/>
+              <a:defRPr sz="1400" b="0" i="0" u="none" strike="noStrike" cap="none">
+                <a:solidFill>
+                  <a:srgbClr val="000000"/>
+                </a:solidFill>
+                <a:latin typeface="Arial"/>
+                <a:ea typeface="Arial"/>
+                <a:cs typeface="Arial"/>
+                <a:sym typeface="Arial"/>
+              </a:defRPr>
+            </a:lvl3pPr>
+            <a:lvl4pPr marR="0" lvl="3" algn="l" rtl="0">
+              <a:lnSpc>
+                <a:spcPct val="100000"/>
+              </a:lnSpc>
+              <a:spcBef>
+                <a:spcPts val="0"/>
+              </a:spcBef>
+              <a:spcAft>
+                <a:spcPts val="0"/>
+              </a:spcAft>
+              <a:buClr>
+                <a:srgbClr val="000000"/>
+              </a:buClr>
+              <a:buFont typeface="Arial"/>
+              <a:defRPr sz="1400" b="0" i="0" u="none" strike="noStrike" cap="none">
+                <a:solidFill>
+                  <a:srgbClr val="000000"/>
+                </a:solidFill>
+                <a:latin typeface="Arial"/>
+                <a:ea typeface="Arial"/>
+                <a:cs typeface="Arial"/>
+                <a:sym typeface="Arial"/>
+              </a:defRPr>
+            </a:lvl4pPr>
+            <a:lvl5pPr marR="0" lvl="4" algn="l" rtl="0">
+              <a:lnSpc>
+                <a:spcPct val="100000"/>
+              </a:lnSpc>
+              <a:spcBef>
+                <a:spcPts val="0"/>
+              </a:spcBef>
+              <a:spcAft>
+                <a:spcPts val="0"/>
+              </a:spcAft>
+              <a:buClr>
+                <a:srgbClr val="000000"/>
+              </a:buClr>
+              <a:buFont typeface="Arial"/>
+              <a:defRPr sz="1400" b="0" i="0" u="none" strike="noStrike" cap="none">
+                <a:solidFill>
+                  <a:srgbClr val="000000"/>
+                </a:solidFill>
+                <a:latin typeface="Arial"/>
+                <a:ea typeface="Arial"/>
+                <a:cs typeface="Arial"/>
+                <a:sym typeface="Arial"/>
+              </a:defRPr>
+            </a:lvl5pPr>
+            <a:lvl6pPr marR="0" lvl="5" algn="l" rtl="0">
+              <a:lnSpc>
+                <a:spcPct val="100000"/>
+              </a:lnSpc>
+              <a:spcBef>
+                <a:spcPts val="0"/>
+              </a:spcBef>
+              <a:spcAft>
+                <a:spcPts val="0"/>
+              </a:spcAft>
+              <a:buClr>
+                <a:srgbClr val="000000"/>
+              </a:buClr>
+              <a:buFont typeface="Arial"/>
+              <a:defRPr sz="1400" b="0" i="0" u="none" strike="noStrike" cap="none">
+                <a:solidFill>
+                  <a:srgbClr val="000000"/>
+                </a:solidFill>
+                <a:latin typeface="Arial"/>
+                <a:ea typeface="Arial"/>
+                <a:cs typeface="Arial"/>
+                <a:sym typeface="Arial"/>
+              </a:defRPr>
+            </a:lvl6pPr>
+            <a:lvl7pPr marR="0" lvl="6" algn="l" rtl="0">
+              <a:lnSpc>
+                <a:spcPct val="100000"/>
+              </a:lnSpc>
+              <a:spcBef>
+                <a:spcPts val="0"/>
+              </a:spcBef>
+              <a:spcAft>
+                <a:spcPts val="0"/>
+              </a:spcAft>
+              <a:buClr>
+                <a:srgbClr val="000000"/>
+              </a:buClr>
+              <a:buFont typeface="Arial"/>
+              <a:defRPr sz="1400" b="0" i="0" u="none" strike="noStrike" cap="none">
+                <a:solidFill>
+                  <a:srgbClr val="000000"/>
+                </a:solidFill>
+                <a:latin typeface="Arial"/>
+                <a:ea typeface="Arial"/>
+                <a:cs typeface="Arial"/>
+                <a:sym typeface="Arial"/>
+              </a:defRPr>
+            </a:lvl7pPr>
+            <a:lvl8pPr marR="0" lvl="7" algn="l" rtl="0">
+              <a:lnSpc>
+                <a:spcPct val="100000"/>
+              </a:lnSpc>
+              <a:spcBef>
+                <a:spcPts val="0"/>
+              </a:spcBef>
+              <a:spcAft>
+                <a:spcPts val="0"/>
+              </a:spcAft>
+              <a:buClr>
+                <a:srgbClr val="000000"/>
+              </a:buClr>
+              <a:buFont typeface="Arial"/>
+              <a:defRPr sz="1400" b="0" i="0" u="none" strike="noStrike" cap="none">
+                <a:solidFill>
+                  <a:srgbClr val="000000"/>
+                </a:solidFill>
+                <a:latin typeface="Arial"/>
+                <a:ea typeface="Arial"/>
+                <a:cs typeface="Arial"/>
+                <a:sym typeface="Arial"/>
+              </a:defRPr>
+            </a:lvl8pPr>
+            <a:lvl9pPr marR="0" lvl="8" algn="l" rtl="0">
+              <a:lnSpc>
+                <a:spcPct val="100000"/>
+              </a:lnSpc>
+              <a:spcBef>
+                <a:spcPts val="0"/>
+              </a:spcBef>
+              <a:spcAft>
+                <a:spcPts val="0"/>
+              </a:spcAft>
+              <a:buClr>
+                <a:srgbClr val="000000"/>
+              </a:buClr>
+              <a:buFont typeface="Arial"/>
+              <a:defRPr sz="1400" b="0" i="0" u="none" strike="noStrike" cap="none">
+                <a:solidFill>
+                  <a:srgbClr val="000000"/>
+                </a:solidFill>
+                <a:latin typeface="Arial"/>
+                <a:ea typeface="Arial"/>
+                <a:cs typeface="Arial"/>
+                <a:sym typeface="Arial"/>
+              </a:defRPr>
+            </a:lvl9pPr>
+          </a:lstStyle>
+          <a:p>
+            <a:pPr indent="0" algn="ctr">
+              <a:lnSpc>
+                <a:spcPct val="125000"/>
+              </a:lnSpc>
+              <a:defRPr/>
+            </a:pPr>
+            <a:r>
+              <a:rPr lang="en-US" sz="2000" b="1" i="0" u="none" strike="noStrike">
+                <a:solidFill>
+                  <a:srgbClr val="FFFFFF"/>
+                </a:solidFill>
+                <a:latin typeface="Roboto"/>
+                <a:ea typeface="Roboto"/>
+                <a:cs typeface="Roboto"/>
+                <a:sym typeface="Roboto"/>
+              </a:rPr>
+              <a:t>统一事务模型与协议</a:t>
+            </a:r>
+            <a:endParaRPr lang="en-US" sz="1100"/>
+          </a:p>
+        </p:txBody>
+      </p:sp>
+      <p:sp>
+        <p:nvSpPr>
+          <p:cNvPr id="21" name="AutoShape 7">
+            <a:extLst>
+              <a:ext uri="{FF2B5EF4-FFF2-40B4-BE49-F238E27FC236}">
+                <a16:creationId xmlns:a16="http://schemas.microsoft.com/office/drawing/2014/main" id="{DCFBB115-56F4-97F5-C8E1-46DC0E80508C}"/>
+              </a:ext>
+            </a:extLst>
+          </p:cNvPr>
+          <p:cNvSpPr/>
+          <p:nvPr/>
+        </p:nvSpPr>
+        <p:spPr>
+          <a:xfrm>
+            <a:off x="889000" y="3362325"/>
+            <a:ext cx="3048000" cy="1270000"/>
+          </a:xfrm>
+          <a:prstGeom prst="rect">
+            <a:avLst/>
+          </a:prstGeom>
+          <a:noFill/>
+          <a:ln w="12700" cap="flat" cmpd="sng">
+            <a:noFill/>
+            <a:prstDash val="solid"/>
+            <a:round/>
+          </a:ln>
+        </p:spPr>
+        <p:txBody>
+          <a:bodyPr vert="horz" wrap="square" lIns="0" tIns="0" rIns="0" bIns="0" rtlCol="0" anchor="ctr" anchorCtr="0"/>
+          <a:lstStyle>
+            <a:defPPr marR="0" lvl="0" algn="l" rtl="0">
+              <a:lnSpc>
+                <a:spcPct val="100000"/>
+              </a:lnSpc>
+              <a:spcBef>
+                <a:spcPts val="0"/>
+              </a:spcBef>
+              <a:spcAft>
+                <a:spcPts val="0"/>
+              </a:spcAft>
+            </a:defPPr>
+            <a:lvl1pPr marR="0" lvl="0" algn="l" rtl="0">
+              <a:lnSpc>
+                <a:spcPct val="100000"/>
+              </a:lnSpc>
+              <a:spcBef>
+                <a:spcPts val="0"/>
+              </a:spcBef>
+              <a:spcAft>
+                <a:spcPts val="0"/>
+              </a:spcAft>
+              <a:buClr>
+                <a:srgbClr val="000000"/>
+              </a:buClr>
+              <a:buFont typeface="Arial"/>
+              <a:defRPr sz="1400" b="0" i="0" u="none" strike="noStrike" cap="none">
+                <a:solidFill>
+                  <a:srgbClr val="000000"/>
+                </a:solidFill>
+                <a:latin typeface="Arial"/>
+                <a:ea typeface="Arial"/>
+                <a:cs typeface="Arial"/>
+                <a:sym typeface="Arial"/>
+              </a:defRPr>
+            </a:lvl1pPr>
+            <a:lvl2pPr marR="0" lvl="1" algn="l" rtl="0">
+              <a:lnSpc>
+                <a:spcPct val="100000"/>
+              </a:lnSpc>
+              <a:spcBef>
+                <a:spcPts val="0"/>
+              </a:spcBef>
+              <a:spcAft>
+                <a:spcPts val="0"/>
+              </a:spcAft>
+              <a:buClr>
+                <a:srgbClr val="000000"/>
+              </a:buClr>
+              <a:buFont typeface="Arial"/>
+              <a:defRPr sz="1400" b="0" i="0" u="none" strike="noStrike" cap="none">
+                <a:solidFill>
+                  <a:srgbClr val="000000"/>
+                </a:solidFill>
+                <a:latin typeface="Arial"/>
+                <a:ea typeface="Arial"/>
+                <a:cs typeface="Arial"/>
+                <a:sym typeface="Arial"/>
+              </a:defRPr>
+            </a:lvl2pPr>
+            <a:lvl3pPr marR="0" lvl="2" algn="l" rtl="0">
+              <a:lnSpc>
+                <a:spcPct val="100000"/>
+              </a:lnSpc>
+              <a:spcBef>
+                <a:spcPts val="0"/>
+              </a:spcBef>
+              <a:spcAft>
+                <a:spcPts val="0"/>
+              </a:spcAft>
+              <a:buClr>
+                <a:srgbClr val="000000"/>
+              </a:buClr>
+              <a:buFont typeface="Arial"/>
+              <a:defRPr sz="1400" b="0" i="0" u="none" strike="noStrike" cap="none">
+                <a:solidFill>
+                  <a:srgbClr val="000000"/>
+                </a:solidFill>
+                <a:latin typeface="Arial"/>
+                <a:ea typeface="Arial"/>
+                <a:cs typeface="Arial"/>
+                <a:sym typeface="Arial"/>
+              </a:defRPr>
+            </a:lvl3pPr>
+            <a:lvl4pPr marR="0" lvl="3" algn="l" rtl="0">
+              <a:lnSpc>
+                <a:spcPct val="100000"/>
+              </a:lnSpc>
+              <a:spcBef>
+                <a:spcPts val="0"/>
+              </a:spcBef>
+              <a:spcAft>
+                <a:spcPts val="0"/>
+              </a:spcAft>
+              <a:buClr>
+                <a:srgbClr val="000000"/>
+              </a:buClr>
+              <a:buFont typeface="Arial"/>
+              <a:defRPr sz="1400" b="0" i="0" u="none" strike="noStrike" cap="none">
+                <a:solidFill>
+                  <a:srgbClr val="000000"/>
+                </a:solidFill>
+                <a:latin typeface="Arial"/>
+                <a:ea typeface="Arial"/>
+                <a:cs typeface="Arial"/>
+                <a:sym typeface="Arial"/>
+              </a:defRPr>
+            </a:lvl4pPr>
+            <a:lvl5pPr marR="0" lvl="4" algn="l" rtl="0">
+              <a:lnSpc>
+                <a:spcPct val="100000"/>
+              </a:lnSpc>
+              <a:spcBef>
+                <a:spcPts val="0"/>
+              </a:spcBef>
+              <a:spcAft>
+                <a:spcPts val="0"/>
+              </a:spcAft>
+              <a:buClr>
+                <a:srgbClr val="000000"/>
+              </a:buClr>
+              <a:buFont typeface="Arial"/>
+              <a:defRPr sz="1400" b="0" i="0" u="none" strike="noStrike" cap="none">
+                <a:solidFill>
+                  <a:srgbClr val="000000"/>
+                </a:solidFill>
+                <a:latin typeface="Arial"/>
+                <a:ea typeface="Arial"/>
+                <a:cs typeface="Arial"/>
+                <a:sym typeface="Arial"/>
+              </a:defRPr>
+            </a:lvl5pPr>
+            <a:lvl6pPr marR="0" lvl="5" algn="l" rtl="0">
+              <a:lnSpc>
+                <a:spcPct val="100000"/>
+              </a:lnSpc>
+              <a:spcBef>
+                <a:spcPts val="0"/>
+              </a:spcBef>
+              <a:spcAft>
+                <a:spcPts val="0"/>
+              </a:spcAft>
+              <a:buClr>
+                <a:srgbClr val="000000"/>
+              </a:buClr>
+              <a:buFont typeface="Arial"/>
+              <a:defRPr sz="1400" b="0" i="0" u="none" strike="noStrike" cap="none">
+                <a:solidFill>
+                  <a:srgbClr val="000000"/>
+                </a:solidFill>
+                <a:latin typeface="Arial"/>
+                <a:ea typeface="Arial"/>
+                <a:cs typeface="Arial"/>
+                <a:sym typeface="Arial"/>
+              </a:defRPr>
+            </a:lvl6pPr>
+            <a:lvl7pPr marR="0" lvl="6" algn="l" rtl="0">
+              <a:lnSpc>
+                <a:spcPct val="100000"/>
+              </a:lnSpc>
+              <a:spcBef>
+                <a:spcPts val="0"/>
+              </a:spcBef>
+              <a:spcAft>
+                <a:spcPts val="0"/>
+              </a:spcAft>
+              <a:buClr>
+                <a:srgbClr val="000000"/>
+              </a:buClr>
+              <a:buFont typeface="Arial"/>
+              <a:defRPr sz="1400" b="0" i="0" u="none" strike="noStrike" cap="none">
+                <a:solidFill>
+                  <a:srgbClr val="000000"/>
+                </a:solidFill>
+                <a:latin typeface="Arial"/>
+                <a:ea typeface="Arial"/>
+                <a:cs typeface="Arial"/>
+                <a:sym typeface="Arial"/>
+              </a:defRPr>
+            </a:lvl7pPr>
+            <a:lvl8pPr marR="0" lvl="7" algn="l" rtl="0">
+              <a:lnSpc>
+                <a:spcPct val="100000"/>
+              </a:lnSpc>
+              <a:spcBef>
+                <a:spcPts val="0"/>
+              </a:spcBef>
+              <a:spcAft>
+                <a:spcPts val="0"/>
+              </a:spcAft>
+              <a:buClr>
+                <a:srgbClr val="000000"/>
+              </a:buClr>
+              <a:buFont typeface="Arial"/>
+              <a:defRPr sz="1400" b="0" i="0" u="none" strike="noStrike" cap="none">
+                <a:solidFill>
+                  <a:srgbClr val="000000"/>
+                </a:solidFill>
+                <a:latin typeface="Arial"/>
+                <a:ea typeface="Arial"/>
+                <a:cs typeface="Arial"/>
+                <a:sym typeface="Arial"/>
+              </a:defRPr>
+            </a:lvl8pPr>
+            <a:lvl9pPr marR="0" lvl="8" algn="l" rtl="0">
+              <a:lnSpc>
+                <a:spcPct val="100000"/>
+              </a:lnSpc>
+              <a:spcBef>
+                <a:spcPts val="0"/>
+              </a:spcBef>
+              <a:spcAft>
+                <a:spcPts val="0"/>
+              </a:spcAft>
+              <a:buClr>
+                <a:srgbClr val="000000"/>
+              </a:buClr>
+              <a:buFont typeface="Arial"/>
+              <a:defRPr sz="1400" b="0" i="0" u="none" strike="noStrike" cap="none">
+                <a:solidFill>
+                  <a:srgbClr val="000000"/>
+                </a:solidFill>
+                <a:latin typeface="Arial"/>
+                <a:ea typeface="Arial"/>
+                <a:cs typeface="Arial"/>
+                <a:sym typeface="Arial"/>
+              </a:defRPr>
+            </a:lvl9pPr>
+          </a:lstStyle>
+          <a:p>
+            <a:pPr indent="0">
+              <a:lnSpc>
+                <a:spcPct val="108333"/>
+              </a:lnSpc>
+              <a:defRPr/>
+            </a:pPr>
+            <a:r>
+              <a:rPr lang="en-US" sz="1800" dirty="0" err="1">
+                <a:solidFill>
+                  <a:schemeClr val="bg1"/>
+                </a:solidFill>
+                <a:latin typeface="+mn-lt"/>
+                <a:ea typeface="+mn-ea"/>
+                <a:cs typeface="+mn-cs"/>
+                <a:sym typeface="Roboto"/>
+              </a:rPr>
+              <a:t>建立了统一的事务模型，设计了支持多种隔离级别混合运行的并发控制协议，奠定系统核心基础</a:t>
+            </a:r>
+            <a:r>
+              <a:rPr lang="en-US" sz="1800" dirty="0">
+                <a:solidFill>
+                  <a:schemeClr val="bg1"/>
+                </a:solidFill>
+                <a:latin typeface="+mn-lt"/>
+                <a:ea typeface="+mn-ea"/>
+                <a:cs typeface="+mn-cs"/>
+                <a:sym typeface="Roboto"/>
+              </a:rPr>
+              <a:t>。</a:t>
+            </a:r>
+            <a:endParaRPr lang="en-US" sz="1800" dirty="0">
+              <a:solidFill>
+                <a:schemeClr val="bg1"/>
+              </a:solidFill>
+              <a:latin typeface="+mn-lt"/>
+              <a:ea typeface="+mn-ea"/>
+              <a:cs typeface="+mn-cs"/>
+            </a:endParaRPr>
+          </a:p>
+        </p:txBody>
+      </p:sp>
+      <p:pic>
+        <p:nvPicPr>
+          <p:cNvPr id="23" name="Picture 9">
+            <a:extLst>
+              <a:ext uri="{FF2B5EF4-FFF2-40B4-BE49-F238E27FC236}">
+                <a16:creationId xmlns:a16="http://schemas.microsoft.com/office/drawing/2014/main" id="{0899BED3-E5CA-E6CA-4861-EB1EF895D304}"/>
+              </a:ext>
+            </a:extLst>
+          </p:cNvPr>
+          <p:cNvPicPr>
+            <a:picLocks noChangeAspect="1"/>
+          </p:cNvPicPr>
+          <p:nvPr/>
+        </p:nvPicPr>
+        <p:blipFill>
+          <a:blip r:embed="rId5">
+            <a:extLst>
+              <a:ext uri="{28A0092B-C50C-407E-A947-70E740481C1C}">
+                <a14:useLocalDpi xmlns:a14="http://schemas.microsoft.com/office/drawing/2010/main" val="0"/>
+              </a:ext>
+              <a:ext uri="{96DAC541-7B7A-43D3-8B79-37D633B846F1}">
+                <asvg:svgBlip xmlns:asvg="http://schemas.microsoft.com/office/drawing/2016/SVG/main" r:embed="rId6"/>
+              </a:ext>
+            </a:extLst>
+          </a:blip>
+          <a:stretch>
+            <a:fillRect/>
+          </a:stretch>
+        </p:blipFill>
+        <p:spPr>
+          <a:xfrm>
+            <a:off x="5778500" y="2092325"/>
+            <a:ext cx="635000" cy="635000"/>
+          </a:xfrm>
+          <a:prstGeom prst="rect">
+            <a:avLst/>
+          </a:prstGeom>
+        </p:spPr>
+      </p:pic>
+      <p:sp>
+        <p:nvSpPr>
+          <p:cNvPr id="24" name="AutoShape 10">
+            <a:extLst>
+              <a:ext uri="{FF2B5EF4-FFF2-40B4-BE49-F238E27FC236}">
+                <a16:creationId xmlns:a16="http://schemas.microsoft.com/office/drawing/2014/main" id="{F4773BF4-0D9E-B46D-9F33-F4EE73C88A0A}"/>
+              </a:ext>
+            </a:extLst>
+          </p:cNvPr>
+          <p:cNvSpPr/>
+          <p:nvPr/>
+        </p:nvSpPr>
+        <p:spPr>
+          <a:xfrm>
+            <a:off x="4572000" y="2854325"/>
+            <a:ext cx="3048000" cy="381000"/>
+          </a:xfrm>
+          <a:prstGeom prst="rect">
+            <a:avLst/>
+          </a:prstGeom>
+          <a:noFill/>
+          <a:ln w="12700" cap="flat" cmpd="sng">
+            <a:noFill/>
+            <a:prstDash val="solid"/>
+            <a:round/>
+          </a:ln>
+        </p:spPr>
+        <p:txBody>
+          <a:bodyPr vert="horz" wrap="square" lIns="0" tIns="0" rIns="0" bIns="0" rtlCol="0" anchor="ctr" anchorCtr="0"/>
+          <a:lstStyle>
+            <a:defPPr marR="0" lvl="0" algn="l" rtl="0">
+              <a:lnSpc>
+                <a:spcPct val="100000"/>
+              </a:lnSpc>
+              <a:spcBef>
+                <a:spcPts val="0"/>
+              </a:spcBef>
+              <a:spcAft>
+                <a:spcPts val="0"/>
+              </a:spcAft>
+            </a:defPPr>
+            <a:lvl1pPr marR="0" lvl="0" algn="l" rtl="0">
+              <a:lnSpc>
+                <a:spcPct val="100000"/>
+              </a:lnSpc>
+              <a:spcBef>
+                <a:spcPts val="0"/>
+              </a:spcBef>
+              <a:spcAft>
+                <a:spcPts val="0"/>
+              </a:spcAft>
+              <a:buClr>
+                <a:srgbClr val="000000"/>
+              </a:buClr>
+              <a:buFont typeface="Arial"/>
+              <a:defRPr sz="1400" b="0" i="0" u="none" strike="noStrike" cap="none">
+                <a:solidFill>
+                  <a:srgbClr val="000000"/>
+                </a:solidFill>
+                <a:latin typeface="Arial"/>
+                <a:ea typeface="Arial"/>
+                <a:cs typeface="Arial"/>
+                <a:sym typeface="Arial"/>
+              </a:defRPr>
+            </a:lvl1pPr>
+            <a:lvl2pPr marR="0" lvl="1" algn="l" rtl="0">
+              <a:lnSpc>
+                <a:spcPct val="100000"/>
+              </a:lnSpc>
+              <a:spcBef>
+                <a:spcPts val="0"/>
+              </a:spcBef>
+              <a:spcAft>
+                <a:spcPts val="0"/>
+              </a:spcAft>
+              <a:buClr>
+                <a:srgbClr val="000000"/>
+              </a:buClr>
+              <a:buFont typeface="Arial"/>
+              <a:defRPr sz="1400" b="0" i="0" u="none" strike="noStrike" cap="none">
+                <a:solidFill>
+                  <a:srgbClr val="000000"/>
+                </a:solidFill>
+                <a:latin typeface="Arial"/>
+                <a:ea typeface="Arial"/>
+                <a:cs typeface="Arial"/>
+                <a:sym typeface="Arial"/>
+              </a:defRPr>
+            </a:lvl2pPr>
+            <a:lvl3pPr marR="0" lvl="2" algn="l" rtl="0">
+              <a:lnSpc>
+                <a:spcPct val="100000"/>
+              </a:lnSpc>
+              <a:spcBef>
+                <a:spcPts val="0"/>
+              </a:spcBef>
+              <a:spcAft>
+                <a:spcPts val="0"/>
+              </a:spcAft>
+              <a:buClr>
+                <a:srgbClr val="000000"/>
+              </a:buClr>
+              <a:buFont typeface="Arial"/>
+              <a:defRPr sz="1400" b="0" i="0" u="none" strike="noStrike" cap="none">
+                <a:solidFill>
+                  <a:srgbClr val="000000"/>
+                </a:solidFill>
+                <a:latin typeface="Arial"/>
+                <a:ea typeface="Arial"/>
+                <a:cs typeface="Arial"/>
+                <a:sym typeface="Arial"/>
+              </a:defRPr>
+            </a:lvl3pPr>
+            <a:lvl4pPr marR="0" lvl="3" algn="l" rtl="0">
+              <a:lnSpc>
+                <a:spcPct val="100000"/>
+              </a:lnSpc>
+              <a:spcBef>
+                <a:spcPts val="0"/>
+              </a:spcBef>
+              <a:spcAft>
+                <a:spcPts val="0"/>
+              </a:spcAft>
+              <a:buClr>
+                <a:srgbClr val="000000"/>
+              </a:buClr>
+              <a:buFont typeface="Arial"/>
+              <a:defRPr sz="1400" b="0" i="0" u="none" strike="noStrike" cap="none">
+                <a:solidFill>
+                  <a:srgbClr val="000000"/>
+                </a:solidFill>
+                <a:latin typeface="Arial"/>
+                <a:ea typeface="Arial"/>
+                <a:cs typeface="Arial"/>
+                <a:sym typeface="Arial"/>
+              </a:defRPr>
+            </a:lvl4pPr>
+            <a:lvl5pPr marR="0" lvl="4" algn="l" rtl="0">
+              <a:lnSpc>
+                <a:spcPct val="100000"/>
+              </a:lnSpc>
+              <a:spcBef>
+                <a:spcPts val="0"/>
+              </a:spcBef>
+              <a:spcAft>
+                <a:spcPts val="0"/>
+              </a:spcAft>
+              <a:buClr>
+                <a:srgbClr val="000000"/>
+              </a:buClr>
+              <a:buFont typeface="Arial"/>
+              <a:defRPr sz="1400" b="0" i="0" u="none" strike="noStrike" cap="none">
+                <a:solidFill>
+                  <a:srgbClr val="000000"/>
+                </a:solidFill>
+                <a:latin typeface="Arial"/>
+                <a:ea typeface="Arial"/>
+                <a:cs typeface="Arial"/>
+                <a:sym typeface="Arial"/>
+              </a:defRPr>
+            </a:lvl5pPr>
+            <a:lvl6pPr marR="0" lvl="5" algn="l" rtl="0">
+              <a:lnSpc>
+                <a:spcPct val="100000"/>
+              </a:lnSpc>
+              <a:spcBef>
+                <a:spcPts val="0"/>
+              </a:spcBef>
+              <a:spcAft>
+                <a:spcPts val="0"/>
+              </a:spcAft>
+              <a:buClr>
+                <a:srgbClr val="000000"/>
+              </a:buClr>
+              <a:buFont typeface="Arial"/>
+              <a:defRPr sz="1400" b="0" i="0" u="none" strike="noStrike" cap="none">
+                <a:solidFill>
+                  <a:srgbClr val="000000"/>
+                </a:solidFill>
+                <a:latin typeface="Arial"/>
+                <a:ea typeface="Arial"/>
+                <a:cs typeface="Arial"/>
+                <a:sym typeface="Arial"/>
+              </a:defRPr>
+            </a:lvl6pPr>
+            <a:lvl7pPr marR="0" lvl="6" algn="l" rtl="0">
+              <a:lnSpc>
+                <a:spcPct val="100000"/>
+              </a:lnSpc>
+              <a:spcBef>
+                <a:spcPts val="0"/>
+              </a:spcBef>
+              <a:spcAft>
+                <a:spcPts val="0"/>
+              </a:spcAft>
+              <a:buClr>
+                <a:srgbClr val="000000"/>
+              </a:buClr>
+              <a:buFont typeface="Arial"/>
+              <a:defRPr sz="1400" b="0" i="0" u="none" strike="noStrike" cap="none">
+                <a:solidFill>
+                  <a:srgbClr val="000000"/>
+                </a:solidFill>
+                <a:latin typeface="Arial"/>
+                <a:ea typeface="Arial"/>
+                <a:cs typeface="Arial"/>
+                <a:sym typeface="Arial"/>
+              </a:defRPr>
+            </a:lvl7pPr>
+            <a:lvl8pPr marR="0" lvl="7" algn="l" rtl="0">
+              <a:lnSpc>
+                <a:spcPct val="100000"/>
+              </a:lnSpc>
+              <a:spcBef>
+                <a:spcPts val="0"/>
+              </a:spcBef>
+              <a:spcAft>
+                <a:spcPts val="0"/>
+              </a:spcAft>
+              <a:buClr>
+                <a:srgbClr val="000000"/>
+              </a:buClr>
+              <a:buFont typeface="Arial"/>
+              <a:defRPr sz="1400" b="0" i="0" u="none" strike="noStrike" cap="none">
+                <a:solidFill>
+                  <a:srgbClr val="000000"/>
+                </a:solidFill>
+                <a:latin typeface="Arial"/>
+                <a:ea typeface="Arial"/>
+                <a:cs typeface="Arial"/>
+                <a:sym typeface="Arial"/>
+              </a:defRPr>
+            </a:lvl8pPr>
+            <a:lvl9pPr marR="0" lvl="8" algn="l" rtl="0">
+              <a:lnSpc>
+                <a:spcPct val="100000"/>
+              </a:lnSpc>
+              <a:spcBef>
+                <a:spcPts val="0"/>
+              </a:spcBef>
+              <a:spcAft>
+                <a:spcPts val="0"/>
+              </a:spcAft>
+              <a:buClr>
+                <a:srgbClr val="000000"/>
+              </a:buClr>
+              <a:buFont typeface="Arial"/>
+              <a:defRPr sz="1400" b="0" i="0" u="none" strike="noStrike" cap="none">
+                <a:solidFill>
+                  <a:srgbClr val="000000"/>
+                </a:solidFill>
+                <a:latin typeface="Arial"/>
+                <a:ea typeface="Arial"/>
+                <a:cs typeface="Arial"/>
+                <a:sym typeface="Arial"/>
+              </a:defRPr>
+            </a:lvl9pPr>
+          </a:lstStyle>
+          <a:p>
+            <a:pPr indent="0" algn="ctr">
+              <a:lnSpc>
+                <a:spcPct val="125000"/>
+              </a:lnSpc>
+              <a:defRPr/>
+            </a:pPr>
+            <a:r>
+              <a:rPr lang="en-US" sz="2000" b="1" i="0" u="none" strike="noStrike" dirty="0" err="1">
+                <a:solidFill>
+                  <a:srgbClr val="FFFFFF"/>
+                </a:solidFill>
+                <a:latin typeface="Roboto"/>
+                <a:ea typeface="Roboto"/>
+                <a:cs typeface="Roboto"/>
+                <a:sym typeface="Roboto"/>
+              </a:rPr>
+              <a:t>形式化建模与验证</a:t>
+            </a:r>
+            <a:endParaRPr lang="en-US" sz="1100" dirty="0"/>
+          </a:p>
+        </p:txBody>
+      </p:sp>
+      <p:sp>
+        <p:nvSpPr>
+          <p:cNvPr id="25" name="AutoShape 11">
+            <a:extLst>
+              <a:ext uri="{FF2B5EF4-FFF2-40B4-BE49-F238E27FC236}">
+                <a16:creationId xmlns:a16="http://schemas.microsoft.com/office/drawing/2014/main" id="{8D3DBFA1-B5D8-D547-E157-C66DCCFEC6F5}"/>
+              </a:ext>
+            </a:extLst>
+          </p:cNvPr>
+          <p:cNvSpPr/>
+          <p:nvPr/>
+        </p:nvSpPr>
+        <p:spPr>
+          <a:xfrm>
+            <a:off x="4572000" y="3362325"/>
+            <a:ext cx="3048000" cy="1270000"/>
+          </a:xfrm>
+          <a:prstGeom prst="rect">
+            <a:avLst/>
+          </a:prstGeom>
+          <a:noFill/>
+          <a:ln w="12700" cap="flat" cmpd="sng">
+            <a:noFill/>
+            <a:prstDash val="solid"/>
+            <a:round/>
+          </a:ln>
+        </p:spPr>
+        <p:txBody>
+          <a:bodyPr vert="horz" wrap="square" lIns="0" tIns="0" rIns="0" bIns="0" rtlCol="0" anchor="ctr" anchorCtr="0"/>
+          <a:lstStyle>
+            <a:defPPr marR="0" lvl="0" algn="l" rtl="0">
+              <a:lnSpc>
+                <a:spcPct val="100000"/>
+              </a:lnSpc>
+              <a:spcBef>
+                <a:spcPts val="0"/>
+              </a:spcBef>
+              <a:spcAft>
+                <a:spcPts val="0"/>
+              </a:spcAft>
+            </a:defPPr>
+            <a:lvl1pPr marR="0" lvl="0" algn="l" rtl="0">
+              <a:lnSpc>
+                <a:spcPct val="100000"/>
+              </a:lnSpc>
+              <a:spcBef>
+                <a:spcPts val="0"/>
+              </a:spcBef>
+              <a:spcAft>
+                <a:spcPts val="0"/>
+              </a:spcAft>
+              <a:buClr>
+                <a:srgbClr val="000000"/>
+              </a:buClr>
+              <a:buFont typeface="Arial"/>
+              <a:defRPr sz="1400" b="0" i="0" u="none" strike="noStrike" cap="none">
+                <a:solidFill>
+                  <a:srgbClr val="000000"/>
+                </a:solidFill>
+                <a:latin typeface="Arial"/>
+                <a:ea typeface="Arial"/>
+                <a:cs typeface="Arial"/>
+                <a:sym typeface="Arial"/>
+              </a:defRPr>
+            </a:lvl1pPr>
+            <a:lvl2pPr marR="0" lvl="1" algn="l" rtl="0">
+              <a:lnSpc>
+                <a:spcPct val="100000"/>
+              </a:lnSpc>
+              <a:spcBef>
+                <a:spcPts val="0"/>
+              </a:spcBef>
+              <a:spcAft>
+                <a:spcPts val="0"/>
+              </a:spcAft>
+              <a:buClr>
+                <a:srgbClr val="000000"/>
+              </a:buClr>
+              <a:buFont typeface="Arial"/>
+              <a:defRPr sz="1400" b="0" i="0" u="none" strike="noStrike" cap="none">
+                <a:solidFill>
+                  <a:srgbClr val="000000"/>
+                </a:solidFill>
+                <a:latin typeface="Arial"/>
+                <a:ea typeface="Arial"/>
+                <a:cs typeface="Arial"/>
+                <a:sym typeface="Arial"/>
+              </a:defRPr>
+            </a:lvl2pPr>
+            <a:lvl3pPr marR="0" lvl="2" algn="l" rtl="0">
+              <a:lnSpc>
+                <a:spcPct val="100000"/>
+              </a:lnSpc>
+              <a:spcBef>
+                <a:spcPts val="0"/>
+              </a:spcBef>
+              <a:spcAft>
+                <a:spcPts val="0"/>
+              </a:spcAft>
+              <a:buClr>
+                <a:srgbClr val="000000"/>
+              </a:buClr>
+              <a:buFont typeface="Arial"/>
+              <a:defRPr sz="1400" b="0" i="0" u="none" strike="noStrike" cap="none">
+                <a:solidFill>
+                  <a:srgbClr val="000000"/>
+                </a:solidFill>
+                <a:latin typeface="Arial"/>
+                <a:ea typeface="Arial"/>
+                <a:cs typeface="Arial"/>
+                <a:sym typeface="Arial"/>
+              </a:defRPr>
+            </a:lvl3pPr>
+            <a:lvl4pPr marR="0" lvl="3" algn="l" rtl="0">
+              <a:lnSpc>
+                <a:spcPct val="100000"/>
+              </a:lnSpc>
+              <a:spcBef>
+                <a:spcPts val="0"/>
+              </a:spcBef>
+              <a:spcAft>
+                <a:spcPts val="0"/>
+              </a:spcAft>
+              <a:buClr>
+                <a:srgbClr val="000000"/>
+              </a:buClr>
+              <a:buFont typeface="Arial"/>
+              <a:defRPr sz="1400" b="0" i="0" u="none" strike="noStrike" cap="none">
+                <a:solidFill>
+                  <a:srgbClr val="000000"/>
+                </a:solidFill>
+                <a:latin typeface="Arial"/>
+                <a:ea typeface="Arial"/>
+                <a:cs typeface="Arial"/>
+                <a:sym typeface="Arial"/>
+              </a:defRPr>
+            </a:lvl4pPr>
+            <a:lvl5pPr marR="0" lvl="4" algn="l" rtl="0">
+              <a:lnSpc>
+                <a:spcPct val="100000"/>
+              </a:lnSpc>
+              <a:spcBef>
+                <a:spcPts val="0"/>
+              </a:spcBef>
+              <a:spcAft>
+                <a:spcPts val="0"/>
+              </a:spcAft>
+              <a:buClr>
+                <a:srgbClr val="000000"/>
+              </a:buClr>
+              <a:buFont typeface="Arial"/>
+              <a:defRPr sz="1400" b="0" i="0" u="none" strike="noStrike" cap="none">
+                <a:solidFill>
+                  <a:srgbClr val="000000"/>
+                </a:solidFill>
+                <a:latin typeface="Arial"/>
+                <a:ea typeface="Arial"/>
+                <a:cs typeface="Arial"/>
+                <a:sym typeface="Arial"/>
+              </a:defRPr>
+            </a:lvl5pPr>
+            <a:lvl6pPr marR="0" lvl="5" algn="l" rtl="0">
+              <a:lnSpc>
+                <a:spcPct val="100000"/>
+              </a:lnSpc>
+              <a:spcBef>
+                <a:spcPts val="0"/>
+              </a:spcBef>
+              <a:spcAft>
+                <a:spcPts val="0"/>
+              </a:spcAft>
+              <a:buClr>
+                <a:srgbClr val="000000"/>
+              </a:buClr>
+              <a:buFont typeface="Arial"/>
+              <a:defRPr sz="1400" b="0" i="0" u="none" strike="noStrike" cap="none">
+                <a:solidFill>
+                  <a:srgbClr val="000000"/>
+                </a:solidFill>
+                <a:latin typeface="Arial"/>
+                <a:ea typeface="Arial"/>
+                <a:cs typeface="Arial"/>
+                <a:sym typeface="Arial"/>
+              </a:defRPr>
+            </a:lvl6pPr>
+            <a:lvl7pPr marR="0" lvl="6" algn="l" rtl="0">
+              <a:lnSpc>
+                <a:spcPct val="100000"/>
+              </a:lnSpc>
+              <a:spcBef>
+                <a:spcPts val="0"/>
+              </a:spcBef>
+              <a:spcAft>
+                <a:spcPts val="0"/>
+              </a:spcAft>
+              <a:buClr>
+                <a:srgbClr val="000000"/>
+              </a:buClr>
+              <a:buFont typeface="Arial"/>
+              <a:defRPr sz="1400" b="0" i="0" u="none" strike="noStrike" cap="none">
+                <a:solidFill>
+                  <a:srgbClr val="000000"/>
+                </a:solidFill>
+                <a:latin typeface="Arial"/>
+                <a:ea typeface="Arial"/>
+                <a:cs typeface="Arial"/>
+                <a:sym typeface="Arial"/>
+              </a:defRPr>
+            </a:lvl7pPr>
+            <a:lvl8pPr marR="0" lvl="7" algn="l" rtl="0">
+              <a:lnSpc>
+                <a:spcPct val="100000"/>
+              </a:lnSpc>
+              <a:spcBef>
+                <a:spcPts val="0"/>
+              </a:spcBef>
+              <a:spcAft>
+                <a:spcPts val="0"/>
+              </a:spcAft>
+              <a:buClr>
+                <a:srgbClr val="000000"/>
+              </a:buClr>
+              <a:buFont typeface="Arial"/>
+              <a:defRPr sz="1400" b="0" i="0" u="none" strike="noStrike" cap="none">
+                <a:solidFill>
+                  <a:srgbClr val="000000"/>
+                </a:solidFill>
+                <a:latin typeface="Arial"/>
+                <a:ea typeface="Arial"/>
+                <a:cs typeface="Arial"/>
+                <a:sym typeface="Arial"/>
+              </a:defRPr>
+            </a:lvl8pPr>
+            <a:lvl9pPr marR="0" lvl="8" algn="l" rtl="0">
+              <a:lnSpc>
+                <a:spcPct val="100000"/>
+              </a:lnSpc>
+              <a:spcBef>
+                <a:spcPts val="0"/>
+              </a:spcBef>
+              <a:spcAft>
+                <a:spcPts val="0"/>
+              </a:spcAft>
+              <a:buClr>
+                <a:srgbClr val="000000"/>
+              </a:buClr>
+              <a:buFont typeface="Arial"/>
+              <a:defRPr sz="1400" b="0" i="0" u="none" strike="noStrike" cap="none">
+                <a:solidFill>
+                  <a:srgbClr val="000000"/>
+                </a:solidFill>
+                <a:latin typeface="Arial"/>
+                <a:ea typeface="Arial"/>
+                <a:cs typeface="Arial"/>
+                <a:sym typeface="Arial"/>
+              </a:defRPr>
+            </a:lvl9pPr>
+          </a:lstStyle>
+          <a:p>
+            <a:pPr indent="0">
+              <a:lnSpc>
+                <a:spcPct val="108333"/>
+              </a:lnSpc>
+              <a:defRPr/>
+            </a:pPr>
+            <a:r>
+              <a:rPr lang="en-US" sz="1800" dirty="0" err="1">
+                <a:solidFill>
+                  <a:schemeClr val="bg1"/>
+                </a:solidFill>
+                <a:latin typeface="+mn-lt"/>
+                <a:ea typeface="+mn-ea"/>
+                <a:cs typeface="+mn-cs"/>
+                <a:sym typeface="Roboto"/>
+              </a:rPr>
+              <a:t>基于</a:t>
+            </a:r>
+            <a:r>
+              <a:rPr lang="en-US" sz="1800" dirty="0">
+                <a:solidFill>
+                  <a:schemeClr val="bg1"/>
+                </a:solidFill>
+                <a:latin typeface="+mn-lt"/>
+                <a:ea typeface="+mn-ea"/>
+                <a:cs typeface="+mn-cs"/>
+                <a:sym typeface="Roboto"/>
+              </a:rPr>
+              <a:t> TLA+ </a:t>
+            </a:r>
+            <a:r>
+              <a:rPr lang="en-US" sz="1800" dirty="0" err="1">
+                <a:solidFill>
+                  <a:schemeClr val="bg1"/>
+                </a:solidFill>
+                <a:latin typeface="+mn-lt"/>
+                <a:ea typeface="+mn-ea"/>
+                <a:cs typeface="+mn-cs"/>
+                <a:sym typeface="Roboto"/>
+              </a:rPr>
+              <a:t>对协议进行建模与验证，从理论上严格保证了混合隔离场景下系统的一致性与正确性</a:t>
+            </a:r>
+            <a:r>
+              <a:rPr lang="en-US" sz="1800" dirty="0">
+                <a:solidFill>
+                  <a:schemeClr val="bg1"/>
+                </a:solidFill>
+                <a:latin typeface="+mn-lt"/>
+                <a:ea typeface="+mn-ea"/>
+                <a:cs typeface="+mn-cs"/>
+                <a:sym typeface="Roboto"/>
+              </a:rPr>
+              <a:t>。</a:t>
+            </a:r>
+            <a:endParaRPr lang="en-US" sz="1800" dirty="0">
+              <a:solidFill>
+                <a:schemeClr val="bg1"/>
+              </a:solidFill>
+              <a:latin typeface="+mn-lt"/>
+              <a:ea typeface="+mn-ea"/>
+              <a:cs typeface="+mn-cs"/>
+            </a:endParaRPr>
+          </a:p>
+        </p:txBody>
+      </p:sp>
+      <p:sp>
+        <p:nvSpPr>
+          <p:cNvPr id="26" name="AutoShape 12">
+            <a:extLst>
+              <a:ext uri="{FF2B5EF4-FFF2-40B4-BE49-F238E27FC236}">
+                <a16:creationId xmlns:a16="http://schemas.microsoft.com/office/drawing/2014/main" id="{EEA733BD-ED5C-C0BF-09C0-9C0BCC7FEFEA}"/>
+              </a:ext>
+            </a:extLst>
+          </p:cNvPr>
+          <p:cNvSpPr/>
+          <p:nvPr/>
+        </p:nvSpPr>
+        <p:spPr>
+          <a:xfrm>
+            <a:off x="8128000" y="1838325"/>
+            <a:ext cx="3302000" cy="3048000"/>
+          </a:xfrm>
+          <a:prstGeom prst="roundRect">
+            <a:avLst>
+              <a:gd name="adj" fmla="val 4166"/>
+            </a:avLst>
+          </a:prstGeom>
+          <a:solidFill>
+            <a:schemeClr val="accent1">
+              <a:lumMod val="50000"/>
+            </a:schemeClr>
+          </a:solidFill>
+          <a:ln w="12700" cap="flat" cmpd="sng">
+            <a:solidFill>
+              <a:srgbClr val="64FFDA">
+                <a:alpha val="30000"/>
+              </a:srgbClr>
+            </a:solidFill>
+            <a:prstDash val="solid"/>
+            <a:round/>
+          </a:ln>
+        </p:spPr>
+        <p:txBody>
+          <a:bodyPr vert="horz" wrap="square" lIns="63500" tIns="63500" rIns="63500" bIns="63500" rtlCol="0" anchor="ctr"/>
+          <a:lstStyle>
+            <a:defPPr marR="0" lvl="0" algn="l" rtl="0">
+              <a:lnSpc>
+                <a:spcPct val="100000"/>
+              </a:lnSpc>
+              <a:spcBef>
+                <a:spcPts val="0"/>
+              </a:spcBef>
+              <a:spcAft>
+                <a:spcPts val="0"/>
+              </a:spcAft>
+            </a:defPPr>
+            <a:lvl1pPr marR="0" lvl="0" algn="l" rtl="0">
+              <a:lnSpc>
+                <a:spcPct val="100000"/>
+              </a:lnSpc>
+              <a:spcBef>
+                <a:spcPts val="0"/>
+              </a:spcBef>
+              <a:spcAft>
+                <a:spcPts val="0"/>
+              </a:spcAft>
+              <a:buClr>
+                <a:srgbClr val="000000"/>
+              </a:buClr>
+              <a:buFont typeface="Arial"/>
+              <a:defRPr sz="1400" b="0" i="0" u="none" strike="noStrike" cap="none">
+                <a:solidFill>
+                  <a:srgbClr val="000000"/>
+                </a:solidFill>
+                <a:latin typeface="Arial"/>
+                <a:ea typeface="Arial"/>
+                <a:cs typeface="Arial"/>
+                <a:sym typeface="Arial"/>
+              </a:defRPr>
+            </a:lvl1pPr>
+            <a:lvl2pPr marR="0" lvl="1" algn="l" rtl="0">
+              <a:lnSpc>
+                <a:spcPct val="100000"/>
+              </a:lnSpc>
+              <a:spcBef>
+                <a:spcPts val="0"/>
+              </a:spcBef>
+              <a:spcAft>
+                <a:spcPts val="0"/>
+              </a:spcAft>
+              <a:buClr>
+                <a:srgbClr val="000000"/>
+              </a:buClr>
+              <a:buFont typeface="Arial"/>
+              <a:defRPr sz="1400" b="0" i="0" u="none" strike="noStrike" cap="none">
+                <a:solidFill>
+                  <a:srgbClr val="000000"/>
+                </a:solidFill>
+                <a:latin typeface="Arial"/>
+                <a:ea typeface="Arial"/>
+                <a:cs typeface="Arial"/>
+                <a:sym typeface="Arial"/>
+              </a:defRPr>
+            </a:lvl2pPr>
+            <a:lvl3pPr marR="0" lvl="2" algn="l" rtl="0">
+              <a:lnSpc>
+                <a:spcPct val="100000"/>
+              </a:lnSpc>
+              <a:spcBef>
+                <a:spcPts val="0"/>
+              </a:spcBef>
+              <a:spcAft>
+                <a:spcPts val="0"/>
+              </a:spcAft>
+              <a:buClr>
+                <a:srgbClr val="000000"/>
+              </a:buClr>
+              <a:buFont typeface="Arial"/>
+              <a:defRPr sz="1400" b="0" i="0" u="none" strike="noStrike" cap="none">
+                <a:solidFill>
+                  <a:srgbClr val="000000"/>
+                </a:solidFill>
+                <a:latin typeface="Arial"/>
+                <a:ea typeface="Arial"/>
+                <a:cs typeface="Arial"/>
+                <a:sym typeface="Arial"/>
+              </a:defRPr>
+            </a:lvl3pPr>
+            <a:lvl4pPr marR="0" lvl="3" algn="l" rtl="0">
+              <a:lnSpc>
+                <a:spcPct val="100000"/>
+              </a:lnSpc>
+              <a:spcBef>
+                <a:spcPts val="0"/>
+              </a:spcBef>
+              <a:spcAft>
+                <a:spcPts val="0"/>
+              </a:spcAft>
+              <a:buClr>
+                <a:srgbClr val="000000"/>
+              </a:buClr>
+              <a:buFont typeface="Arial"/>
+              <a:defRPr sz="1400" b="0" i="0" u="none" strike="noStrike" cap="none">
+                <a:solidFill>
+                  <a:srgbClr val="000000"/>
+                </a:solidFill>
+                <a:latin typeface="Arial"/>
+                <a:ea typeface="Arial"/>
+                <a:cs typeface="Arial"/>
+                <a:sym typeface="Arial"/>
+              </a:defRPr>
+            </a:lvl4pPr>
+            <a:lvl5pPr marR="0" lvl="4" algn="l" rtl="0">
+              <a:lnSpc>
+                <a:spcPct val="100000"/>
+              </a:lnSpc>
+              <a:spcBef>
+                <a:spcPts val="0"/>
+              </a:spcBef>
+              <a:spcAft>
+                <a:spcPts val="0"/>
+              </a:spcAft>
+              <a:buClr>
+                <a:srgbClr val="000000"/>
+              </a:buClr>
+              <a:buFont typeface="Arial"/>
+              <a:defRPr sz="1400" b="0" i="0" u="none" strike="noStrike" cap="none">
+                <a:solidFill>
+                  <a:srgbClr val="000000"/>
+                </a:solidFill>
+                <a:latin typeface="Arial"/>
+                <a:ea typeface="Arial"/>
+                <a:cs typeface="Arial"/>
+                <a:sym typeface="Arial"/>
+              </a:defRPr>
+            </a:lvl5pPr>
+            <a:lvl6pPr marR="0" lvl="5" algn="l" rtl="0">
+              <a:lnSpc>
+                <a:spcPct val="100000"/>
+              </a:lnSpc>
+              <a:spcBef>
+                <a:spcPts val="0"/>
+              </a:spcBef>
+              <a:spcAft>
+                <a:spcPts val="0"/>
+              </a:spcAft>
+              <a:buClr>
+                <a:srgbClr val="000000"/>
+              </a:buClr>
+              <a:buFont typeface="Arial"/>
+              <a:defRPr sz="1400" b="0" i="0" u="none" strike="noStrike" cap="none">
+                <a:solidFill>
+                  <a:srgbClr val="000000"/>
+                </a:solidFill>
+                <a:latin typeface="Arial"/>
+                <a:ea typeface="Arial"/>
+                <a:cs typeface="Arial"/>
+                <a:sym typeface="Arial"/>
+              </a:defRPr>
+            </a:lvl6pPr>
+            <a:lvl7pPr marR="0" lvl="6" algn="l" rtl="0">
+              <a:lnSpc>
+                <a:spcPct val="100000"/>
+              </a:lnSpc>
+              <a:spcBef>
+                <a:spcPts val="0"/>
+              </a:spcBef>
+              <a:spcAft>
+                <a:spcPts val="0"/>
+              </a:spcAft>
+              <a:buClr>
+                <a:srgbClr val="000000"/>
+              </a:buClr>
+              <a:buFont typeface="Arial"/>
+              <a:defRPr sz="1400" b="0" i="0" u="none" strike="noStrike" cap="none">
+                <a:solidFill>
+                  <a:srgbClr val="000000"/>
+                </a:solidFill>
+                <a:latin typeface="Arial"/>
+                <a:ea typeface="Arial"/>
+                <a:cs typeface="Arial"/>
+                <a:sym typeface="Arial"/>
+              </a:defRPr>
+            </a:lvl7pPr>
+            <a:lvl8pPr marR="0" lvl="7" algn="l" rtl="0">
+              <a:lnSpc>
+                <a:spcPct val="100000"/>
+              </a:lnSpc>
+              <a:spcBef>
+                <a:spcPts val="0"/>
+              </a:spcBef>
+              <a:spcAft>
+                <a:spcPts val="0"/>
+              </a:spcAft>
+              <a:buClr>
+                <a:srgbClr val="000000"/>
+              </a:buClr>
+              <a:buFont typeface="Arial"/>
+              <a:defRPr sz="1400" b="0" i="0" u="none" strike="noStrike" cap="none">
+                <a:solidFill>
+                  <a:srgbClr val="000000"/>
+                </a:solidFill>
+                <a:latin typeface="Arial"/>
+                <a:ea typeface="Arial"/>
+                <a:cs typeface="Arial"/>
+                <a:sym typeface="Arial"/>
+              </a:defRPr>
+            </a:lvl8pPr>
+            <a:lvl9pPr marR="0" lvl="8" algn="l" rtl="0">
+              <a:lnSpc>
+                <a:spcPct val="100000"/>
+              </a:lnSpc>
+              <a:spcBef>
+                <a:spcPts val="0"/>
+              </a:spcBef>
+              <a:spcAft>
+                <a:spcPts val="0"/>
+              </a:spcAft>
+              <a:buClr>
+                <a:srgbClr val="000000"/>
+              </a:buClr>
+              <a:buFont typeface="Arial"/>
+              <a:defRPr sz="1400" b="0" i="0" u="none" strike="noStrike" cap="none">
+                <a:solidFill>
+                  <a:srgbClr val="000000"/>
+                </a:solidFill>
+                <a:latin typeface="Arial"/>
+                <a:ea typeface="Arial"/>
+                <a:cs typeface="Arial"/>
+                <a:sym typeface="Arial"/>
+              </a:defRPr>
+            </a:lvl9pPr>
+          </a:lstStyle>
+          <a:p>
+            <a:pPr algn="ctr">
+              <a:defRPr/>
+            </a:pPr>
+            <a:endParaRPr/>
+          </a:p>
+        </p:txBody>
+      </p:sp>
+      <p:pic>
+        <p:nvPicPr>
+          <p:cNvPr id="27" name="Picture 13">
+            <a:extLst>
+              <a:ext uri="{FF2B5EF4-FFF2-40B4-BE49-F238E27FC236}">
+                <a16:creationId xmlns:a16="http://schemas.microsoft.com/office/drawing/2014/main" id="{5A52C9C6-573A-8677-B21F-DCBD818E10FF}"/>
+              </a:ext>
+            </a:extLst>
+          </p:cNvPr>
+          <p:cNvPicPr>
+            <a:picLocks noChangeAspect="1"/>
+          </p:cNvPicPr>
+          <p:nvPr/>
+        </p:nvPicPr>
+        <p:blipFill>
+          <a:blip r:embed="rId7">
+            <a:extLst>
+              <a:ext uri="{28A0092B-C50C-407E-A947-70E740481C1C}">
+                <a14:useLocalDpi xmlns:a14="http://schemas.microsoft.com/office/drawing/2010/main" val="0"/>
+              </a:ext>
+              <a:ext uri="{96DAC541-7B7A-43D3-8B79-37D633B846F1}">
+                <asvg:svgBlip xmlns:asvg="http://schemas.microsoft.com/office/drawing/2016/SVG/main" r:embed="rId8"/>
+              </a:ext>
+            </a:extLst>
+          </a:blip>
+          <a:stretch>
+            <a:fillRect/>
+          </a:stretch>
+        </p:blipFill>
+        <p:spPr>
+          <a:xfrm>
+            <a:off x="9461500" y="2092325"/>
+            <a:ext cx="635000" cy="635000"/>
+          </a:xfrm>
+          <a:prstGeom prst="rect">
+            <a:avLst/>
+          </a:prstGeom>
+        </p:spPr>
+      </p:pic>
+      <p:sp>
+        <p:nvSpPr>
+          <p:cNvPr id="28" name="AutoShape 14">
+            <a:extLst>
+              <a:ext uri="{FF2B5EF4-FFF2-40B4-BE49-F238E27FC236}">
+                <a16:creationId xmlns:a16="http://schemas.microsoft.com/office/drawing/2014/main" id="{3E05EEDC-F40B-8862-6B1F-1DCEAB2A6534}"/>
+              </a:ext>
+            </a:extLst>
+          </p:cNvPr>
+          <p:cNvSpPr/>
+          <p:nvPr/>
+        </p:nvSpPr>
+        <p:spPr>
+          <a:xfrm>
+            <a:off x="8255000" y="2854325"/>
+            <a:ext cx="3048000" cy="381000"/>
+          </a:xfrm>
+          <a:prstGeom prst="rect">
+            <a:avLst/>
+          </a:prstGeom>
+          <a:noFill/>
+          <a:ln w="12700" cap="flat" cmpd="sng">
+            <a:noFill/>
+            <a:prstDash val="solid"/>
+            <a:round/>
+          </a:ln>
+        </p:spPr>
+        <p:txBody>
+          <a:bodyPr vert="horz" wrap="square" lIns="0" tIns="0" rIns="0" bIns="0" rtlCol="0" anchor="ctr" anchorCtr="0"/>
+          <a:lstStyle>
+            <a:defPPr marR="0" lvl="0" algn="l" rtl="0">
+              <a:lnSpc>
+                <a:spcPct val="100000"/>
+              </a:lnSpc>
+              <a:spcBef>
+                <a:spcPts val="0"/>
+              </a:spcBef>
+              <a:spcAft>
+                <a:spcPts val="0"/>
+              </a:spcAft>
+            </a:defPPr>
+            <a:lvl1pPr marR="0" lvl="0" algn="l" rtl="0">
+              <a:lnSpc>
+                <a:spcPct val="100000"/>
+              </a:lnSpc>
+              <a:spcBef>
+                <a:spcPts val="0"/>
+              </a:spcBef>
+              <a:spcAft>
+                <a:spcPts val="0"/>
+              </a:spcAft>
+              <a:buClr>
+                <a:srgbClr val="000000"/>
+              </a:buClr>
+              <a:buFont typeface="Arial"/>
+              <a:defRPr sz="1400" b="0" i="0" u="none" strike="noStrike" cap="none">
+                <a:solidFill>
+                  <a:srgbClr val="000000"/>
+                </a:solidFill>
+                <a:latin typeface="Arial"/>
+                <a:ea typeface="Arial"/>
+                <a:cs typeface="Arial"/>
+                <a:sym typeface="Arial"/>
+              </a:defRPr>
+            </a:lvl1pPr>
+            <a:lvl2pPr marR="0" lvl="1" algn="l" rtl="0">
+              <a:lnSpc>
+                <a:spcPct val="100000"/>
+              </a:lnSpc>
+              <a:spcBef>
+                <a:spcPts val="0"/>
+              </a:spcBef>
+              <a:spcAft>
+                <a:spcPts val="0"/>
+              </a:spcAft>
+              <a:buClr>
+                <a:srgbClr val="000000"/>
+              </a:buClr>
+              <a:buFont typeface="Arial"/>
+              <a:defRPr sz="1400" b="0" i="0" u="none" strike="noStrike" cap="none">
+                <a:solidFill>
+                  <a:srgbClr val="000000"/>
+                </a:solidFill>
+                <a:latin typeface="Arial"/>
+                <a:ea typeface="Arial"/>
+                <a:cs typeface="Arial"/>
+                <a:sym typeface="Arial"/>
+              </a:defRPr>
+            </a:lvl2pPr>
+            <a:lvl3pPr marR="0" lvl="2" algn="l" rtl="0">
+              <a:lnSpc>
+                <a:spcPct val="100000"/>
+              </a:lnSpc>
+              <a:spcBef>
+                <a:spcPts val="0"/>
+              </a:spcBef>
+              <a:spcAft>
+                <a:spcPts val="0"/>
+              </a:spcAft>
+              <a:buClr>
+                <a:srgbClr val="000000"/>
+              </a:buClr>
+              <a:buFont typeface="Arial"/>
+              <a:defRPr sz="1400" b="0" i="0" u="none" strike="noStrike" cap="none">
+                <a:solidFill>
+                  <a:srgbClr val="000000"/>
+                </a:solidFill>
+                <a:latin typeface="Arial"/>
+                <a:ea typeface="Arial"/>
+                <a:cs typeface="Arial"/>
+                <a:sym typeface="Arial"/>
+              </a:defRPr>
+            </a:lvl3pPr>
+            <a:lvl4pPr marR="0" lvl="3" algn="l" rtl="0">
+              <a:lnSpc>
+                <a:spcPct val="100000"/>
+              </a:lnSpc>
+              <a:spcBef>
+                <a:spcPts val="0"/>
+              </a:spcBef>
+              <a:spcAft>
+                <a:spcPts val="0"/>
+              </a:spcAft>
+              <a:buClr>
+                <a:srgbClr val="000000"/>
+              </a:buClr>
+              <a:buFont typeface="Arial"/>
+              <a:defRPr sz="1400" b="0" i="0" u="none" strike="noStrike" cap="none">
+                <a:solidFill>
+                  <a:srgbClr val="000000"/>
+                </a:solidFill>
+                <a:latin typeface="Arial"/>
+                <a:ea typeface="Arial"/>
+                <a:cs typeface="Arial"/>
+                <a:sym typeface="Arial"/>
+              </a:defRPr>
+            </a:lvl4pPr>
+            <a:lvl5pPr marR="0" lvl="4" algn="l" rtl="0">
+              <a:lnSpc>
+                <a:spcPct val="100000"/>
+              </a:lnSpc>
+              <a:spcBef>
+                <a:spcPts val="0"/>
+              </a:spcBef>
+              <a:spcAft>
+                <a:spcPts val="0"/>
+              </a:spcAft>
+              <a:buClr>
+                <a:srgbClr val="000000"/>
+              </a:buClr>
+              <a:buFont typeface="Arial"/>
+              <a:defRPr sz="1400" b="0" i="0" u="none" strike="noStrike" cap="none">
+                <a:solidFill>
+                  <a:srgbClr val="000000"/>
+                </a:solidFill>
+                <a:latin typeface="Arial"/>
+                <a:ea typeface="Arial"/>
+                <a:cs typeface="Arial"/>
+                <a:sym typeface="Arial"/>
+              </a:defRPr>
+            </a:lvl5pPr>
+            <a:lvl6pPr marR="0" lvl="5" algn="l" rtl="0">
+              <a:lnSpc>
+                <a:spcPct val="100000"/>
+              </a:lnSpc>
+              <a:spcBef>
+                <a:spcPts val="0"/>
+              </a:spcBef>
+              <a:spcAft>
+                <a:spcPts val="0"/>
+              </a:spcAft>
+              <a:buClr>
+                <a:srgbClr val="000000"/>
+              </a:buClr>
+              <a:buFont typeface="Arial"/>
+              <a:defRPr sz="1400" b="0" i="0" u="none" strike="noStrike" cap="none">
+                <a:solidFill>
+                  <a:srgbClr val="000000"/>
+                </a:solidFill>
+                <a:latin typeface="Arial"/>
+                <a:ea typeface="Arial"/>
+                <a:cs typeface="Arial"/>
+                <a:sym typeface="Arial"/>
+              </a:defRPr>
+            </a:lvl6pPr>
+            <a:lvl7pPr marR="0" lvl="6" algn="l" rtl="0">
+              <a:lnSpc>
+                <a:spcPct val="100000"/>
+              </a:lnSpc>
+              <a:spcBef>
+                <a:spcPts val="0"/>
+              </a:spcBef>
+              <a:spcAft>
+                <a:spcPts val="0"/>
+              </a:spcAft>
+              <a:buClr>
+                <a:srgbClr val="000000"/>
+              </a:buClr>
+              <a:buFont typeface="Arial"/>
+              <a:defRPr sz="1400" b="0" i="0" u="none" strike="noStrike" cap="none">
+                <a:solidFill>
+                  <a:srgbClr val="000000"/>
+                </a:solidFill>
+                <a:latin typeface="Arial"/>
+                <a:ea typeface="Arial"/>
+                <a:cs typeface="Arial"/>
+                <a:sym typeface="Arial"/>
+              </a:defRPr>
+            </a:lvl7pPr>
+            <a:lvl8pPr marR="0" lvl="7" algn="l" rtl="0">
+              <a:lnSpc>
+                <a:spcPct val="100000"/>
+              </a:lnSpc>
+              <a:spcBef>
+                <a:spcPts val="0"/>
+              </a:spcBef>
+              <a:spcAft>
+                <a:spcPts val="0"/>
+              </a:spcAft>
+              <a:buClr>
+                <a:srgbClr val="000000"/>
+              </a:buClr>
+              <a:buFont typeface="Arial"/>
+              <a:defRPr sz="1400" b="0" i="0" u="none" strike="noStrike" cap="none">
+                <a:solidFill>
+                  <a:srgbClr val="000000"/>
+                </a:solidFill>
+                <a:latin typeface="Arial"/>
+                <a:ea typeface="Arial"/>
+                <a:cs typeface="Arial"/>
+                <a:sym typeface="Arial"/>
+              </a:defRPr>
+            </a:lvl8pPr>
+            <a:lvl9pPr marR="0" lvl="8" algn="l" rtl="0">
+              <a:lnSpc>
+                <a:spcPct val="100000"/>
+              </a:lnSpc>
+              <a:spcBef>
+                <a:spcPts val="0"/>
+              </a:spcBef>
+              <a:spcAft>
+                <a:spcPts val="0"/>
+              </a:spcAft>
+              <a:buClr>
+                <a:srgbClr val="000000"/>
+              </a:buClr>
+              <a:buFont typeface="Arial"/>
+              <a:defRPr sz="1400" b="0" i="0" u="none" strike="noStrike" cap="none">
+                <a:solidFill>
+                  <a:srgbClr val="000000"/>
+                </a:solidFill>
+                <a:latin typeface="Arial"/>
+                <a:ea typeface="Arial"/>
+                <a:cs typeface="Arial"/>
+                <a:sym typeface="Arial"/>
+              </a:defRPr>
+            </a:lvl9pPr>
+          </a:lstStyle>
+          <a:p>
+            <a:pPr indent="0" algn="ctr">
+              <a:lnSpc>
+                <a:spcPct val="125000"/>
+              </a:lnSpc>
+              <a:defRPr/>
+            </a:pPr>
+            <a:r>
+              <a:rPr lang="en-US" sz="2000" b="1" i="0" u="none" strike="noStrike">
+                <a:solidFill>
+                  <a:srgbClr val="FFFFFF"/>
+                </a:solidFill>
+                <a:latin typeface="Roboto"/>
+                <a:ea typeface="Roboto"/>
+                <a:cs typeface="Roboto"/>
+                <a:sym typeface="Roboto"/>
+              </a:rPr>
+              <a:t>原型实现与性能验证</a:t>
+            </a:r>
+            <a:endParaRPr lang="en-US" sz="1100"/>
+          </a:p>
+        </p:txBody>
+      </p:sp>
+      <p:sp>
+        <p:nvSpPr>
+          <p:cNvPr id="29" name="AutoShape 15">
+            <a:extLst>
+              <a:ext uri="{FF2B5EF4-FFF2-40B4-BE49-F238E27FC236}">
+                <a16:creationId xmlns:a16="http://schemas.microsoft.com/office/drawing/2014/main" id="{69FEDBE1-F6F7-1AF9-2F53-E23336B90F1A}"/>
+              </a:ext>
+            </a:extLst>
+          </p:cNvPr>
+          <p:cNvSpPr/>
+          <p:nvPr/>
+        </p:nvSpPr>
+        <p:spPr>
+          <a:xfrm>
+            <a:off x="8255000" y="3362325"/>
+            <a:ext cx="3048000" cy="1270000"/>
+          </a:xfrm>
+          <a:prstGeom prst="rect">
+            <a:avLst/>
+          </a:prstGeom>
+          <a:noFill/>
+          <a:ln w="12700" cap="flat" cmpd="sng">
+            <a:noFill/>
+            <a:prstDash val="solid"/>
+            <a:round/>
+          </a:ln>
+        </p:spPr>
+        <p:txBody>
+          <a:bodyPr vert="horz" wrap="square" lIns="0" tIns="0" rIns="0" bIns="0" rtlCol="0" anchor="ctr" anchorCtr="0"/>
+          <a:lstStyle>
+            <a:defPPr marR="0" lvl="0" algn="l" rtl="0">
+              <a:lnSpc>
+                <a:spcPct val="100000"/>
+              </a:lnSpc>
+              <a:spcBef>
+                <a:spcPts val="0"/>
+              </a:spcBef>
+              <a:spcAft>
+                <a:spcPts val="0"/>
+              </a:spcAft>
+            </a:defPPr>
+            <a:lvl1pPr marR="0" lvl="0" algn="l" rtl="0">
+              <a:lnSpc>
+                <a:spcPct val="100000"/>
+              </a:lnSpc>
+              <a:spcBef>
+                <a:spcPts val="0"/>
+              </a:spcBef>
+              <a:spcAft>
+                <a:spcPts val="0"/>
+              </a:spcAft>
+              <a:buClr>
+                <a:srgbClr val="000000"/>
+              </a:buClr>
+              <a:buFont typeface="Arial"/>
+              <a:defRPr sz="1400" b="0" i="0" u="none" strike="noStrike" cap="none">
+                <a:solidFill>
+                  <a:srgbClr val="000000"/>
+                </a:solidFill>
+                <a:latin typeface="Arial"/>
+                <a:ea typeface="Arial"/>
+                <a:cs typeface="Arial"/>
+                <a:sym typeface="Arial"/>
+              </a:defRPr>
+            </a:lvl1pPr>
+            <a:lvl2pPr marR="0" lvl="1" algn="l" rtl="0">
+              <a:lnSpc>
+                <a:spcPct val="100000"/>
+              </a:lnSpc>
+              <a:spcBef>
+                <a:spcPts val="0"/>
+              </a:spcBef>
+              <a:spcAft>
+                <a:spcPts val="0"/>
+              </a:spcAft>
+              <a:buClr>
+                <a:srgbClr val="000000"/>
+              </a:buClr>
+              <a:buFont typeface="Arial"/>
+              <a:defRPr sz="1400" b="0" i="0" u="none" strike="noStrike" cap="none">
+                <a:solidFill>
+                  <a:srgbClr val="000000"/>
+                </a:solidFill>
+                <a:latin typeface="Arial"/>
+                <a:ea typeface="Arial"/>
+                <a:cs typeface="Arial"/>
+                <a:sym typeface="Arial"/>
+              </a:defRPr>
+            </a:lvl2pPr>
+            <a:lvl3pPr marR="0" lvl="2" algn="l" rtl="0">
+              <a:lnSpc>
+                <a:spcPct val="100000"/>
+              </a:lnSpc>
+              <a:spcBef>
+                <a:spcPts val="0"/>
+              </a:spcBef>
+              <a:spcAft>
+                <a:spcPts val="0"/>
+              </a:spcAft>
+              <a:buClr>
+                <a:srgbClr val="000000"/>
+              </a:buClr>
+              <a:buFont typeface="Arial"/>
+              <a:defRPr sz="1400" b="0" i="0" u="none" strike="noStrike" cap="none">
+                <a:solidFill>
+                  <a:srgbClr val="000000"/>
+                </a:solidFill>
+                <a:latin typeface="Arial"/>
+                <a:ea typeface="Arial"/>
+                <a:cs typeface="Arial"/>
+                <a:sym typeface="Arial"/>
+              </a:defRPr>
+            </a:lvl3pPr>
+            <a:lvl4pPr marR="0" lvl="3" algn="l" rtl="0">
+              <a:lnSpc>
+                <a:spcPct val="100000"/>
+              </a:lnSpc>
+              <a:spcBef>
+                <a:spcPts val="0"/>
+              </a:spcBef>
+              <a:spcAft>
+                <a:spcPts val="0"/>
+              </a:spcAft>
+              <a:buClr>
+                <a:srgbClr val="000000"/>
+              </a:buClr>
+              <a:buFont typeface="Arial"/>
+              <a:defRPr sz="1400" b="0" i="0" u="none" strike="noStrike" cap="none">
+                <a:solidFill>
+                  <a:srgbClr val="000000"/>
+                </a:solidFill>
+                <a:latin typeface="Arial"/>
+                <a:ea typeface="Arial"/>
+                <a:cs typeface="Arial"/>
+                <a:sym typeface="Arial"/>
+              </a:defRPr>
+            </a:lvl4pPr>
+            <a:lvl5pPr marR="0" lvl="4" algn="l" rtl="0">
+              <a:lnSpc>
+                <a:spcPct val="100000"/>
+              </a:lnSpc>
+              <a:spcBef>
+                <a:spcPts val="0"/>
+              </a:spcBef>
+              <a:spcAft>
+                <a:spcPts val="0"/>
+              </a:spcAft>
+              <a:buClr>
+                <a:srgbClr val="000000"/>
+              </a:buClr>
+              <a:buFont typeface="Arial"/>
+              <a:defRPr sz="1400" b="0" i="0" u="none" strike="noStrike" cap="none">
+                <a:solidFill>
+                  <a:srgbClr val="000000"/>
+                </a:solidFill>
+                <a:latin typeface="Arial"/>
+                <a:ea typeface="Arial"/>
+                <a:cs typeface="Arial"/>
+                <a:sym typeface="Arial"/>
+              </a:defRPr>
+            </a:lvl5pPr>
+            <a:lvl6pPr marR="0" lvl="5" algn="l" rtl="0">
+              <a:lnSpc>
+                <a:spcPct val="100000"/>
+              </a:lnSpc>
+              <a:spcBef>
+                <a:spcPts val="0"/>
+              </a:spcBef>
+              <a:spcAft>
+                <a:spcPts val="0"/>
+              </a:spcAft>
+              <a:buClr>
+                <a:srgbClr val="000000"/>
+              </a:buClr>
+              <a:buFont typeface="Arial"/>
+              <a:defRPr sz="1400" b="0" i="0" u="none" strike="noStrike" cap="none">
+                <a:solidFill>
+                  <a:srgbClr val="000000"/>
+                </a:solidFill>
+                <a:latin typeface="Arial"/>
+                <a:ea typeface="Arial"/>
+                <a:cs typeface="Arial"/>
+                <a:sym typeface="Arial"/>
+              </a:defRPr>
+            </a:lvl6pPr>
+            <a:lvl7pPr marR="0" lvl="6" algn="l" rtl="0">
+              <a:lnSpc>
+                <a:spcPct val="100000"/>
+              </a:lnSpc>
+              <a:spcBef>
+                <a:spcPts val="0"/>
+              </a:spcBef>
+              <a:spcAft>
+                <a:spcPts val="0"/>
+              </a:spcAft>
+              <a:buClr>
+                <a:srgbClr val="000000"/>
+              </a:buClr>
+              <a:buFont typeface="Arial"/>
+              <a:defRPr sz="1400" b="0" i="0" u="none" strike="noStrike" cap="none">
+                <a:solidFill>
+                  <a:srgbClr val="000000"/>
+                </a:solidFill>
+                <a:latin typeface="Arial"/>
+                <a:ea typeface="Arial"/>
+                <a:cs typeface="Arial"/>
+                <a:sym typeface="Arial"/>
+              </a:defRPr>
+            </a:lvl7pPr>
+            <a:lvl8pPr marR="0" lvl="7" algn="l" rtl="0">
+              <a:lnSpc>
+                <a:spcPct val="100000"/>
+              </a:lnSpc>
+              <a:spcBef>
+                <a:spcPts val="0"/>
+              </a:spcBef>
+              <a:spcAft>
+                <a:spcPts val="0"/>
+              </a:spcAft>
+              <a:buClr>
+                <a:srgbClr val="000000"/>
+              </a:buClr>
+              <a:buFont typeface="Arial"/>
+              <a:defRPr sz="1400" b="0" i="0" u="none" strike="noStrike" cap="none">
+                <a:solidFill>
+                  <a:srgbClr val="000000"/>
+                </a:solidFill>
+                <a:latin typeface="Arial"/>
+                <a:ea typeface="Arial"/>
+                <a:cs typeface="Arial"/>
+                <a:sym typeface="Arial"/>
+              </a:defRPr>
+            </a:lvl8pPr>
+            <a:lvl9pPr marR="0" lvl="8" algn="l" rtl="0">
+              <a:lnSpc>
+                <a:spcPct val="100000"/>
+              </a:lnSpc>
+              <a:spcBef>
+                <a:spcPts val="0"/>
+              </a:spcBef>
+              <a:spcAft>
+                <a:spcPts val="0"/>
+              </a:spcAft>
+              <a:buClr>
+                <a:srgbClr val="000000"/>
+              </a:buClr>
+              <a:buFont typeface="Arial"/>
+              <a:defRPr sz="1400" b="0" i="0" u="none" strike="noStrike" cap="none">
+                <a:solidFill>
+                  <a:srgbClr val="000000"/>
+                </a:solidFill>
+                <a:latin typeface="Arial"/>
+                <a:ea typeface="Arial"/>
+                <a:cs typeface="Arial"/>
+                <a:sym typeface="Arial"/>
+              </a:defRPr>
+            </a:lvl9pPr>
+          </a:lstStyle>
+          <a:p>
+            <a:pPr indent="0">
+              <a:lnSpc>
+                <a:spcPct val="108333"/>
+              </a:lnSpc>
+              <a:defRPr/>
+            </a:pPr>
+            <a:r>
+              <a:rPr lang="en-US" sz="1800" dirty="0" err="1">
+                <a:solidFill>
+                  <a:schemeClr val="bg1"/>
+                </a:solidFill>
+                <a:latin typeface="+mn-lt"/>
+                <a:ea typeface="+mn-ea"/>
+                <a:cs typeface="+mn-cs"/>
+                <a:sym typeface="Roboto"/>
+              </a:rPr>
+              <a:t>实现分布式</a:t>
+            </a:r>
+            <a:r>
+              <a:rPr lang="en-US" sz="1800" dirty="0">
+                <a:solidFill>
+                  <a:schemeClr val="bg1"/>
+                </a:solidFill>
+                <a:latin typeface="+mn-lt"/>
+                <a:ea typeface="+mn-ea"/>
+                <a:cs typeface="+mn-cs"/>
+                <a:sym typeface="Roboto"/>
+              </a:rPr>
+              <a:t> KV </a:t>
+            </a:r>
+            <a:r>
+              <a:rPr lang="en-US" sz="1800" dirty="0" err="1">
+                <a:solidFill>
+                  <a:schemeClr val="bg1"/>
+                </a:solidFill>
+                <a:latin typeface="+mn-lt"/>
+                <a:ea typeface="+mn-ea"/>
+                <a:cs typeface="+mn-cs"/>
+                <a:sym typeface="Roboto"/>
+              </a:rPr>
+              <a:t>数据库原型，实验证明混合隔离机制在保证正确性前提下显著提升了系统性能</a:t>
+            </a:r>
+            <a:r>
+              <a:rPr lang="en-US" sz="1800" dirty="0">
+                <a:solidFill>
+                  <a:schemeClr val="bg1"/>
+                </a:solidFill>
+                <a:latin typeface="+mn-lt"/>
+                <a:ea typeface="+mn-ea"/>
+                <a:cs typeface="+mn-cs"/>
+                <a:sym typeface="Roboto"/>
+              </a:rPr>
+              <a:t>。</a:t>
+            </a:r>
+            <a:endParaRPr lang="en-US" sz="1800" dirty="0">
+              <a:solidFill>
+                <a:schemeClr val="bg1"/>
+              </a:solidFill>
+              <a:latin typeface="+mn-lt"/>
+              <a:ea typeface="+mn-ea"/>
+              <a:cs typeface="+mn-cs"/>
+            </a:endParaRPr>
+          </a:p>
+        </p:txBody>
+      </p:sp>
+      <p:sp>
+        <p:nvSpPr>
+          <p:cNvPr id="30" name="AutoShape 16">
+            <a:extLst>
+              <a:ext uri="{FF2B5EF4-FFF2-40B4-BE49-F238E27FC236}">
+                <a16:creationId xmlns:a16="http://schemas.microsoft.com/office/drawing/2014/main" id="{E79140A1-EF0D-5B27-A7AB-C554EF0AFB96}"/>
+              </a:ext>
+            </a:extLst>
+          </p:cNvPr>
+          <p:cNvSpPr/>
+          <p:nvPr/>
+        </p:nvSpPr>
+        <p:spPr>
+          <a:xfrm>
+            <a:off x="762000" y="5394325"/>
+            <a:ext cx="10668000" cy="12700"/>
+          </a:xfrm>
+          <a:prstGeom prst="roundRect">
+            <a:avLst>
+              <a:gd name="adj" fmla="val 0"/>
+            </a:avLst>
+          </a:prstGeom>
+          <a:solidFill>
+            <a:srgbClr val="8892B0">
+              <a:alpha val="20000"/>
+            </a:srgbClr>
+          </a:solidFill>
+          <a:ln w="25400" cap="flat" cmpd="sng">
+            <a:noFill/>
+            <a:prstDash val="solid"/>
+            <a:round/>
+          </a:ln>
+        </p:spPr>
+        <p:txBody>
+          <a:bodyPr vert="horz" wrap="square" lIns="63500" tIns="63500" rIns="63500" bIns="63500" rtlCol="0" anchor="ctr"/>
+          <a:lstStyle>
+            <a:defPPr marR="0" lvl="0" algn="l" rtl="0">
+              <a:lnSpc>
+                <a:spcPct val="100000"/>
+              </a:lnSpc>
+              <a:spcBef>
+                <a:spcPts val="0"/>
+              </a:spcBef>
+              <a:spcAft>
+                <a:spcPts val="0"/>
+              </a:spcAft>
+            </a:defPPr>
+            <a:lvl1pPr marR="0" lvl="0" algn="l" rtl="0">
+              <a:lnSpc>
+                <a:spcPct val="100000"/>
+              </a:lnSpc>
+              <a:spcBef>
+                <a:spcPts val="0"/>
+              </a:spcBef>
+              <a:spcAft>
+                <a:spcPts val="0"/>
+              </a:spcAft>
+              <a:buClr>
+                <a:srgbClr val="000000"/>
+              </a:buClr>
+              <a:buFont typeface="Arial"/>
+              <a:defRPr sz="1400" b="0" i="0" u="none" strike="noStrike" cap="none">
+                <a:solidFill>
+                  <a:srgbClr val="000000"/>
+                </a:solidFill>
+                <a:latin typeface="Arial"/>
+                <a:ea typeface="Arial"/>
+                <a:cs typeface="Arial"/>
+                <a:sym typeface="Arial"/>
+              </a:defRPr>
+            </a:lvl1pPr>
+            <a:lvl2pPr marR="0" lvl="1" algn="l" rtl="0">
+              <a:lnSpc>
+                <a:spcPct val="100000"/>
+              </a:lnSpc>
+              <a:spcBef>
+                <a:spcPts val="0"/>
+              </a:spcBef>
+              <a:spcAft>
+                <a:spcPts val="0"/>
+              </a:spcAft>
+              <a:buClr>
+                <a:srgbClr val="000000"/>
+              </a:buClr>
+              <a:buFont typeface="Arial"/>
+              <a:defRPr sz="1400" b="0" i="0" u="none" strike="noStrike" cap="none">
+                <a:solidFill>
+                  <a:srgbClr val="000000"/>
+                </a:solidFill>
+                <a:latin typeface="Arial"/>
+                <a:ea typeface="Arial"/>
+                <a:cs typeface="Arial"/>
+                <a:sym typeface="Arial"/>
+              </a:defRPr>
+            </a:lvl2pPr>
+            <a:lvl3pPr marR="0" lvl="2" algn="l" rtl="0">
+              <a:lnSpc>
+                <a:spcPct val="100000"/>
+              </a:lnSpc>
+              <a:spcBef>
+                <a:spcPts val="0"/>
+              </a:spcBef>
+              <a:spcAft>
+                <a:spcPts val="0"/>
+              </a:spcAft>
+              <a:buClr>
+                <a:srgbClr val="000000"/>
+              </a:buClr>
+              <a:buFont typeface="Arial"/>
+              <a:defRPr sz="1400" b="0" i="0" u="none" strike="noStrike" cap="none">
+                <a:solidFill>
+                  <a:srgbClr val="000000"/>
+                </a:solidFill>
+                <a:latin typeface="Arial"/>
+                <a:ea typeface="Arial"/>
+                <a:cs typeface="Arial"/>
+                <a:sym typeface="Arial"/>
+              </a:defRPr>
+            </a:lvl3pPr>
+            <a:lvl4pPr marR="0" lvl="3" algn="l" rtl="0">
+              <a:lnSpc>
+                <a:spcPct val="100000"/>
+              </a:lnSpc>
+              <a:spcBef>
+                <a:spcPts val="0"/>
+              </a:spcBef>
+              <a:spcAft>
+                <a:spcPts val="0"/>
+              </a:spcAft>
+              <a:buClr>
+                <a:srgbClr val="000000"/>
+              </a:buClr>
+              <a:buFont typeface="Arial"/>
+              <a:defRPr sz="1400" b="0" i="0" u="none" strike="noStrike" cap="none">
+                <a:solidFill>
+                  <a:srgbClr val="000000"/>
+                </a:solidFill>
+                <a:latin typeface="Arial"/>
+                <a:ea typeface="Arial"/>
+                <a:cs typeface="Arial"/>
+                <a:sym typeface="Arial"/>
+              </a:defRPr>
+            </a:lvl4pPr>
+            <a:lvl5pPr marR="0" lvl="4" algn="l" rtl="0">
+              <a:lnSpc>
+                <a:spcPct val="100000"/>
+              </a:lnSpc>
+              <a:spcBef>
+                <a:spcPts val="0"/>
+              </a:spcBef>
+              <a:spcAft>
+                <a:spcPts val="0"/>
+              </a:spcAft>
+              <a:buClr>
+                <a:srgbClr val="000000"/>
+              </a:buClr>
+              <a:buFont typeface="Arial"/>
+              <a:defRPr sz="1400" b="0" i="0" u="none" strike="noStrike" cap="none">
+                <a:solidFill>
+                  <a:srgbClr val="000000"/>
+                </a:solidFill>
+                <a:latin typeface="Arial"/>
+                <a:ea typeface="Arial"/>
+                <a:cs typeface="Arial"/>
+                <a:sym typeface="Arial"/>
+              </a:defRPr>
+            </a:lvl5pPr>
+            <a:lvl6pPr marR="0" lvl="5" algn="l" rtl="0">
+              <a:lnSpc>
+                <a:spcPct val="100000"/>
+              </a:lnSpc>
+              <a:spcBef>
+                <a:spcPts val="0"/>
+              </a:spcBef>
+              <a:spcAft>
+                <a:spcPts val="0"/>
+              </a:spcAft>
+              <a:buClr>
+                <a:srgbClr val="000000"/>
+              </a:buClr>
+              <a:buFont typeface="Arial"/>
+              <a:defRPr sz="1400" b="0" i="0" u="none" strike="noStrike" cap="none">
+                <a:solidFill>
+                  <a:srgbClr val="000000"/>
+                </a:solidFill>
+                <a:latin typeface="Arial"/>
+                <a:ea typeface="Arial"/>
+                <a:cs typeface="Arial"/>
+                <a:sym typeface="Arial"/>
+              </a:defRPr>
+            </a:lvl6pPr>
+            <a:lvl7pPr marR="0" lvl="6" algn="l" rtl="0">
+              <a:lnSpc>
+                <a:spcPct val="100000"/>
+              </a:lnSpc>
+              <a:spcBef>
+                <a:spcPts val="0"/>
+              </a:spcBef>
+              <a:spcAft>
+                <a:spcPts val="0"/>
+              </a:spcAft>
+              <a:buClr>
+                <a:srgbClr val="000000"/>
+              </a:buClr>
+              <a:buFont typeface="Arial"/>
+              <a:defRPr sz="1400" b="0" i="0" u="none" strike="noStrike" cap="none">
+                <a:solidFill>
+                  <a:srgbClr val="000000"/>
+                </a:solidFill>
+                <a:latin typeface="Arial"/>
+                <a:ea typeface="Arial"/>
+                <a:cs typeface="Arial"/>
+                <a:sym typeface="Arial"/>
+              </a:defRPr>
+            </a:lvl7pPr>
+            <a:lvl8pPr marR="0" lvl="7" algn="l" rtl="0">
+              <a:lnSpc>
+                <a:spcPct val="100000"/>
+              </a:lnSpc>
+              <a:spcBef>
+                <a:spcPts val="0"/>
+              </a:spcBef>
+              <a:spcAft>
+                <a:spcPts val="0"/>
+              </a:spcAft>
+              <a:buClr>
+                <a:srgbClr val="000000"/>
+              </a:buClr>
+              <a:buFont typeface="Arial"/>
+              <a:defRPr sz="1400" b="0" i="0" u="none" strike="noStrike" cap="none">
+                <a:solidFill>
+                  <a:srgbClr val="000000"/>
+                </a:solidFill>
+                <a:latin typeface="Arial"/>
+                <a:ea typeface="Arial"/>
+                <a:cs typeface="Arial"/>
+                <a:sym typeface="Arial"/>
+              </a:defRPr>
+            </a:lvl8pPr>
+            <a:lvl9pPr marR="0" lvl="8" algn="l" rtl="0">
+              <a:lnSpc>
+                <a:spcPct val="100000"/>
+              </a:lnSpc>
+              <a:spcBef>
+                <a:spcPts val="0"/>
+              </a:spcBef>
+              <a:spcAft>
+                <a:spcPts val="0"/>
+              </a:spcAft>
+              <a:buClr>
+                <a:srgbClr val="000000"/>
+              </a:buClr>
+              <a:buFont typeface="Arial"/>
+              <a:defRPr sz="1400" b="0" i="0" u="none" strike="noStrike" cap="none">
+                <a:solidFill>
+                  <a:srgbClr val="000000"/>
+                </a:solidFill>
+                <a:latin typeface="Arial"/>
+                <a:ea typeface="Arial"/>
+                <a:cs typeface="Arial"/>
+                <a:sym typeface="Arial"/>
+              </a:defRPr>
+            </a:lvl9pPr>
+          </a:lstStyle>
+          <a:p>
+            <a:pPr algn="ctr">
+              <a:defRPr/>
+            </a:pPr>
+            <a:endParaRPr/>
+          </a:p>
+        </p:txBody>
+      </p:sp>
+      <p:sp>
+        <p:nvSpPr>
+          <p:cNvPr id="32" name="矩形 31">
+            <a:extLst>
+              <a:ext uri="{FF2B5EF4-FFF2-40B4-BE49-F238E27FC236}">
+                <a16:creationId xmlns:a16="http://schemas.microsoft.com/office/drawing/2014/main" id="{2D0AF300-302F-442E-5C91-35DBCEB255AC}"/>
+              </a:ext>
+            </a:extLst>
+          </p:cNvPr>
+          <p:cNvSpPr/>
+          <p:nvPr/>
+        </p:nvSpPr>
+        <p:spPr>
+          <a:xfrm>
+            <a:off x="11079956" y="6422231"/>
+            <a:ext cx="435769" cy="435769"/>
+          </a:xfrm>
+          <a:prstGeom prst="rect">
+            <a:avLst/>
+          </a:prstGeom>
+          <a:solidFill>
+            <a:srgbClr val="870078"/>
+          </a:solidFill>
+        </p:spPr>
+        <p:style>
+          <a:lnRef idx="2">
+            <a:schemeClr val="accent1">
+              <a:shade val="15000"/>
+            </a:schemeClr>
+          </a:lnRef>
+          <a:fillRef idx="1">
+            <a:schemeClr val="accent1"/>
+          </a:fillRef>
+          <a:effectRef idx="0">
+            <a:schemeClr val="accent1"/>
+          </a:effectRef>
+          <a:fontRef idx="minor">
+            <a:schemeClr val="lt1"/>
+          </a:fontRef>
+        </p:style>
+        <p:txBody>
+          <a:bodyPr rtlCol="0" anchor="ctr"/>
+          <a:lstStyle/>
+          <a:p>
+            <a:pPr algn="ctr"/>
+            <a:r>
+              <a:rPr lang="en-US" altLang="zh-CN" dirty="0"/>
+              <a:t>29</a:t>
+            </a:r>
+            <a:endParaRPr lang="zh-CN" altLang="en-US" dirty="0"/>
+          </a:p>
+        </p:txBody>
+      </p:sp>
+    </p:spTree>
+    <p:extLst>
+      <p:ext uri="{BB962C8B-B14F-4D97-AF65-F5344CB8AC3E}">
+        <p14:creationId xmlns:p14="http://schemas.microsoft.com/office/powerpoint/2010/main" val="3253594666"/>
+      </p:ext>
+    </p:extLst>
+  </p:cSld>
+  <p:clrMapOvr>
+    <a:masterClrMapping/>
+  </p:clrMapOvr>
+  <mc:AlternateContent xmlns:mc="http://schemas.openxmlformats.org/markup-compatibility/2006" xmlns:p14="http://schemas.microsoft.com/office/powerpoint/2010/main">
+    <mc:Choice Requires="p14">
+      <p:transition p14:dur="10"/>
+    </mc:Choice>
+    <mc:Fallback xmlns="">
+      <p:transition/>
+    </mc:Fallback>
+  </mc:AlternateContent>
+</p:sld>
+</file>
+
+<file path=ppt/slides/slide31.xml><?xml version="1.0" encoding="utf-8"?>
+<p:sld xmlns:a="http://schemas.openxmlformats.org/drawingml/2006/main" xmlns:r="http://schemas.openxmlformats.org/officeDocument/2006/relationships" xmlns:p="http://schemas.openxmlformats.org/presentationml/2006/main">
+  <p:cSld>
+    <p:spTree>
+      <p:nvGrpSpPr>
+        <p:cNvPr id="1" name=""/>
+        <p:cNvGrpSpPr/>
+        <p:nvPr/>
+      </p:nvGrpSpPr>
+      <p:grpSpPr>
+        <a:xfrm>
+          <a:off x="0" y="0"/>
+          <a:ext cx="0" cy="0"/>
+          <a:chOff x="0" y="0"/>
+          <a:chExt cx="0" cy="0"/>
+        </a:xfrm>
+      </p:grpSpPr>
+      <p:sp>
+        <p:nvSpPr>
           <p:cNvPr id="30" name="AutoShape 4">
             <a:extLst>
               <a:ext uri="{FF2B5EF4-FFF2-40B4-BE49-F238E27FC236}">
@@ -37155,7 +37336,7 @@
 </p:sld>
 </file>
 
-<file path=ppt/slides/slide31.xml><?xml version="1.0" encoding="utf-8"?>
+<file path=ppt/slides/slide32.xml><?xml version="1.0" encoding="utf-8"?>
 <p:sld xmlns:a="http://schemas.openxmlformats.org/drawingml/2006/main" xmlns:r="http://schemas.openxmlformats.org/officeDocument/2006/relationships" xmlns:p="http://schemas.openxmlformats.org/presentationml/2006/main">
   <p:cSld>
     <p:spTree>
@@ -45398,8 +45579,8 @@
             </a:prstGeom>
           </p:spPr>
         </p:pic>
-        <mc:AlternateContent xmlns:mc="http://schemas.openxmlformats.org/markup-compatibility/2006">
-          <mc:Choice xmlns:a14="http://schemas.microsoft.com/office/drawing/2010/main" Requires="a14">
+        <mc:AlternateContent xmlns:mc="http://schemas.openxmlformats.org/markup-compatibility/2006" xmlns:a14="http://schemas.microsoft.com/office/drawing/2010/main">
+          <mc:Choice Requires="a14">
             <p:sp>
               <p:nvSpPr>
                 <p:cNvPr id="7" name="AutoShape 5">
@@ -45698,7 +45879,7 @@
               </p:txBody>
             </p:sp>
           </mc:Choice>
-          <mc:Fallback>
+          <mc:Fallback xmlns="">
             <p:sp>
               <p:nvSpPr>
                 <p:cNvPr id="7" name="AutoShape 5">
@@ -46365,8 +46546,8 @@
             </a:prstGeom>
           </p:spPr>
         </p:pic>
-        <mc:AlternateContent xmlns:mc="http://schemas.openxmlformats.org/markup-compatibility/2006">
-          <mc:Choice xmlns:a14="http://schemas.microsoft.com/office/drawing/2010/main" Requires="a14">
+        <mc:AlternateContent xmlns:mc="http://schemas.openxmlformats.org/markup-compatibility/2006" xmlns:a14="http://schemas.microsoft.com/office/drawing/2010/main">
+          <mc:Choice Requires="a14">
             <p:sp>
               <p:nvSpPr>
                 <p:cNvPr id="11" name="AutoShape 9">
@@ -46665,7 +46846,7 @@
               </p:txBody>
             </p:sp>
           </mc:Choice>
-          <mc:Fallback>
+          <mc:Fallback xmlns="">
             <p:sp>
               <p:nvSpPr>
                 <p:cNvPr id="11" name="AutoShape 9">
@@ -50094,8 +50275,8 @@
           </a:prstGeom>
         </p:spPr>
       </p:pic>
-      <mc:AlternateContent xmlns:mc="http://schemas.openxmlformats.org/markup-compatibility/2006">
-        <mc:Choice xmlns:a14="http://schemas.microsoft.com/office/drawing/2010/main" Requires="a14">
+      <mc:AlternateContent xmlns:mc="http://schemas.openxmlformats.org/markup-compatibility/2006" xmlns:a14="http://schemas.microsoft.com/office/drawing/2010/main">
+        <mc:Choice Requires="a14">
           <p:sp>
             <p:nvSpPr>
               <p:cNvPr id="34" name="AutoShape 9">
@@ -50388,7 +50569,7 @@
             </p:txBody>
           </p:sp>
         </mc:Choice>
-        <mc:Fallback>
+        <mc:Fallback xmlns="">
           <p:sp>
             <p:nvSpPr>
               <p:cNvPr id="34" name="AutoShape 9">
@@ -50761,8 +50942,8 @@
           </a:p>
         </p:txBody>
       </p:sp>
-      <mc:AlternateContent xmlns:mc="http://schemas.openxmlformats.org/markup-compatibility/2006">
-        <mc:Choice xmlns:a14="http://schemas.microsoft.com/office/drawing/2010/main" Requires="a14">
+      <mc:AlternateContent xmlns:mc="http://schemas.openxmlformats.org/markup-compatibility/2006" xmlns:a14="http://schemas.microsoft.com/office/drawing/2010/main">
+        <mc:Choice Requires="a14">
           <p:sp>
             <p:nvSpPr>
               <p:cNvPr id="37" name="AutoShape 9">
@@ -51061,7 +51242,7 @@
             </p:txBody>
           </p:sp>
         </mc:Choice>
-        <mc:Fallback>
+        <mc:Fallback xmlns="">
           <p:sp>
             <p:nvSpPr>
               <p:cNvPr id="37" name="AutoShape 9">
@@ -51111,8 +51292,8 @@
           </p:sp>
         </mc:Fallback>
       </mc:AlternateContent>
-      <mc:AlternateContent xmlns:mc="http://schemas.openxmlformats.org/markup-compatibility/2006">
-        <mc:Choice xmlns:a14="http://schemas.microsoft.com/office/drawing/2010/main" Requires="a14">
+      <mc:AlternateContent xmlns:mc="http://schemas.openxmlformats.org/markup-compatibility/2006" xmlns:a14="http://schemas.microsoft.com/office/drawing/2010/main">
+        <mc:Choice Requires="a14">
           <p:sp>
             <p:nvSpPr>
               <p:cNvPr id="41" name="文本框 40">
@@ -51141,6 +51322,7 @@
               </a:bodyPr>
               <a:lstStyle/>
               <a:p>
+                <a:pPr/>
                 <a14:m>
                   <m:oMathPara xmlns:m="http://schemas.openxmlformats.org/officeDocument/2006/math">
                     <m:oMathParaPr>
@@ -51156,11 +51338,12 @@
                     </m:oMath>
                   </m:oMathPara>
                 </a14:m>
+                <a:endParaRPr/>
               </a:p>
             </p:txBody>
           </p:sp>
         </mc:Choice>
-        <mc:Fallback>
+        <mc:Fallback xmlns="">
           <p:sp>
             <p:nvSpPr>
               <p:cNvPr id="41" name="文本框 40">
